--- a/presentations/mid_term_202606/04_slides_draft/中間発表_スライド_v2.pptx
+++ b/presentations/mid_term_202606/04_slides_draft/中間発表_スライド_v2.pptx
@@ -5,22 +5,23 @@
     <p:sldMasterId id="2147483648" r:id="rId1"/>
   </p:sldMasterIdLst>
   <p:notesMasterIdLst>
-    <p:notesMasterId r:id="rId15"/>
+    <p:notesMasterId r:id="rId16"/>
   </p:notesMasterIdLst>
   <p:sldIdLst>
-    <p:sldId id="389" r:id="rId2"/>
-    <p:sldId id="356" r:id="rId3"/>
-    <p:sldId id="414" r:id="rId22"/>
-    <p:sldId id="415" r:id="rId23"/>
-    <p:sldId id="416" r:id="rId24"/>
-    <p:sldId id="417" r:id="rId25"/>
-    <p:sldId id="418" r:id="rId26"/>
-    <p:sldId id="419" r:id="rId27"/>
-    <p:sldId id="420" r:id="rId28"/>
-    <p:sldId id="421" r:id="rId29"/>
-    <p:sldId id="422" r:id="rId30"/>
-    <p:sldId id="423" r:id="rId31"/>
-    <p:sldId id="424" r:id="rId32"/>
+    <p:sldId id="425" r:id="rId2"/>
+    <p:sldId id="426" r:id="rId3"/>
+    <p:sldId id="388" r:id="rId4"/>
+    <p:sldId id="414" r:id="rId5"/>
+    <p:sldId id="415" r:id="rId6"/>
+    <p:sldId id="416" r:id="rId7"/>
+    <p:sldId id="417" r:id="rId8"/>
+    <p:sldId id="418" r:id="rId9"/>
+    <p:sldId id="419" r:id="rId10"/>
+    <p:sldId id="420" r:id="rId11"/>
+    <p:sldId id="421" r:id="rId12"/>
+    <p:sldId id="422" r:id="rId13"/>
+    <p:sldId id="423" r:id="rId14"/>
+    <p:sldId id="424" r:id="rId15"/>
   </p:sldIdLst>
   <p:sldSz cx="9906000" cy="6858000" type="A4"/>
   <p:notesSz cx="6858000" cy="9874250"/>
@@ -297,7 +298,7 @@
       <p15:notesGuideLst xmlns:p15="http://schemas.microsoft.com/office/powerpoint/2012/main"/>
     </p:ext>
     <p:ext uri="GoogleSlidesCustomDataVersion2">
-      <go:slidesCustomData xmlns="" xmlns:mc="http://schemas.openxmlformats.org/markup-compatibility/2006" xmlns:mv="urn:schemas-microsoft-com:mac:vml" xmlns:c="http://schemas.openxmlformats.org/drawingml/2006/chart" xmlns:dgm="http://schemas.openxmlformats.org/drawingml/2006/diagram" xmlns:o="urn:schemas-microsoft-com:office:office" xmlns:v="urn:schemas-microsoft-com:vml" xmlns:pvml="urn:schemas-microsoft-com:office:powerpoint" xmlns:com="http://schemas.openxmlformats.org/drawingml/2006/compatibility" xmlns:p14="http://schemas.microsoft.com/office/powerpoint/2010/main" xmlns:p15="http://schemas.microsoft.com/office/powerpoint/2012/main" xmlns:ahyp="http://schemas.microsoft.com/office/drawing/2018/hyperlinkcolor" xmlns:go="http://customooxmlschemas.google.com/" r:id="rId51" roundtripDataSignature="AMtx7mhGZ7uZ5vFhmAr7D05oSO2hGt9NUg=="/>
+      <go:slidesCustomData xmlns:go="http://customooxmlschemas.google.com/" xmlns:ahyp="http://schemas.microsoft.com/office/drawing/2018/hyperlinkcolor" xmlns:p15="http://schemas.microsoft.com/office/powerpoint/2012/main" xmlns:p14="http://schemas.microsoft.com/office/powerpoint/2010/main" xmlns:com="http://schemas.openxmlformats.org/drawingml/2006/compatibility" xmlns:pvml="urn:schemas-microsoft-com:office:powerpoint" xmlns:v="urn:schemas-microsoft-com:vml" xmlns:o="urn:schemas-microsoft-com:office:office" xmlns:dgm="http://schemas.openxmlformats.org/drawingml/2006/diagram" xmlns:c="http://schemas.openxmlformats.org/drawingml/2006/chart" xmlns:mv="urn:schemas-microsoft-com:mac:vml" xmlns:mc="http://schemas.openxmlformats.org/markup-compatibility/2006" xmlns="" r:id="rId51" roundtripDataSignature="AMtx7mhGZ7uZ5vFhmAr7D05oSO2hGt9NUg=="/>
     </p:ext>
   </p:extLst>
 </p:presentation>
@@ -309,12 +310,196 @@
 </p188:authorLst>
 </file>
 
-<file path=ppt/comments/modernComment_185_697818E7.xml><?xml version="1.0" encoding="utf-8"?>
+<file path=ppt/comments/modernComment_184_484A4A.xml><?xml version="1.0" encoding="utf-8"?>
+<p188:cmLst xmlns:a="http://schemas.openxmlformats.org/drawingml/2006/main" xmlns:r="http://schemas.openxmlformats.org/officeDocument/2006/relationships" xmlns:p188="http://schemas.microsoft.com/office/powerpoint/2018/8/main">
+  <p188:cm id="{ED40950E-7C22-224D-9946-B26097C0E8D0}" authorId="{8E89181F-4E05-7DF9-4E74-3E4183689D47}" created="2025-01-30T06:56:12.892">
+    <ac:deMkLst xmlns:ac="http://schemas.microsoft.com/office/drawing/2013/main/command">
+      <pc:docMk xmlns:pc="http://schemas.microsoft.com/office/powerpoint/2013/main/command"/>
+      <pc:sldMk xmlns:pc="http://schemas.microsoft.com/office/powerpoint/2013/main/command" cId="4737610" sldId="388"/>
+      <ac:picMk id="61" creationId="{D71EA5ED-C488-B94E-534D-ED24647218DE}"/>
+    </ac:deMkLst>
+    <p188:txBody>
+      <a:bodyPr/>
+      <a:lstStyle/>
+      <a:p>
+        <a:r>
+          <a:rPr lang="ja-JP" altLang="en-US"/>
+          <a:t>\mathbb{V}(j(t)) = \cfrac{\sqrt{\int_{f_1}^{f_2} 10^{\frac{dBc}{10}}df}}{2 \pi f_c}</a:t>
+        </a:r>
+      </a:p>
+    </p188:txBody>
+  </p188:cm>
+  <p188:cm id="{1130F69C-6223-EC47-877E-6583B35D83A4}" authorId="{8E89181F-4E05-7DF9-4E74-3E4183689D47}" created="2025-01-30T07:02:34.324">
+    <ac:deMkLst xmlns:ac="http://schemas.microsoft.com/office/drawing/2013/main/command">
+      <pc:docMk xmlns:pc="http://schemas.microsoft.com/office/powerpoint/2013/main/command"/>
+      <pc:sldMk xmlns:pc="http://schemas.microsoft.com/office/powerpoint/2013/main/command" cId="4737610" sldId="388"/>
+      <ac:picMk id="62" creationId="{916ED799-CAF8-F4B3-828F-59176BCF743A}"/>
+    </ac:deMkLst>
+    <p188:txBody>
+      <a:bodyPr/>
+      <a:lstStyle/>
+      <a:p>
+        <a:r>
+          <a:rPr lang="ja-JP" altLang="en-US"/>
+          <a:t>A_0 cos(\omega (t + j(t)) \approx A_0 \cos\omega t - A_0\omega j(t)\sin \omega t</a:t>
+        </a:r>
+      </a:p>
+    </p188:txBody>
+  </p188:cm>
+  <p188:cm id="{8375A50A-D565-6E45-8BC3-5AC60E55DD23}" authorId="{8E89181F-4E05-7DF9-4E74-3E4183689D47}" created="2025-01-30T07:09:01.560">
+    <ac:deMkLst xmlns:ac="http://schemas.microsoft.com/office/drawing/2013/main/command">
+      <pc:docMk xmlns:pc="http://schemas.microsoft.com/office/powerpoint/2013/main/command"/>
+      <pc:sldMk xmlns:pc="http://schemas.microsoft.com/office/powerpoint/2013/main/command" cId="4737610" sldId="388"/>
+      <ac:picMk id="63" creationId="{86061A11-EC5A-FDCC-D25A-4038E87F2A68}"/>
+    </ac:deMkLst>
+    <p188:txBody>
+      <a:bodyPr/>
+      <a:lstStyle/>
+      <a:p>
+        <a:r>
+          <a:rPr lang="ja-JP" altLang="en-US"/>
+          <a:t>Pc = (A_0 cos\omega t)^2 = \cfrac{A_0^2}{2} </a:t>
+        </a:r>
+      </a:p>
+    </p188:txBody>
+  </p188:cm>
+  <p188:cm id="{6EAEA4E3-6FB4-1040-A61B-BB24F3EAC473}" authorId="{8E89181F-4E05-7DF9-4E74-3E4183689D47}" created="2025-01-30T07:10:47.294">
+    <ac:deMkLst xmlns:ac="http://schemas.microsoft.com/office/drawing/2013/main/command">
+      <pc:docMk xmlns:pc="http://schemas.microsoft.com/office/powerpoint/2013/main/command"/>
+      <pc:sldMk xmlns:pc="http://schemas.microsoft.com/office/powerpoint/2013/main/command" cId="4737610" sldId="388"/>
+      <ac:picMk id="64" creationId="{79100334-29CB-0FFD-DBA3-CE530FD52CE2}"/>
+    </ac:deMkLst>
+    <p188:txBody>
+      <a:bodyPr/>
+      <a:lstStyle/>
+      <a:p>
+        <a:r>
+          <a:rPr lang="ja-JP" altLang="en-US"/>
+          <a:t>P_{jitter} = (A_0\omega j(t)\sin \omega t)^2 = \cfrac{A_0^2 \omega^2 \mathbb{V}[j(t)]}{2}</a:t>
+        </a:r>
+      </a:p>
+    </p188:txBody>
+  </p188:cm>
+  <p188:cm id="{F2AB3BC8-9B7B-A64C-8501-AF71A30DBF34}" authorId="{8E89181F-4E05-7DF9-4E74-3E4183689D47}" created="2025-01-30T07:32:40.915">
+    <ac:deMkLst xmlns:ac="http://schemas.microsoft.com/office/drawing/2013/main/command">
+      <pc:docMk xmlns:pc="http://schemas.microsoft.com/office/powerpoint/2013/main/command"/>
+      <pc:sldMk xmlns:pc="http://schemas.microsoft.com/office/powerpoint/2013/main/command" cId="4737610" sldId="388"/>
+      <ac:picMk id="65" creationId="{5919A426-2E8E-B793-235E-4067E32CEFE0}"/>
+    </ac:deMkLst>
+    <p188:txBody>
+      <a:bodyPr/>
+      <a:lstStyle/>
+      <a:p>
+        <a:r>
+          <a:rPr lang="ja-JP" altLang="en-US"/>
+          <a:t>L(f) = \cfrac{1}{2} \times 10 \log_{10}{\frac{P_{jitter}}{P_c}} =\cfrac{1}{2} \times 10 \log_{10} \omega^2 \mathbb{V}(j(t))</a:t>
+        </a:r>
+      </a:p>
+    </p188:txBody>
+  </p188:cm>
+  <p188:cm id="{62A4E2A4-DF3A-7C4C-80E8-42AA7A5513B1}" authorId="{8E89181F-4E05-7DF9-4E74-3E4183689D47}" created="2025-01-30T07:36:00.051">
+    <ac:deMkLst xmlns:ac="http://schemas.microsoft.com/office/drawing/2013/main/command">
+      <pc:docMk xmlns:pc="http://schemas.microsoft.com/office/powerpoint/2013/main/command"/>
+      <pc:sldMk xmlns:pc="http://schemas.microsoft.com/office/powerpoint/2013/main/command" cId="4737610" sldId="388"/>
+      <ac:picMk id="66" creationId="{299064D2-5B71-6CAE-8C8C-3423B95B475C}"/>
+    </ac:deMkLst>
+    <p188:txBody>
+      <a:bodyPr/>
+      <a:lstStyle/>
+      <a:p>
+        <a:r>
+          <a:rPr lang="ja-JP" altLang="en-US"/>
+          <a:t>\sigma (j(t)) = \sqrt{\mathbb{V}(j(t))} = \cfrac{\sqrt{\int_{f_1}^{f_2} 10^{\frac{L(f)}{10}}df}}{2 \pi f_c}</a:t>
+        </a:r>
+      </a:p>
+    </p188:txBody>
+  </p188:cm>
+  <p188:cm id="{F7E804A0-C5A7-5C4E-BC6C-E97DD6AF922A}" authorId="{8E89181F-4E05-7DF9-4E74-3E4183689D47}" created="2025-01-31T08:07:15.765">
+    <ac:deMkLst xmlns:ac="http://schemas.microsoft.com/office/drawing/2013/main/command">
+      <pc:docMk xmlns:pc="http://schemas.microsoft.com/office/powerpoint/2013/main/command"/>
+      <pc:sldMk xmlns:pc="http://schemas.microsoft.com/office/powerpoint/2013/main/command" cId="4737610" sldId="388"/>
+      <ac:picMk id="4" creationId="{9C195C08-8BEE-1A31-ED96-7CE559B150E4}"/>
+    </ac:deMkLst>
+    <p188:txBody>
+      <a:bodyPr/>
+      <a:lstStyle/>
+      <a:p>
+        <a:r>
+          <a:rPr lang="ja-JP" altLang="en-US"/>
+          <a:t>L(f) = \mathcal{F} \left[\cfrac{1}{2} \times 10 \log_{10}{\frac{P_{jitter}}{P_c}}\right] =\mathcal{F} \left[\cfrac{1}{2} \times 10 \log_{10} \omega^2 \mathbb{V}(j(t))\right]</a:t>
+        </a:r>
+      </a:p>
+    </p188:txBody>
+  </p188:cm>
+  <p188:cm id="{C4B4C73C-927C-DF44-BEA1-D711E6FC1685}" authorId="{8E89181F-4E05-7DF9-4E74-3E4183689D47}" created="2025-01-31T08:31:31.288">
+    <ac:deMkLst xmlns:ac="http://schemas.microsoft.com/office/drawing/2013/main/command">
+      <pc:docMk xmlns:pc="http://schemas.microsoft.com/office/powerpoint/2013/main/command"/>
+      <pc:sldMk xmlns:pc="http://schemas.microsoft.com/office/powerpoint/2013/main/command" cId="4737610" sldId="388"/>
+      <ac:picMk id="6" creationId="{1C5B4EEA-7429-3F14-CD8F-55BB9DA6BB36}"/>
+    </ac:deMkLst>
+    <p188:txBody>
+      <a:bodyPr/>
+      <a:lstStyle/>
+      <a:p>
+        <a:r>
+          <a:rPr lang="ja-JP" altLang="en-US"/>
+          <a:t>L(f) = \mathcal{F} \left[10 \log_{10}{\frac{P_{jitter}}{P_c}}\right] =\mathcal{F} \left[10 \log_{10} \omega^2 \mathbb{V}(j(t))\right]</a:t>
+        </a:r>
+      </a:p>
+    </p188:txBody>
+  </p188:cm>
+  <p188:cm id="{63548348-4E7E-8347-A4D5-55FDD3CD38AB}" authorId="{8E89181F-4E05-7DF9-4E74-3E4183689D47}" created="2025-02-03T06:36:01.218">
+    <ac:deMkLst xmlns:ac="http://schemas.microsoft.com/office/drawing/2013/main/command">
+      <pc:docMk xmlns:pc="http://schemas.microsoft.com/office/powerpoint/2013/main/command"/>
+      <pc:sldMk xmlns:pc="http://schemas.microsoft.com/office/powerpoint/2013/main/command" cId="4737610" sldId="388"/>
+      <ac:picMk id="6" creationId="{1C5B4EEA-7429-3F14-CD8F-55BB9DA6BB36}"/>
+    </ac:deMkLst>
+    <p188:txBody>
+      <a:bodyPr/>
+      <a:lstStyle/>
+      <a:p>
+        <a:r>
+          <a:rPr lang="ja-JP" altLang="en-US"/>
+          <a:t>j(t)のフーリエ変換の形に直す</a:t>
+        </a:r>
+      </a:p>
+    </p188:txBody>
+    <p188:extLst>
+      <p:ext xmlns:p="http://schemas.openxmlformats.org/presentationml/2006/main" uri="{57CB4572-C831-44C2-8A1C-0ADB6CCDFE69}">
+        <p223:reactions xmlns:p223="http://schemas.microsoft.com/office/powerpoint/2022/03/main">
+          <p223:rxn type="👍">
+            <p223:instance time="2025-02-03T06:36:06.445" authorId="{8E89181F-4E05-7DF9-4E74-3E4183689D47}"/>
+          </p223:rxn>
+        </p223:reactions>
+      </p:ext>
+    </p188:extLst>
+  </p188:cm>
+  <p188:cm id="{0A02BBD2-C7A3-484F-B8E4-951C05844045}" authorId="{8E89181F-4E05-7DF9-4E74-3E4183689D47}" created="2025-02-04T01:47:56.475">
+    <ac:deMkLst xmlns:ac="http://schemas.microsoft.com/office/drawing/2013/main/command">
+      <pc:docMk xmlns:pc="http://schemas.microsoft.com/office/powerpoint/2013/main/command"/>
+      <pc:sldMk xmlns:pc="http://schemas.microsoft.com/office/powerpoint/2013/main/command" cId="4737610" sldId="388"/>
+      <ac:picMk id="4" creationId="{9C195C08-8BEE-1A31-ED96-7CE559B150E4}"/>
+    </ac:deMkLst>
+    <p188:txBody>
+      <a:bodyPr/>
+      <a:lstStyle/>
+      <a:p>
+        <a:r>
+          <a:rPr lang="ja-JP" altLang="en-US"/>
+          <a:t>L(f) =  10 \log_{10}{\frac{P_{jitter}}{P_c}} =10 \log_{10} \mathcal{F} \left[\omega^2 \mathbb{V}(j(t))\right]</a:t>
+        </a:r>
+      </a:p>
+    </p188:txBody>
+  </p188:cm>
+</p188:cmLst>
+</file>
+
+<file path=ppt/comments/modernComment_1A9_FA5B5987.xml><?xml version="1.0" encoding="utf-8"?>
 <p188:cmLst xmlns:a="http://schemas.openxmlformats.org/drawingml/2006/main" xmlns:r="http://schemas.openxmlformats.org/officeDocument/2006/relationships" xmlns:p188="http://schemas.microsoft.com/office/powerpoint/2018/8/main">
   <p188:cm id="{68B3DFEB-2883-A441-8412-D006ED897D7F}" authorId="{8E89181F-4E05-7DF9-4E74-3E4183689D47}" created="2025-01-30T04:22:47.416">
     <ac:deMkLst xmlns:ac="http://schemas.microsoft.com/office/drawing/2013/main/command">
       <pc:docMk xmlns:pc="http://schemas.microsoft.com/office/powerpoint/2013/main/command"/>
-      <pc:sldMk xmlns:pc="http://schemas.microsoft.com/office/powerpoint/2013/main/command" cId="1769478375" sldId="389"/>
+      <pc:sldMk xmlns:pc="http://schemas.microsoft.com/office/powerpoint/2013/main/command" cId="4200290695" sldId="425"/>
       <ac:spMk id="6" creationId="{685347EE-2965-C090-63D4-710A20C95107}"/>
     </ac:deMkLst>
     <p188:txBody>
@@ -331,7 +516,7 @@
   <p188:cm id="{8EAFE6AB-7B75-CA43-8DFC-98EC95167DA2}" authorId="{8E89181F-4E05-7DF9-4E74-3E4183689D47}" created="2025-01-30T04:23:02.183">
     <ac:deMkLst xmlns:ac="http://schemas.microsoft.com/office/drawing/2013/main/command">
       <pc:docMk xmlns:pc="http://schemas.microsoft.com/office/powerpoint/2013/main/command"/>
-      <pc:sldMk xmlns:pc="http://schemas.microsoft.com/office/powerpoint/2013/main/command" cId="1769478375" sldId="389"/>
+      <pc:sldMk xmlns:pc="http://schemas.microsoft.com/office/powerpoint/2013/main/command" cId="4200290695" sldId="425"/>
       <ac:spMk id="7" creationId="{71FC25AB-DEB9-83EB-9860-9B53C72373B7}"/>
     </ac:deMkLst>
     <p188:txBody>
@@ -1919,6 +2104,201 @@
     <p:extLst>
       <p:ext uri="{BB962C8B-B14F-4D97-AF65-F5344CB8AC3E}">
         <p14:creationId xmlns:p14="http://schemas.microsoft.com/office/powerpoint/2010/main" val="3401990587"/>
+      </p:ext>
+    </p:extLst>
+  </p:cSld>
+  <p:clrMapOvr>
+    <a:masterClrMapping/>
+  </p:clrMapOvr>
+</p:notes>
+</file>
+
+<file path=ppt/notesSlides/notesSlide2.xml><?xml version="1.0" encoding="utf-8"?>
+<p:notes xmlns:a="http://schemas.openxmlformats.org/drawingml/2006/main" xmlns:r="http://schemas.openxmlformats.org/officeDocument/2006/relationships" xmlns:p="http://schemas.openxmlformats.org/presentationml/2006/main">
+  <p:cSld>
+    <p:spTree>
+      <p:nvGrpSpPr>
+        <p:cNvPr id="1" name=""/>
+        <p:cNvGrpSpPr/>
+        <p:nvPr/>
+      </p:nvGrpSpPr>
+      <p:grpSpPr>
+        <a:xfrm>
+          <a:off x="0" y="0"/>
+          <a:ext cx="0" cy="0"/>
+          <a:chOff x="0" y="0"/>
+          <a:chExt cx="0" cy="0"/>
+        </a:xfrm>
+      </p:grpSpPr>
+      <p:sp>
+        <p:nvSpPr>
+          <p:cNvPr id="2" name="スライド イメージ プレースホルダー 1"/>
+          <p:cNvSpPr>
+            <a:spLocks noGrp="1" noRot="1" noChangeAspect="1"/>
+          </p:cNvSpPr>
+          <p:nvPr>
+            <p:ph type="sldImg"/>
+          </p:nvPr>
+        </p:nvSpPr>
+        <p:spPr/>
+      </p:sp>
+      <p:sp>
+        <p:nvSpPr>
+          <p:cNvPr id="3" name="ノート プレースホルダー 2"/>
+          <p:cNvSpPr>
+            <a:spLocks noGrp="1"/>
+          </p:cNvSpPr>
+          <p:nvPr>
+            <p:ph type="body" idx="1"/>
+          </p:nvPr>
+        </p:nvSpPr>
+        <p:spPr/>
+        <p:txBody>
+          <a:bodyPr/>
+          <a:lstStyle/>
+          <a:p>
+            <a:r>
+              <a:rPr kumimoji="1" lang="ja-JP" altLang="en-US" dirty="0"/>
+              <a:t>・</a:t>
+            </a:r>
+            <a:r>
+              <a:rPr kumimoji="1" lang="en-US" altLang="ja-JP" dirty="0"/>
+              <a:t>j(t)</a:t>
+            </a:r>
+            <a:r>
+              <a:rPr kumimoji="1" lang="ja-JP" altLang="en-US" dirty="0"/>
+              <a:t>では表現しづらいので、</a:t>
+            </a:r>
+            <a:r>
+              <a:rPr kumimoji="1" lang="en-US" altLang="ja-JP" dirty="0"/>
+              <a:t>L(f)</a:t>
+            </a:r>
+            <a:r>
+              <a:rPr kumimoji="1" lang="ja-JP" altLang="en-US" dirty="0"/>
+              <a:t>で表現する</a:t>
+            </a:r>
+            <a:endParaRPr kumimoji="1" lang="en-US" altLang="ja-JP" dirty="0"/>
+          </a:p>
+          <a:p>
+            <a:r>
+              <a:rPr kumimoji="1" lang="ja-JP" altLang="en-US" dirty="0"/>
+              <a:t>・</a:t>
+            </a:r>
+            <a:r>
+              <a:rPr kumimoji="1" lang="en-US" altLang="ja-JP" dirty="0"/>
+              <a:t>j(t)</a:t>
+            </a:r>
+            <a:r>
+              <a:rPr kumimoji="1" lang="ja-JP" altLang="en-US" dirty="0"/>
+              <a:t>のフーリエ変換</a:t>
+            </a:r>
+            <a:endParaRPr kumimoji="1" lang="en-US" altLang="ja-JP" dirty="0"/>
+          </a:p>
+          <a:p>
+            <a:r>
+              <a:rPr kumimoji="1" lang="ja-JP" altLang="en-US" dirty="0"/>
+              <a:t>・</a:t>
+            </a:r>
+            <a:r>
+              <a:rPr kumimoji="1" lang="en-US" altLang="ja-JP" dirty="0"/>
+              <a:t>j(t)</a:t>
+            </a:r>
+            <a:r>
+              <a:rPr kumimoji="1" lang="ja-JP" altLang="en-US" dirty="0"/>
+              <a:t>の分散</a:t>
+            </a:r>
+            <a:endParaRPr kumimoji="1" lang="en-US" altLang="ja-JP" dirty="0"/>
+          </a:p>
+          <a:p>
+            <a:r>
+              <a:rPr kumimoji="1" lang="ja-JP" altLang="en-US" dirty="0"/>
+              <a:t>・位相ノイズが</a:t>
+            </a:r>
+            <a:r>
+              <a:rPr kumimoji="1" lang="en-US" altLang="ja-JP" dirty="0"/>
+              <a:t>j(t)</a:t>
+            </a:r>
+            <a:r>
+              <a:rPr kumimoji="1" lang="ja-JP" altLang="en-US" dirty="0"/>
+              <a:t>なら</a:t>
+            </a:r>
+            <a:r>
+              <a:rPr kumimoji="1" lang="en-US" altLang="ja-JP" dirty="0" err="1"/>
+              <a:t>σ</a:t>
+            </a:r>
+            <a:r>
+              <a:rPr kumimoji="1" lang="en-US" altLang="ja-JP" dirty="0"/>
+              <a:t>(j(t))</a:t>
+            </a:r>
+          </a:p>
+          <a:p>
+            <a:endParaRPr kumimoji="1" lang="en-US" altLang="ja-JP" dirty="0"/>
+          </a:p>
+          <a:p>
+            <a:endParaRPr kumimoji="1" lang="ja-JP" altLang="en-US" dirty="0"/>
+          </a:p>
+        </p:txBody>
+      </p:sp>
+      <p:sp>
+        <p:nvSpPr>
+          <p:cNvPr id="4" name="スライド番号プレースホルダー 3"/>
+          <p:cNvSpPr>
+            <a:spLocks noGrp="1"/>
+          </p:cNvSpPr>
+          <p:nvPr>
+            <p:ph type="sldNum" idx="12"/>
+          </p:nvPr>
+        </p:nvSpPr>
+        <p:spPr/>
+        <p:txBody>
+          <a:bodyPr/>
+          <a:lstStyle/>
+          <a:p>
+            <a:pPr marL="0" marR="0" lvl="0" indent="0" algn="r" rtl="0">
+              <a:lnSpc>
+                <a:spcPct val="100000"/>
+              </a:lnSpc>
+              <a:spcBef>
+                <a:spcPts val="0"/>
+              </a:spcBef>
+              <a:spcAft>
+                <a:spcPts val="0"/>
+              </a:spcAft>
+              <a:buClr>
+                <a:srgbClr val="000000"/>
+              </a:buClr>
+              <a:buSzPts val="1200"/>
+              <a:buFont typeface="Arial"/>
+              <a:buNone/>
+            </a:pPr>
+            <a:fld id="{00000000-1234-1234-1234-123412341234}" type="slidenum">
+              <a:rPr lang="en-US" altLang="ja-JP" sz="1200" b="0" i="0" u="none" strike="noStrike" cap="none" smtClean="0">
+                <a:solidFill>
+                  <a:schemeClr val="dk1"/>
+                </a:solidFill>
+                <a:latin typeface="Arial"/>
+                <a:ea typeface="Arial"/>
+                <a:cs typeface="Arial"/>
+                <a:sym typeface="Arial"/>
+              </a:rPr>
+              <a:t>2</a:t>
+            </a:fld>
+            <a:endParaRPr lang="ja-JP" altLang="en-US" sz="1200" b="0" i="0" u="none" strike="noStrike" cap="none" dirty="0">
+              <a:solidFill>
+                <a:schemeClr val="dk1"/>
+              </a:solidFill>
+              <a:latin typeface="Arial"/>
+              <a:ea typeface="Arial"/>
+              <a:cs typeface="Arial"/>
+              <a:sym typeface="Arial"/>
+            </a:endParaRPr>
+          </a:p>
+        </p:txBody>
+      </p:sp>
+    </p:spTree>
+    <p:extLst>
+      <p:ext uri="{BB962C8B-B14F-4D97-AF65-F5344CB8AC3E}">
+        <p14:creationId xmlns:p14="http://schemas.microsoft.com/office/powerpoint/2010/main" val="3943812891"/>
       </p:ext>
     </p:extLst>
   </p:cSld>
@@ -6005,13 +6385,10 @@
           <a:p>
             <a:pPr algn="ctr"/>
             <a:r>
-              <a:rPr>
-                <a:latin typeface="Yu Gothic"/>
-                <a:ea typeface="Yu Gothic"/>
-              </a:rPr>
-              <a:t>2026/06/24</a:t>
-            </a:r>
-            <a:endParaRPr kumimoji="1" lang="ja-JP" altLang="en-US"/>
+              <a:rPr kumimoji="1" lang="en-US" altLang="ja-JP" dirty="0"/>
+              <a:t>2026/06/24 10:30-10:50</a:t>
+            </a:r>
+            <a:endParaRPr kumimoji="1" lang="ja-JP" altLang="en-US" dirty="0"/>
           </a:p>
         </p:txBody>
       </p:sp>
@@ -6045,11 +6422,20 @@
           <a:p>
             <a:pPr algn="ctr"/>
             <a:r>
-              <a:rPr sz="2000">
-                <a:latin typeface="Yu Gothic"/>
-                <a:ea typeface="Yu Gothic"/>
-              </a:rPr>
-              <a:t>福井 晴士郎</a:t>
+              <a:rPr kumimoji="1" lang="en-US" altLang="ja-JP" sz="2000" dirty="0"/>
+              <a:t>08-223022 </a:t>
+            </a:r>
+            <a:r>
+              <a:rPr kumimoji="1" lang="ja-JP" altLang="en-US" sz="2000"/>
+              <a:t>福井</a:t>
+            </a:r>
+            <a:r>
+              <a:rPr kumimoji="1" lang="en-US" altLang="ja-JP" sz="2000" dirty="0"/>
+              <a:t> </a:t>
+            </a:r>
+            <a:r>
+              <a:rPr kumimoji="1" lang="ja-JP" altLang="en-US" sz="2000"/>
+              <a:t>晴士郎</a:t>
             </a:r>
           </a:p>
         </p:txBody>
@@ -6084,21 +6470,16 @@
           <a:p>
             <a:pPr algn="ctr"/>
             <a:r>
-              <a:rPr sz="3600">
-                <a:latin typeface="Yu Gothic"/>
-                <a:ea typeface="Yu Gothic"/>
-              </a:rPr>
-              <a:t>水晶振動発振器の位相同期制御</a:t>
+              <a:rPr kumimoji="1" lang="ja-JP" altLang="en-US" sz="3600" dirty="0"/>
+              <a:t>水晶基準発信器の</a:t>
             </a:r>
             <a:endParaRPr kumimoji="1" lang="en-US" altLang="ja-JP" sz="3600" dirty="0"/>
           </a:p>
           <a:p>
-            <a:r>
-              <a:rPr sz="3600">
-                <a:latin typeface="Yu Gothic"/>
-                <a:ea typeface="Yu Gothic"/>
-              </a:rPr>
-              <a:t>による高純度信号作成</a:t>
+            <a:pPr algn="ctr"/>
+            <a:r>
+              <a:rPr kumimoji="1" lang="ja-JP" altLang="en-US" sz="3600" dirty="0"/>
+              <a:t>位相同期制御による高純度信号作成</a:t>
             </a:r>
           </a:p>
         </p:txBody>
@@ -6106,7 +6487,7 @@
     </p:spTree>
     <p:extLst>
       <p:ext uri="{BB962C8B-B14F-4D97-AF65-F5344CB8AC3E}">
-        <p14:creationId xmlns:p14="http://schemas.microsoft.com/office/powerpoint/2010/main" val="1769478375"/>
+        <p14:creationId xmlns:p14="http://schemas.microsoft.com/office/powerpoint/2010/main" val="4200290695"/>
       </p:ext>
     </p:extLst>
   </p:cSld>
@@ -6121,8 +6502,8 @@
 </p:sld>
 </file>
 
-<file path=ppt/slides/slide14.xml><?xml version="1.0" encoding="utf-8"?>
-<p:sld xmlns:a="http://schemas.openxmlformats.org/drawingml/2006/main" xmlns:p="http://schemas.openxmlformats.org/presentationml/2006/main" xmlns:r="http://schemas.openxmlformats.org/officeDocument/2006/relationships">
+<file path=ppt/slides/slide10.xml><?xml version="1.0" encoding="utf-8"?>
+<p:sld xmlns:a="http://schemas.openxmlformats.org/drawingml/2006/main" xmlns:r="http://schemas.openxmlformats.org/officeDocument/2006/relationships" xmlns:p="http://schemas.openxmlformats.org/presentationml/2006/main">
   <p:cSld>
     <p:spTree>
       <p:nvGrpSpPr>
@@ -6130,7 +6511,14 @@
         <p:cNvGrpSpPr/>
         <p:nvPr/>
       </p:nvGrpSpPr>
-      <p:grpSpPr/>
+      <p:grpSpPr>
+        <a:xfrm>
+          <a:off x="0" y="0"/>
+          <a:ext cx="0" cy="0"/>
+          <a:chOff x="0" y="0"/>
+          <a:chExt cx="0" cy="0"/>
+        </a:xfrm>
+      </p:grpSpPr>
       <p:sp>
         <p:nvSpPr>
           <p:cNvPr id="2" name="Title 1"/>
@@ -6147,7 +6535,7 @@
           <a:lstStyle/>
           <a:p>
             <a:r>
-              <a:t>1-1 位相ノイズとは</a:t>
+              <a:t>4-3 測定法：オーディオレコーダを使う理由</a:t>
             </a:r>
           </a:p>
         </p:txBody>
@@ -6172,33 +6560,12 @@
           <a:bodyPr wrap="square"/>
           <a:lstStyle/>
           <a:p>
-            <a:pPr/>
             <a:r>
               <a:rPr>
                 <a:latin typeface="Yu Gothic"/>
                 <a:ea typeface="Yu Gothic"/>
               </a:rPr>
-              <a:t>位相雑音とは理想的な正弦波からの位相のゆらぎ（時間軸上の誤差＝ジッタ）。基準信号の純度を決める。</a:t>
-            </a:r>
-          </a:p>
-          <a:p>
-            <a:pPr lvl="1"/>
-            <a:r>
-              <a:rPr>
-                <a:latin typeface="Yu Gothic"/>
-                <a:ea typeface="Yu Gothic"/>
-              </a:rPr>
-              <a:t>通信・測位・計測の性能を左右する</a:t>
-            </a:r>
-          </a:p>
-          <a:p>
-            <a:pPr lvl="1"/>
-            <a:r>
-              <a:rPr>
-                <a:latin typeface="Yu Gothic"/>
-                <a:ea typeface="Yu Gothic"/>
-              </a:rPr>
-              <a:t>近傍（低オフセット周波数）ほど評価・改善が難しい</a:t>
+              <a:t>オーディオレコーディングは高分解能（10秒測定で std 20–30 ps）かつ長時間測定が可能で、0.1–1 Hz の評価に向いている。</a:t>
             </a:r>
           </a:p>
         </p:txBody>
@@ -6242,7 +6609,7 @@
           </a:fontRef>
         </p:style>
         <p:txBody>
-          <a:bodyPr rtlCol="0" anchor="ctr" wrap="square"/>
+          <a:bodyPr wrap="square" rtlCol="0" anchor="ctr"/>
           <a:lstStyle/>
           <a:p>
             <a:pPr algn="ctr"/>
@@ -6254,8 +6621,8 @@
                 <a:latin typeface="Yu Gothic"/>
                 <a:ea typeface="Yu Gothic"/>
               </a:rPr>
-              <a:t>位相ノイズの説明図（理想波と揺らぎ）
-※設計書1-1が未記入のため要追記</a:t>
+              <a:t>録音系統図・分周・サンプル数比較表
+（卒論PPTXの該当図を流用）</a:t>
             </a:r>
           </a:p>
         </p:txBody>
@@ -6268,8 +6635,8 @@
 </p:sld>
 </file>
 
-<file path=ppt/slides/slide15.xml><?xml version="1.0" encoding="utf-8"?>
-<p:sld xmlns:a="http://schemas.openxmlformats.org/drawingml/2006/main" xmlns:p="http://schemas.openxmlformats.org/presentationml/2006/main" xmlns:r="http://schemas.openxmlformats.org/officeDocument/2006/relationships">
+<file path=ppt/slides/slide11.xml><?xml version="1.0" encoding="utf-8"?>
+<p:sld xmlns:a="http://schemas.openxmlformats.org/drawingml/2006/main" xmlns:r="http://schemas.openxmlformats.org/officeDocument/2006/relationships" xmlns:p="http://schemas.openxmlformats.org/presentationml/2006/main">
   <p:cSld>
     <p:spTree>
       <p:nvGrpSpPr>
@@ -6277,7 +6644,14 @@
         <p:cNvGrpSpPr/>
         <p:nvPr/>
       </p:nvGrpSpPr>
-      <p:grpSpPr/>
+      <p:grpSpPr>
+        <a:xfrm>
+          <a:off x="0" y="0"/>
+          <a:ext cx="0" cy="0"/>
+          <a:chOff x="0" y="0"/>
+          <a:chExt cx="0" cy="0"/>
+        </a:xfrm>
+      </p:grpSpPr>
       <p:sp>
         <p:nvSpPr>
           <p:cNvPr id="2" name="Title 1"/>
@@ -6294,157 +6668,7 @@
           <a:lstStyle/>
           <a:p>
             <a:r>
-              <a:t>1-2 基準信号の純度と現状</a:t>
-            </a:r>
-          </a:p>
-        </p:txBody>
-      </p:sp>
-      <p:sp>
-        <p:nvSpPr>
-          <p:cNvPr id="3" name="Text Placeholder 2"/>
-          <p:cNvSpPr>
-            <a:spLocks noGrp="1"/>
-          </p:cNvSpPr>
-          <p:nvPr>
-            <p:ph type="body" idx="1"/>
-          </p:nvPr>
-        </p:nvSpPr>
-        <p:spPr>
-          <a:xfrm>
-            <a:off x="274320" y="914400"/>
-            <a:ext cx="9326880" cy="2651760"/>
-          </a:xfrm>
-        </p:spPr>
-        <p:txBody>
-          <a:bodyPr wrap="square"/>
-          <a:lstStyle/>
-          <a:p>
-            <a:pPr/>
-            <a:r>
-              <a:rPr>
-                <a:latin typeface="Yu Gothic"/>
-                <a:ea typeface="Yu Gothic"/>
-              </a:rPr>
-              <a:t>通信・測位・計測は基準正弦波の位相雑音に支えられる。原子時計・水素メーザーは高純度だが高価で日単位の計測が必要、OCXOは安価で数秒〜数分の安定に優れるが単体に限界。</a:t>
-            </a:r>
-          </a:p>
-          <a:p>
-            <a:pPr lvl="1"/>
-            <a:r>
-              <a:rPr>
-                <a:latin typeface="Yu Gothic"/>
-                <a:ea typeface="Yu Gothic"/>
-              </a:rPr>
-              <a:t>市販データは概ね 1 Hz 止まり。近傍（0.1–1 Hz）は測定が難しい</a:t>
-            </a:r>
-          </a:p>
-          <a:p>
-            <a:pPr lvl="1"/>
-            <a:r>
-              <a:rPr>
-                <a:latin typeface="Yu Gothic"/>
-                <a:ea typeface="Yu Gothic"/>
-              </a:rPr>
-              <a:t>近傍の測定純度をどう高めるかが本研究の論点</a:t>
-            </a:r>
-          </a:p>
-        </p:txBody>
-      </p:sp>
-      <p:pic>
-        <p:nvPicPr>
-          <p:cNvPr id="4" name="Picture 3" descr="bench_p2_curated.png"/>
-          <p:cNvPicPr>
-            <a:picLocks noChangeAspect="1"/>
-          </p:cNvPicPr>
-          <p:nvPr/>
-        </p:nvPicPr>
-        <p:blipFill>
-          <a:blip r:embed="rId2"/>
-          <a:stretch>
-            <a:fillRect/>
-          </a:stretch>
-        </p:blipFill>
-        <p:spPr>
-          <a:xfrm>
-            <a:off x="2570595" y="3703320"/>
-            <a:ext cx="4734329" cy="2606040"/>
-          </a:xfrm>
-          <a:prstGeom prst="rect">
-            <a:avLst/>
-          </a:prstGeom>
-        </p:spPr>
-      </p:pic>
-      <p:sp>
-        <p:nvSpPr>
-          <p:cNvPr id="5" name="TextBox 4"/>
-          <p:cNvSpPr txBox="1"/>
-          <p:nvPr/>
-        </p:nvSpPr>
-        <p:spPr>
-          <a:xfrm>
-            <a:off x="1463040" y="6446520"/>
-            <a:ext cx="6949440" cy="274320"/>
-          </a:xfrm>
-          <a:prstGeom prst="rect">
-            <a:avLst/>
-          </a:prstGeom>
-          <a:noFill/>
-        </p:spPr>
-        <p:txBody>
-          <a:bodyPr wrap="square">
-            <a:spAutoFit/>
-          </a:bodyPr>
-          <a:lstStyle/>
-          <a:p>
-            <a:pPr algn="ctr"/>
-            <a:r>
-              <a:rPr sz="900">
-                <a:solidFill>
-                  <a:srgbClr val="595959"/>
-                </a:solidFill>
-                <a:latin typeface="Yu Gothic"/>
-                <a:ea typeface="Yu Gothic"/>
-              </a:rPr>
-              <a:t>市販各機の位相雑音 L(f)（10 MHz 換算）</a:t>
-            </a:r>
-          </a:p>
-        </p:txBody>
-      </p:sp>
-    </p:spTree>
-  </p:cSld>
-  <p:clrMapOvr>
-    <a:masterClrMapping/>
-  </p:clrMapOvr>
-</p:sld>
-</file>
-
-<file path=ppt/slides/slide16.xml><?xml version="1.0" encoding="utf-8"?>
-<p:sld xmlns:a="http://schemas.openxmlformats.org/drawingml/2006/main" xmlns:p="http://schemas.openxmlformats.org/presentationml/2006/main" xmlns:r="http://schemas.openxmlformats.org/officeDocument/2006/relationships">
-  <p:cSld>
-    <p:spTree>
-      <p:nvGrpSpPr>
-        <p:cNvPr id="1" name=""/>
-        <p:cNvGrpSpPr/>
-        <p:nvPr/>
-      </p:nvGrpSpPr>
-      <p:grpSpPr/>
-      <p:sp>
-        <p:nvSpPr>
-          <p:cNvPr id="2" name="Title 1"/>
-          <p:cNvSpPr>
-            <a:spLocks noGrp="1"/>
-          </p:cNvSpPr>
-          <p:nvPr>
-            <p:ph type="title"/>
-          </p:nvPr>
-        </p:nvSpPr>
-        <p:spPr/>
-        <p:txBody>
-          <a:bodyPr/>
-          <a:lstStyle/>
-          <a:p>
-            <a:r>
-              <a:t>02 本研究の目標</a:t>
+              <a:t>4-4 予備実験：フィードバック電圧の感応度同定</a:t>
             </a:r>
           </a:p>
         </p:txBody>
@@ -6469,13 +6693,12 @@
           <a:bodyPr wrap="square"/>
           <a:lstStyle/>
           <a:p>
-            <a:pPr/>
             <a:r>
               <a:rPr>
                 <a:latin typeface="Yu Gothic"/>
                 <a:ea typeface="Yu Gothic"/>
               </a:rPr>
-              <a:t>安価なOCXOで可能な限り高純度な基準信号源を実現することを目標とする。</a:t>
+              <a:t>フィードバック電圧のLSBを測定し回帰検証することで、フィードバックロジックのパラメータをチューニングした。</a:t>
             </a:r>
           </a:p>
           <a:p>
@@ -6485,24 +6708,14 @@
                 <a:latin typeface="Yu Gothic"/>
                 <a:ea typeface="Yu Gothic"/>
               </a:rPr>
-              <a:t>究極的な目標：安価な水晶発振器（OCXO）で高純度な基準信号源を実現</a:t>
-            </a:r>
-          </a:p>
-          <a:p>
-            <a:pPr lvl="1"/>
-            <a:r>
-              <a:rPr>
-                <a:latin typeface="Yu Gothic"/>
-                <a:ea typeface="Yu Gothic"/>
-              </a:rPr>
-              <a:t>アプローチ：複数OCXOを同期させ、1台では実現できない純度での計測を可能にする</a:t>
+              <a:t>1 LSB（≈305 µV）ずつ階段状に電圧を変え、各段の FRFR 傾きを電圧増分に直線回帰 → K≈860 ns/(V·s)</a:t>
             </a:r>
           </a:p>
         </p:txBody>
       </p:sp>
       <p:pic>
         <p:nvPicPr>
-          <p:cNvPr id="4" name="Picture 3" descr="fig_pw_1overN.png"/>
+          <p:cNvPr id="4" name="Picture 3" descr="fig3_plant.png"/>
           <p:cNvPicPr>
             <a:picLocks noChangeAspect="1"/>
           </p:cNvPicPr>
@@ -6516,8 +6729,8 @@
         </p:blipFill>
         <p:spPr>
           <a:xfrm>
-            <a:off x="5074920" y="2476637"/>
-            <a:ext cx="4526280" cy="2636244"/>
+            <a:off x="5074920" y="2540374"/>
+            <a:ext cx="4526280" cy="2508770"/>
           </a:xfrm>
           <a:prstGeom prst="rect">
             <a:avLst/>
@@ -6532,8 +6745,8 @@
 </p:sld>
 </file>
 
-<file path=ppt/slides/slide17.xml><?xml version="1.0" encoding="utf-8"?>
-<p:sld xmlns:a="http://schemas.openxmlformats.org/drawingml/2006/main" xmlns:p="http://schemas.openxmlformats.org/presentationml/2006/main" xmlns:r="http://schemas.openxmlformats.org/officeDocument/2006/relationships">
+<file path=ppt/slides/slide12.xml><?xml version="1.0" encoding="utf-8"?>
+<p:sld xmlns:a="http://schemas.openxmlformats.org/drawingml/2006/main" xmlns:r="http://schemas.openxmlformats.org/officeDocument/2006/relationships" xmlns:p="http://schemas.openxmlformats.org/presentationml/2006/main">
   <p:cSld>
     <p:spTree>
       <p:nvGrpSpPr>
@@ -6541,7 +6754,14 @@
         <p:cNvGrpSpPr/>
         <p:nvPr/>
       </p:nvGrpSpPr>
-      <p:grpSpPr/>
+      <p:grpSpPr>
+        <a:xfrm>
+          <a:off x="0" y="0"/>
+          <a:ext cx="0" cy="0"/>
+          <a:chOff x="0" y="0"/>
+          <a:chExt cx="0" cy="0"/>
+        </a:xfrm>
+      </p:grpSpPr>
       <p:sp>
         <p:nvSpPr>
           <p:cNvPr id="2" name="Title 1"/>
@@ -6558,7 +6778,7 @@
           <a:lstStyle/>
           <a:p>
             <a:r>
-              <a:t>3-1 同期・平均による位相雑音の改善（1/N の原理）</a:t>
+              <a:t>4-5 フィードバックロジック</a:t>
             </a:r>
           </a:p>
         </p:txBody>
@@ -6576,20 +6796,19 @@
         <p:spPr>
           <a:xfrm>
             <a:off x="274320" y="914400"/>
-            <a:ext cx="9326880" cy="2651760"/>
+            <a:ext cx="9326880" cy="2286000"/>
           </a:xfrm>
         </p:spPr>
         <p:txBody>
           <a:bodyPr wrap="square"/>
           <a:lstStyle/>
           <a:p>
-            <a:pPr/>
             <a:r>
               <a:rPr>
                 <a:latin typeface="Yu Gothic"/>
                 <a:ea typeface="Yu Gothic"/>
               </a:rPr>
-              <a:t>互いに無相関な雑音は平均で打ち消し合うため、位相を揃えた複数OCXOの出力を平均すると単体を超える純度になる。</a:t>
+              <a:t>位相のズレ e と周波数のズレ Δf を使う2状態フィードバックで、必要な分だけ電圧を動かす（1 LSB 未満は動かさない＝不感帯）。同期動作そのものが位相雑音を持ち込まない。</a:t>
             </a:r>
           </a:p>
           <a:p>
@@ -6599,14 +6818,34 @@
                 <a:latin typeface="Yu Gothic"/>
                 <a:ea typeface="Yu Gothic"/>
               </a:rPr>
-              <a:t>無相関な雑音は平均すると電力が台数分の1（2台で 1/2）になり、近傍位相雑音が −3 dB 改善する</a:t>
+              <a:t>出自：ACC（車両追従制御）の状態方程式を波動系へ置き換え</a:t>
+            </a:r>
+          </a:p>
+          <a:p>
+            <a:pPr lvl="1"/>
+            <a:r>
+              <a:rPr>
+                <a:latin typeface="Yu Gothic"/>
+                <a:ea typeface="Yu Gothic"/>
+              </a:rPr>
+              <a:t>更新：Δf_des=clamp(Kp_e·e) → 必要段数 dN=round(...) → 電圧更新</a:t>
+            </a:r>
+          </a:p>
+          <a:p>
+            <a:pPr lvl="1"/>
+            <a:r>
+              <a:rPr>
+                <a:latin typeface="Yu Gothic"/>
+                <a:ea typeface="Yu Gothic"/>
+              </a:rPr>
+              <a:t>不感帯で静かに同期。比例・微分（PID）は過剰動作で短期雑音（対比）</a:t>
             </a:r>
           </a:p>
         </p:txBody>
       </p:sp>
       <p:pic>
         <p:nvPicPr>
-          <p:cNvPr id="4" name="Picture 3" descr="eq_avg_3db.png"/>
+          <p:cNvPr id="4" name="Picture 3" descr="fig4_block.png"/>
           <p:cNvPicPr>
             <a:picLocks noChangeAspect="1"/>
           </p:cNvPicPr>
@@ -6620,50 +6859,38 @@
         </p:blipFill>
         <p:spPr>
           <a:xfrm>
-            <a:off x="3455242" y="3703320"/>
-            <a:ext cx="2965035" cy="2606040"/>
+            <a:off x="411480" y="3757504"/>
+            <a:ext cx="4495647" cy="1720430"/>
           </a:xfrm>
           <a:prstGeom prst="rect">
             <a:avLst/>
           </a:prstGeom>
         </p:spPr>
       </p:pic>
-      <p:sp>
-        <p:nvSpPr>
-          <p:cNvPr id="5" name="TextBox 4"/>
-          <p:cNvSpPr txBox="1"/>
+      <p:pic>
+        <p:nvPicPr>
+          <p:cNvPr id="5" name="Picture 4" descr="fig_ctrl.png"/>
+          <p:cNvPicPr>
+            <a:picLocks noChangeAspect="1"/>
+          </p:cNvPicPr>
           <p:nvPr/>
-        </p:nvSpPr>
+        </p:nvPicPr>
+        <p:blipFill>
+          <a:blip r:embed="rId3"/>
+          <a:stretch>
+            <a:fillRect/>
+          </a:stretch>
+        </p:blipFill>
         <p:spPr>
           <a:xfrm>
-            <a:off x="1463040" y="6446520"/>
-            <a:ext cx="6949440" cy="274320"/>
+            <a:off x="5144416" y="3429000"/>
+            <a:ext cx="4203949" cy="2377440"/>
           </a:xfrm>
           <a:prstGeom prst="rect">
             <a:avLst/>
           </a:prstGeom>
-          <a:noFill/>
         </p:spPr>
-        <p:txBody>
-          <a:bodyPr wrap="square">
-            <a:spAutoFit/>
-          </a:bodyPr>
-          <a:lstStyle/>
-          <a:p>
-            <a:pPr algn="ctr"/>
-            <a:r>
-              <a:rPr sz="900">
-                <a:solidFill>
-                  <a:srgbClr val="595959"/>
-                </a:solidFill>
-                <a:latin typeface="Yu Gothic"/>
-                <a:ea typeface="Yu Gothic"/>
-              </a:rPr>
-              <a:t>N台平均で雑音パワーは 1/N。N=2 で S_φ/2 ＝ 10·log₁₀(1/2) ≈ −3 dB</a:t>
-            </a:r>
-          </a:p>
-        </p:txBody>
-      </p:sp>
+      </p:pic>
     </p:spTree>
   </p:cSld>
   <p:clrMapOvr>
@@ -6672,8 +6899,8 @@
 </p:sld>
 </file>
 
-<file path=ppt/slides/slide18.xml><?xml version="1.0" encoding="utf-8"?>
-<p:sld xmlns:a="http://schemas.openxmlformats.org/drawingml/2006/main" xmlns:p="http://schemas.openxmlformats.org/presentationml/2006/main" xmlns:r="http://schemas.openxmlformats.org/officeDocument/2006/relationships">
+<file path=ppt/slides/slide13.xml><?xml version="1.0" encoding="utf-8"?>
+<p:sld xmlns:a="http://schemas.openxmlformats.org/drawingml/2006/main" xmlns:r="http://schemas.openxmlformats.org/officeDocument/2006/relationships" xmlns:p="http://schemas.openxmlformats.org/presentationml/2006/main">
   <p:cSld>
     <p:spTree>
       <p:nvGrpSpPr>
@@ -6681,7 +6908,14 @@
         <p:cNvGrpSpPr/>
         <p:nvPr/>
       </p:nvGrpSpPr>
-      <p:grpSpPr/>
+      <p:grpSpPr>
+        <a:xfrm>
+          <a:off x="0" y="0"/>
+          <a:ext cx="0" cy="0"/>
+          <a:chOff x="0" y="0"/>
+          <a:chExt cx="0" cy="0"/>
+        </a:xfrm>
+      </p:grpSpPr>
       <p:sp>
         <p:nvSpPr>
           <p:cNvPr id="2" name="Title 1"/>
@@ -6698,7 +6932,223 @@
           <a:lstStyle/>
           <a:p>
             <a:r>
-              <a:t>4-1 アプローチ：能動的に同期して平均する</a:t>
+              <a:t>05 実験と結果</a:t>
+            </a:r>
+          </a:p>
+        </p:txBody>
+      </p:sp>
+      <p:sp>
+        <p:nvSpPr>
+          <p:cNvPr id="3" name="Text Placeholder 2"/>
+          <p:cNvSpPr>
+            <a:spLocks noGrp="1"/>
+          </p:cNvSpPr>
+          <p:nvPr>
+            <p:ph type="body" idx="1"/>
+          </p:nvPr>
+        </p:nvSpPr>
+        <p:spPr>
+          <a:xfrm>
+            <a:off x="274320" y="914400"/>
+            <a:ext cx="9326880" cy="2286000"/>
+          </a:xfrm>
+        </p:spPr>
+        <p:txBody>
+          <a:bodyPr wrap="square"/>
+          <a:lstStyle/>
+          <a:p>
+            <a:r>
+              <a:rPr>
+                <a:latin typeface="Yu Gothic"/>
+                <a:ea typeface="Yu Gothic"/>
+              </a:rPr>
+              <a:t>実測モデルに基づくモデルFB（Kp_e=0.08）は、無制御HOLDと同等の近傍位相雑音のまま同期できる（差≈0 dB）＝同期時に位相雑音を持ち込まない。PID制御は短期雑音を生む（対比）。</a:t>
+            </a:r>
+          </a:p>
+          <a:p>
+            <a:pPr lvl="1"/>
+            <a:r>
+              <a:rPr>
+                <a:latin typeface="Yu Gothic"/>
+                <a:ea typeface="Yu Gothic"/>
+              </a:rPr>
+              <a:t>モデルFB と HOLD の近傍位相雑音がほぼ一致（差≈0 dB）</a:t>
+            </a:r>
+          </a:p>
+          <a:p>
+            <a:pPr lvl="1"/>
+            <a:r>
+              <a:rPr>
+                <a:latin typeface="Yu Gothic"/>
+                <a:ea typeface="Yu Gothic"/>
+              </a:rPr>
+              <a:t>比例・微分（PID）制御は過剰動作で短期ジッタを注入</a:t>
+            </a:r>
+          </a:p>
+        </p:txBody>
+      </p:sp>
+      <p:pic>
+        <p:nvPicPr>
+          <p:cNvPr id="4" name="Picture 3" descr="model_kpe0.08_PN.png"/>
+          <p:cNvPicPr>
+            <a:picLocks noChangeAspect="1"/>
+          </p:cNvPicPr>
+          <p:nvPr/>
+        </p:nvPicPr>
+        <p:blipFill>
+          <a:blip r:embed="rId2"/>
+          <a:stretch>
+            <a:fillRect/>
+          </a:stretch>
+        </p:blipFill>
+        <p:spPr>
+          <a:xfrm>
+            <a:off x="951432" y="3429000"/>
+            <a:ext cx="3415743" cy="2377440"/>
+          </a:xfrm>
+          <a:prstGeom prst="rect">
+            <a:avLst/>
+          </a:prstGeom>
+        </p:spPr>
+      </p:pic>
+      <p:sp>
+        <p:nvSpPr>
+          <p:cNvPr id="5" name="TextBox 4"/>
+          <p:cNvSpPr txBox="1"/>
+          <p:nvPr/>
+        </p:nvSpPr>
+        <p:spPr>
+          <a:xfrm>
+            <a:off x="411480" y="5943600"/>
+            <a:ext cx="4495647" cy="274320"/>
+          </a:xfrm>
+          <a:prstGeom prst="rect">
+            <a:avLst/>
+          </a:prstGeom>
+          <a:noFill/>
+        </p:spPr>
+        <p:txBody>
+          <a:bodyPr wrap="square">
+            <a:spAutoFit/>
+          </a:bodyPr>
+          <a:lstStyle/>
+          <a:p>
+            <a:pPr algn="ctr"/>
+            <a:r>
+              <a:rPr sz="900">
+                <a:solidFill>
+                  <a:srgbClr val="595959"/>
+                </a:solidFill>
+                <a:latin typeface="Yu Gothic"/>
+                <a:ea typeface="Yu Gothic"/>
+              </a:rPr>
+              <a:t>モデルFB（Kp_e=0.08）の L(f)</a:t>
+            </a:r>
+          </a:p>
+        </p:txBody>
+      </p:sp>
+      <p:pic>
+        <p:nvPicPr>
+          <p:cNvPr id="6" name="Picture 5" descr="model_HOLD_PN.png"/>
+          <p:cNvPicPr>
+            <a:picLocks noChangeAspect="1"/>
+          </p:cNvPicPr>
+          <p:nvPr/>
+        </p:nvPicPr>
+        <p:blipFill>
+          <a:blip r:embed="rId3"/>
+          <a:stretch>
+            <a:fillRect/>
+          </a:stretch>
+        </p:blipFill>
+        <p:spPr>
+          <a:xfrm>
+            <a:off x="5538519" y="3429000"/>
+            <a:ext cx="3415743" cy="2377440"/>
+          </a:xfrm>
+          <a:prstGeom prst="rect">
+            <a:avLst/>
+          </a:prstGeom>
+        </p:spPr>
+      </p:pic>
+      <p:sp>
+        <p:nvSpPr>
+          <p:cNvPr id="7" name="TextBox 6"/>
+          <p:cNvSpPr txBox="1"/>
+          <p:nvPr/>
+        </p:nvSpPr>
+        <p:spPr>
+          <a:xfrm>
+            <a:off x="4998567" y="5943600"/>
+            <a:ext cx="4495647" cy="274320"/>
+          </a:xfrm>
+          <a:prstGeom prst="rect">
+            <a:avLst/>
+          </a:prstGeom>
+          <a:noFill/>
+        </p:spPr>
+        <p:txBody>
+          <a:bodyPr wrap="square">
+            <a:spAutoFit/>
+          </a:bodyPr>
+          <a:lstStyle/>
+          <a:p>
+            <a:pPr algn="ctr"/>
+            <a:r>
+              <a:rPr sz="900">
+                <a:solidFill>
+                  <a:srgbClr val="595959"/>
+                </a:solidFill>
+                <a:latin typeface="Yu Gothic"/>
+                <a:ea typeface="Yu Gothic"/>
+              </a:rPr>
+              <a:t>無制御 HOLD の L(f)</a:t>
+            </a:r>
+          </a:p>
+        </p:txBody>
+      </p:sp>
+    </p:spTree>
+  </p:cSld>
+  <p:clrMapOvr>
+    <a:masterClrMapping/>
+  </p:clrMapOvr>
+</p:sld>
+</file>
+
+<file path=ppt/slides/slide14.xml><?xml version="1.0" encoding="utf-8"?>
+<p:sld xmlns:a="http://schemas.openxmlformats.org/drawingml/2006/main" xmlns:r="http://schemas.openxmlformats.org/officeDocument/2006/relationships" xmlns:p="http://schemas.openxmlformats.org/presentationml/2006/main">
+  <p:cSld>
+    <p:spTree>
+      <p:nvGrpSpPr>
+        <p:cNvPr id="1" name=""/>
+        <p:cNvGrpSpPr/>
+        <p:nvPr/>
+      </p:nvGrpSpPr>
+      <p:grpSpPr>
+        <a:xfrm>
+          <a:off x="0" y="0"/>
+          <a:ext cx="0" cy="0"/>
+          <a:chOff x="0" y="0"/>
+          <a:chExt cx="0" cy="0"/>
+        </a:xfrm>
+      </p:grpSpPr>
+      <p:sp>
+        <p:nvSpPr>
+          <p:cNvPr id="2" name="Title 1"/>
+          <p:cNvSpPr>
+            <a:spLocks noGrp="1"/>
+          </p:cNvSpPr>
+          <p:nvPr>
+            <p:ph type="title"/>
+          </p:nvPr>
+        </p:nvSpPr>
+        <p:spPr/>
+        <p:txBody>
+          <a:bodyPr/>
+          <a:lstStyle/>
+          <a:p>
+            <a:r>
+              <a:t>06 考察と今後の展望</a:t>
             </a:r>
           </a:p>
         </p:txBody>
@@ -6723,13 +7173,12 @@
           <a:bodyPr wrap="square"/>
           <a:lstStyle/>
           <a:p>
-            <a:pPr/>
             <a:r>
               <a:rPr>
                 <a:latin typeface="Yu Gothic"/>
                 <a:ea typeface="Yu Gothic"/>
               </a:rPr>
-              <a:t>互いに無相関な雑音は平均で打ち消し合う。位相を揃えた複数OCXOの出力を能動的フィードバックで実時間に同期・平均し、単体を超える純度を実現する（国際原子時のクロックアンサンブルを小規模・実時間で適用）。</a:t>
+              <a:t>フィードバック制御により、近傍位相雑音（同期動作に伴う短期の位相ゆらぎ）を持ち込まずに同期させることに成功した。今後は2台を同時制御・合成器で平均して −3 dB を実証し、N台へ拡張する。</a:t>
             </a:r>
           </a:p>
           <a:p>
@@ -6739,7 +7188,7 @@
                 <a:latin typeface="Yu Gothic"/>
                 <a:ea typeface="Yu Gothic"/>
               </a:rPr>
-              <a:t>平均には各発振器の位相が揃うことが前提</a:t>
+              <a:t>現状：実測モデルに基づくFBで近傍位相雑音を注入せず同期を実現</a:t>
             </a:r>
           </a:p>
           <a:p>
@@ -6749,7 +7198,7 @@
                 <a:latin typeface="Yu Gothic"/>
                 <a:ea typeface="Yu Gothic"/>
               </a:rPr>
-              <a:t>本研究の方式：能動的フィードバックで実時間同期し、出力を平均する</a:t>
+              <a:t>Step1：二つのOCXOの平均に対して同期させる</a:t>
             </a:r>
           </a:p>
           <a:p>
@@ -6759,101 +7208,17 @@
                 <a:latin typeface="Yu Gothic"/>
                 <a:ea typeface="Yu Gothic"/>
               </a:rPr>
-              <a:t>同期を『雑音を加えずに』行うことが中核課題</a:t>
+              <a:t>Step2：同期したOCXOを合成器で平均し測定</a:t>
             </a:r>
           </a:p>
-        </p:txBody>
-      </p:sp>
-      <p:pic>
-        <p:nvPicPr>
-          <p:cNvPr id="4" name="Picture 3" descr="fig2_analogy.png"/>
-          <p:cNvPicPr>
-            <a:picLocks noChangeAspect="1"/>
-          </p:cNvPicPr>
-          <p:nvPr/>
-        </p:nvPicPr>
-        <p:blipFill>
-          <a:blip r:embed="rId2"/>
-          <a:stretch>
-            <a:fillRect/>
-          </a:stretch>
-        </p:blipFill>
-        <p:spPr>
-          <a:xfrm>
-            <a:off x="5074920" y="2648631"/>
-            <a:ext cx="4526280" cy="2292256"/>
-          </a:xfrm>
-          <a:prstGeom prst="rect">
-            <a:avLst/>
-          </a:prstGeom>
-        </p:spPr>
-      </p:pic>
-    </p:spTree>
-  </p:cSld>
-  <p:clrMapOvr>
-    <a:masterClrMapping/>
-  </p:clrMapOvr>
-</p:sld>
-</file>
-
-<file path=ppt/slides/slide19.xml><?xml version="1.0" encoding="utf-8"?>
-<p:sld xmlns:a="http://schemas.openxmlformats.org/drawingml/2006/main" xmlns:p="http://schemas.openxmlformats.org/presentationml/2006/main" xmlns:r="http://schemas.openxmlformats.org/officeDocument/2006/relationships">
-  <p:cSld>
-    <p:spTree>
-      <p:nvGrpSpPr>
-        <p:cNvPr id="1" name=""/>
-        <p:cNvGrpSpPr/>
-        <p:nvPr/>
-      </p:nvGrpSpPr>
-      <p:grpSpPr/>
-      <p:sp>
-        <p:nvSpPr>
-          <p:cNvPr id="2" name="Title 1"/>
-          <p:cNvSpPr>
-            <a:spLocks noGrp="1"/>
-          </p:cNvSpPr>
-          <p:nvPr>
-            <p:ph type="title"/>
-          </p:nvPr>
-        </p:nvSpPr>
-        <p:spPr/>
-        <p:txBody>
-          <a:bodyPr/>
-          <a:lstStyle/>
           <a:p>
-            <a:r>
-              <a:t>4-2 実験系</a:t>
-            </a:r>
-          </a:p>
-        </p:txBody>
-      </p:sp>
-      <p:sp>
-        <p:nvSpPr>
-          <p:cNvPr id="3" name="Text Placeholder 2"/>
-          <p:cNvSpPr>
-            <a:spLocks noGrp="1"/>
-          </p:cNvSpPr>
-          <p:nvPr>
-            <p:ph type="body" idx="1"/>
-          </p:nvPr>
-        </p:nvSpPr>
-        <p:spPr>
-          <a:xfrm>
-            <a:off x="274320" y="914400"/>
-            <a:ext cx="4526280" cy="5212080"/>
-          </a:xfrm>
-        </p:spPr>
-        <p:txBody>
-          <a:bodyPr wrap="square"/>
-          <a:lstStyle/>
-          <a:p>
-            <a:pPr/>
+            <a:pPr lvl="1"/>
             <a:r>
               <a:rPr>
                 <a:latin typeface="Yu Gothic"/>
                 <a:ea typeface="Yu Gothic"/>
               </a:rPr>
-              <a:t>OCXO2台に対し、位相差FRFRをターゲットとしてオシロスコープで計測。計測結果を基に片方のOCXOへフィードバック電圧を印加する。</a:t>
+              <a:t>Step3：N台へ拡張</a:t>
             </a:r>
           </a:p>
         </p:txBody>
@@ -6897,7 +7262,7 @@
           </a:fontRef>
         </p:style>
         <p:txBody>
-          <a:bodyPr rtlCol="0" anchor="ctr" wrap="square"/>
+          <a:bodyPr wrap="square" rtlCol="0" anchor="ctr"/>
           <a:lstStyle/>
           <a:p>
             <a:pPr algn="ctr"/>
@@ -6909,8 +7274,8 @@
                 <a:latin typeface="Yu Gothic"/>
                 <a:ea typeface="Yu Gothic"/>
               </a:rPr>
-              <a:t>実験系ブロック図
-（image1.png を白黒で清書。FB→OCXO 帰還矢印・PC(MATLAB) ラベルを追記）</a:t>
+              <a:t>今後のロードマップ
+片方向同期 → 平均で −3 dB → N台 → 双方向結合</a:t>
             </a:r>
           </a:p>
         </p:txBody>
@@ -7068,6 +7433,1360 @@
           </a:p>
         </p:txBody>
       </p:sp>
+      <p:grpSp>
+        <p:nvGrpSpPr>
+          <p:cNvPr id="28" name="グループ化 27">
+            <a:extLst>
+              <a:ext uri="{FF2B5EF4-FFF2-40B4-BE49-F238E27FC236}">
+                <a16:creationId xmlns:a16="http://schemas.microsoft.com/office/drawing/2014/main" id="{87F1A145-67EE-D989-0616-084884FAD21F}"/>
+              </a:ext>
+            </a:extLst>
+          </p:cNvPr>
+          <p:cNvGrpSpPr/>
+          <p:nvPr/>
+        </p:nvGrpSpPr>
+        <p:grpSpPr>
+          <a:xfrm>
+            <a:off x="966349" y="2320887"/>
+            <a:ext cx="7285338" cy="550196"/>
+            <a:chOff x="966349" y="2235689"/>
+            <a:chExt cx="7285338" cy="550196"/>
+          </a:xfrm>
+        </p:grpSpPr>
+        <p:grpSp>
+          <p:nvGrpSpPr>
+            <p:cNvPr id="4" name="Google Shape;56;p2">
+              <a:extLst>
+                <a:ext uri="{FF2B5EF4-FFF2-40B4-BE49-F238E27FC236}">
+                  <a16:creationId xmlns:a16="http://schemas.microsoft.com/office/drawing/2014/main" id="{FE881E70-03A8-C9EB-4648-77E20B2E1034}"/>
+                </a:ext>
+              </a:extLst>
+            </p:cNvPr>
+            <p:cNvGrpSpPr/>
+            <p:nvPr/>
+          </p:nvGrpSpPr>
+          <p:grpSpPr>
+            <a:xfrm>
+              <a:off x="966349" y="2260867"/>
+              <a:ext cx="5209544" cy="525018"/>
+              <a:chOff x="1363626" y="1195448"/>
+              <a:chExt cx="5209544" cy="525018"/>
+            </a:xfrm>
+          </p:grpSpPr>
+          <p:sp>
+            <p:nvSpPr>
+              <p:cNvPr id="8" name="Google Shape;57;p2">
+                <a:extLst>
+                  <a:ext uri="{FF2B5EF4-FFF2-40B4-BE49-F238E27FC236}">
+                    <a16:creationId xmlns:a16="http://schemas.microsoft.com/office/drawing/2014/main" id="{BE009C27-9EE4-2208-892F-EE7A83BE4376}"/>
+                  </a:ext>
+                </a:extLst>
+              </p:cNvPr>
+              <p:cNvSpPr/>
+              <p:nvPr/>
+            </p:nvSpPr>
+            <p:spPr>
+              <a:xfrm>
+                <a:off x="1419517" y="1195448"/>
+                <a:ext cx="5153653" cy="525018"/>
+              </a:xfrm>
+              <a:prstGeom prst="rect">
+                <a:avLst/>
+              </a:prstGeom>
+              <a:noFill/>
+              <a:ln>
+                <a:noFill/>
+              </a:ln>
+            </p:spPr>
+            <p:txBody>
+              <a:bodyPr spcFirstLastPara="1" wrap="square" lIns="756000" tIns="36000" rIns="99050" bIns="36000" anchor="ctr" anchorCtr="0">
+                <a:noAutofit/>
+              </a:bodyPr>
+              <a:lstStyle/>
+              <a:p>
+                <a:pPr marL="0" marR="0" lvl="0" indent="0" algn="l" rtl="0">
+                  <a:lnSpc>
+                    <a:spcPct val="100000"/>
+                  </a:lnSpc>
+                  <a:spcBef>
+                    <a:spcPts val="0"/>
+                  </a:spcBef>
+                  <a:spcAft>
+                    <a:spcPts val="0"/>
+                  </a:spcAft>
+                  <a:buClr>
+                    <a:srgbClr val="000000"/>
+                  </a:buClr>
+                  <a:buSzPts val="2000"/>
+                  <a:buFont typeface="Arial"/>
+                  <a:buNone/>
+                </a:pPr>
+                <a:endParaRPr sz="1400" b="0" i="0" u="none" strike="noStrike" cap="none" dirty="0">
+                  <a:solidFill>
+                    <a:srgbClr val="000000"/>
+                  </a:solidFill>
+                  <a:latin typeface="Arial"/>
+                  <a:ea typeface="Arial"/>
+                  <a:cs typeface="Arial"/>
+                  <a:sym typeface="Arial"/>
+                </a:endParaRPr>
+              </a:p>
+            </p:txBody>
+          </p:sp>
+          <p:sp>
+            <p:nvSpPr>
+              <p:cNvPr id="9" name="Google Shape;58;p2">
+                <a:extLst>
+                  <a:ext uri="{FF2B5EF4-FFF2-40B4-BE49-F238E27FC236}">
+                    <a16:creationId xmlns:a16="http://schemas.microsoft.com/office/drawing/2014/main" id="{62C0A97A-CCC7-9FE2-00E6-B7EC607BA7FE}"/>
+                  </a:ext>
+                </a:extLst>
+              </p:cNvPr>
+              <p:cNvSpPr/>
+              <p:nvPr/>
+            </p:nvSpPr>
+            <p:spPr>
+              <a:xfrm>
+                <a:off x="1363626" y="1195448"/>
+                <a:ext cx="681998" cy="525018"/>
+              </a:xfrm>
+              <a:prstGeom prst="homePlate">
+                <a:avLst>
+                  <a:gd name="adj" fmla="val 31952"/>
+                </a:avLst>
+              </a:prstGeom>
+              <a:solidFill>
+                <a:srgbClr val="000F78"/>
+              </a:solidFill>
+              <a:ln>
+                <a:noFill/>
+              </a:ln>
+            </p:spPr>
+            <p:txBody>
+              <a:bodyPr spcFirstLastPara="1" wrap="square" lIns="99050" tIns="49525" rIns="99050" bIns="49525" anchor="ctr" anchorCtr="0">
+                <a:noAutofit/>
+              </a:bodyPr>
+              <a:lstStyle/>
+              <a:p>
+                <a:pPr marL="0" marR="0" lvl="0" indent="0" algn="ctr" rtl="0">
+                  <a:lnSpc>
+                    <a:spcPct val="100000"/>
+                  </a:lnSpc>
+                  <a:spcBef>
+                    <a:spcPts val="0"/>
+                  </a:spcBef>
+                  <a:spcAft>
+                    <a:spcPts val="0"/>
+                  </a:spcAft>
+                  <a:buClr>
+                    <a:srgbClr val="000000"/>
+                  </a:buClr>
+                  <a:buSzPts val="1200"/>
+                  <a:buFont typeface="Arial"/>
+                  <a:buNone/>
+                </a:pPr>
+                <a:r>
+                  <a:rPr lang="ja-JP" sz="1200" b="1" i="0" u="none" strike="noStrike" cap="none">
+                    <a:solidFill>
+                      <a:schemeClr val="lt1"/>
+                    </a:solidFill>
+                    <a:latin typeface="Arial"/>
+                    <a:ea typeface="Arial"/>
+                    <a:cs typeface="Arial"/>
+                    <a:sym typeface="Arial"/>
+                  </a:rPr>
+                  <a:t>0</a:t>
+                </a:r>
+                <a:r>
+                  <a:rPr lang="en-US" altLang="ja-JP" sz="1200" b="1" i="0" u="none" strike="noStrike" cap="none" dirty="0">
+                    <a:solidFill>
+                      <a:schemeClr val="lt1"/>
+                    </a:solidFill>
+                    <a:latin typeface="Arial"/>
+                    <a:ea typeface="Arial"/>
+                    <a:cs typeface="Arial"/>
+                    <a:sym typeface="Arial"/>
+                  </a:rPr>
+                  <a:t>2</a:t>
+                </a:r>
+                <a:endParaRPr sz="1200" b="1" i="0" u="none" strike="noStrike" cap="none" dirty="0">
+                  <a:solidFill>
+                    <a:schemeClr val="lt1"/>
+                  </a:solidFill>
+                  <a:latin typeface="Arial"/>
+                  <a:ea typeface="Arial"/>
+                  <a:cs typeface="Arial"/>
+                  <a:sym typeface="Arial"/>
+                </a:endParaRPr>
+              </a:p>
+            </p:txBody>
+          </p:sp>
+        </p:grpSp>
+        <p:sp>
+          <p:nvSpPr>
+            <p:cNvPr id="10" name="Google Shape;68;p2">
+              <a:extLst>
+                <a:ext uri="{FF2B5EF4-FFF2-40B4-BE49-F238E27FC236}">
+                  <a16:creationId xmlns:a16="http://schemas.microsoft.com/office/drawing/2014/main" id="{67802ABC-BA82-98A3-50D8-837191BCD854}"/>
+                </a:ext>
+              </a:extLst>
+            </p:cNvPr>
+            <p:cNvSpPr/>
+            <p:nvPr/>
+          </p:nvSpPr>
+          <p:spPr>
+            <a:xfrm>
+              <a:off x="966349" y="2235689"/>
+              <a:ext cx="7285338" cy="525018"/>
+            </a:xfrm>
+            <a:prstGeom prst="rect">
+              <a:avLst/>
+            </a:prstGeom>
+            <a:noFill/>
+            <a:ln>
+              <a:noFill/>
+            </a:ln>
+          </p:spPr>
+          <p:txBody>
+            <a:bodyPr spcFirstLastPara="1" wrap="square" lIns="756000" tIns="36000" rIns="99050" bIns="36000" anchor="ctr" anchorCtr="0">
+              <a:noAutofit/>
+            </a:bodyPr>
+            <a:lstStyle/>
+            <a:p>
+              <a:pPr marL="0" marR="0" lvl="0" indent="0" algn="l" rtl="0">
+                <a:lnSpc>
+                  <a:spcPct val="100000"/>
+                </a:lnSpc>
+                <a:spcBef>
+                  <a:spcPts val="0"/>
+                </a:spcBef>
+                <a:spcAft>
+                  <a:spcPts val="0"/>
+                </a:spcAft>
+                <a:buClr>
+                  <a:srgbClr val="000000"/>
+                </a:buClr>
+                <a:buSzPts val="2000"/>
+                <a:buFont typeface="Arial"/>
+                <a:buNone/>
+              </a:pPr>
+              <a:r>
+                <a:rPr lang="ja-JP" sz="2000" b="1" i="0" u="none" strike="noStrike" cap="none">
+                  <a:solidFill>
+                    <a:schemeClr val="dk1"/>
+                  </a:solidFill>
+                  <a:latin typeface="Arial"/>
+                  <a:ea typeface="Arial"/>
+                  <a:cs typeface="Arial"/>
+                  <a:sym typeface="Arial"/>
+                </a:rPr>
+                <a:t> </a:t>
+              </a:r>
+              <a:r>
+                <a:rPr lang="ja-JP" altLang="en-US" sz="2000" b="1" i="0" u="none" strike="noStrike" cap="none">
+                  <a:solidFill>
+                    <a:schemeClr val="dk1"/>
+                  </a:solidFill>
+                  <a:latin typeface="Arial"/>
+                  <a:ea typeface="Arial"/>
+                  <a:cs typeface="Arial"/>
+                  <a:sym typeface="Arial"/>
+                </a:rPr>
+                <a:t>本研究の目標</a:t>
+              </a:r>
+              <a:endParaRPr lang="en-US" altLang="ja-JP" sz="2000" b="1" i="0" u="none" strike="noStrike" cap="none" dirty="0">
+                <a:solidFill>
+                  <a:schemeClr val="dk1"/>
+                </a:solidFill>
+                <a:latin typeface="Arial"/>
+                <a:ea typeface="Arial"/>
+                <a:cs typeface="Arial"/>
+                <a:sym typeface="Arial"/>
+              </a:endParaRPr>
+            </a:p>
+          </p:txBody>
+        </p:sp>
+      </p:grpSp>
+      <p:grpSp>
+        <p:nvGrpSpPr>
+          <p:cNvPr id="29" name="グループ化 28">
+            <a:extLst>
+              <a:ext uri="{FF2B5EF4-FFF2-40B4-BE49-F238E27FC236}">
+                <a16:creationId xmlns:a16="http://schemas.microsoft.com/office/drawing/2014/main" id="{326664E3-DC11-C842-2233-33D2E906848C}"/>
+              </a:ext>
+            </a:extLst>
+          </p:cNvPr>
+          <p:cNvGrpSpPr/>
+          <p:nvPr/>
+        </p:nvGrpSpPr>
+        <p:grpSpPr>
+          <a:xfrm>
+            <a:off x="966349" y="3049829"/>
+            <a:ext cx="7285338" cy="550196"/>
+            <a:chOff x="966349" y="2854847"/>
+            <a:chExt cx="7285338" cy="550196"/>
+          </a:xfrm>
+        </p:grpSpPr>
+        <p:grpSp>
+          <p:nvGrpSpPr>
+            <p:cNvPr id="11" name="Google Shape;56;p2">
+              <a:extLst>
+                <a:ext uri="{FF2B5EF4-FFF2-40B4-BE49-F238E27FC236}">
+                  <a16:creationId xmlns:a16="http://schemas.microsoft.com/office/drawing/2014/main" id="{5B99108C-3C98-59C1-BA22-035CD6D84C45}"/>
+                </a:ext>
+              </a:extLst>
+            </p:cNvPr>
+            <p:cNvGrpSpPr/>
+            <p:nvPr/>
+          </p:nvGrpSpPr>
+          <p:grpSpPr>
+            <a:xfrm>
+              <a:off x="966349" y="2880025"/>
+              <a:ext cx="5209544" cy="525018"/>
+              <a:chOff x="1363626" y="1195448"/>
+              <a:chExt cx="5209544" cy="525018"/>
+            </a:xfrm>
+          </p:grpSpPr>
+          <p:sp>
+            <p:nvSpPr>
+              <p:cNvPr id="12" name="Google Shape;57;p2">
+                <a:extLst>
+                  <a:ext uri="{FF2B5EF4-FFF2-40B4-BE49-F238E27FC236}">
+                    <a16:creationId xmlns:a16="http://schemas.microsoft.com/office/drawing/2014/main" id="{0BE9DA5C-86ED-6EAE-52BA-533BDEC6F87E}"/>
+                  </a:ext>
+                </a:extLst>
+              </p:cNvPr>
+              <p:cNvSpPr/>
+              <p:nvPr/>
+            </p:nvSpPr>
+            <p:spPr>
+              <a:xfrm>
+                <a:off x="1419517" y="1195448"/>
+                <a:ext cx="5153653" cy="525018"/>
+              </a:xfrm>
+              <a:prstGeom prst="rect">
+                <a:avLst/>
+              </a:prstGeom>
+              <a:noFill/>
+              <a:ln>
+                <a:noFill/>
+              </a:ln>
+            </p:spPr>
+            <p:txBody>
+              <a:bodyPr spcFirstLastPara="1" wrap="square" lIns="756000" tIns="36000" rIns="99050" bIns="36000" anchor="ctr" anchorCtr="0">
+                <a:noAutofit/>
+              </a:bodyPr>
+              <a:lstStyle/>
+              <a:p>
+                <a:pPr marL="0" marR="0" lvl="0" indent="0" algn="l" rtl="0">
+                  <a:lnSpc>
+                    <a:spcPct val="100000"/>
+                  </a:lnSpc>
+                  <a:spcBef>
+                    <a:spcPts val="0"/>
+                  </a:spcBef>
+                  <a:spcAft>
+                    <a:spcPts val="0"/>
+                  </a:spcAft>
+                  <a:buClr>
+                    <a:srgbClr val="000000"/>
+                  </a:buClr>
+                  <a:buSzPts val="2000"/>
+                  <a:buFont typeface="Arial"/>
+                  <a:buNone/>
+                </a:pPr>
+                <a:endParaRPr sz="1400" b="0" i="0" u="none" strike="noStrike" cap="none" dirty="0">
+                  <a:solidFill>
+                    <a:srgbClr val="000000"/>
+                  </a:solidFill>
+                  <a:latin typeface="Arial"/>
+                  <a:ea typeface="Arial"/>
+                  <a:cs typeface="Arial"/>
+                  <a:sym typeface="Arial"/>
+                </a:endParaRPr>
+              </a:p>
+            </p:txBody>
+          </p:sp>
+          <p:sp>
+            <p:nvSpPr>
+              <p:cNvPr id="13" name="Google Shape;58;p2">
+                <a:extLst>
+                  <a:ext uri="{FF2B5EF4-FFF2-40B4-BE49-F238E27FC236}">
+                    <a16:creationId xmlns:a16="http://schemas.microsoft.com/office/drawing/2014/main" id="{A0E59B47-6B25-FE76-5709-AFFB28EE80D0}"/>
+                  </a:ext>
+                </a:extLst>
+              </p:cNvPr>
+              <p:cNvSpPr/>
+              <p:nvPr/>
+            </p:nvSpPr>
+            <p:spPr>
+              <a:xfrm>
+                <a:off x="1363626" y="1195448"/>
+                <a:ext cx="681998" cy="525018"/>
+              </a:xfrm>
+              <a:prstGeom prst="homePlate">
+                <a:avLst>
+                  <a:gd name="adj" fmla="val 31952"/>
+                </a:avLst>
+              </a:prstGeom>
+              <a:solidFill>
+                <a:srgbClr val="000F78"/>
+              </a:solidFill>
+              <a:ln>
+                <a:noFill/>
+              </a:ln>
+            </p:spPr>
+            <p:txBody>
+              <a:bodyPr spcFirstLastPara="1" wrap="square" lIns="99050" tIns="49525" rIns="99050" bIns="49525" anchor="ctr" anchorCtr="0">
+                <a:noAutofit/>
+              </a:bodyPr>
+              <a:lstStyle/>
+              <a:p>
+                <a:pPr marL="0" marR="0" lvl="0" indent="0" algn="ctr" rtl="0">
+                  <a:lnSpc>
+                    <a:spcPct val="100000"/>
+                  </a:lnSpc>
+                  <a:spcBef>
+                    <a:spcPts val="0"/>
+                  </a:spcBef>
+                  <a:spcAft>
+                    <a:spcPts val="0"/>
+                  </a:spcAft>
+                  <a:buClr>
+                    <a:srgbClr val="000000"/>
+                  </a:buClr>
+                  <a:buSzPts val="1200"/>
+                  <a:buFont typeface="Arial"/>
+                  <a:buNone/>
+                </a:pPr>
+                <a:r>
+                  <a:rPr lang="ja-JP" sz="1200" b="1" i="0" u="none" strike="noStrike" cap="none">
+                    <a:solidFill>
+                      <a:schemeClr val="lt1"/>
+                    </a:solidFill>
+                    <a:latin typeface="Arial"/>
+                    <a:ea typeface="Arial"/>
+                    <a:cs typeface="Arial"/>
+                    <a:sym typeface="Arial"/>
+                  </a:rPr>
+                  <a:t>0</a:t>
+                </a:r>
+                <a:r>
+                  <a:rPr lang="en-US" altLang="ja-JP" sz="1200" b="1" i="0" u="none" strike="noStrike" cap="none" dirty="0">
+                    <a:solidFill>
+                      <a:schemeClr val="lt1"/>
+                    </a:solidFill>
+                    <a:latin typeface="Arial"/>
+                    <a:ea typeface="Arial"/>
+                    <a:cs typeface="Arial"/>
+                    <a:sym typeface="Arial"/>
+                  </a:rPr>
+                  <a:t>3</a:t>
+                </a:r>
+                <a:endParaRPr sz="1200" b="1" i="0" u="none" strike="noStrike" cap="none" dirty="0">
+                  <a:solidFill>
+                    <a:schemeClr val="lt1"/>
+                  </a:solidFill>
+                  <a:latin typeface="Arial"/>
+                  <a:ea typeface="Arial"/>
+                  <a:cs typeface="Arial"/>
+                  <a:sym typeface="Arial"/>
+                </a:endParaRPr>
+              </a:p>
+            </p:txBody>
+          </p:sp>
+        </p:grpSp>
+        <p:sp>
+          <p:nvSpPr>
+            <p:cNvPr id="14" name="Google Shape;68;p2">
+              <a:extLst>
+                <a:ext uri="{FF2B5EF4-FFF2-40B4-BE49-F238E27FC236}">
+                  <a16:creationId xmlns:a16="http://schemas.microsoft.com/office/drawing/2014/main" id="{2A6F96B4-7264-1FA6-3AC9-9E6497410E11}"/>
+                </a:ext>
+              </a:extLst>
+            </p:cNvPr>
+            <p:cNvSpPr/>
+            <p:nvPr/>
+          </p:nvSpPr>
+          <p:spPr>
+            <a:xfrm>
+              <a:off x="966349" y="2854847"/>
+              <a:ext cx="7285338" cy="525018"/>
+            </a:xfrm>
+            <a:prstGeom prst="rect">
+              <a:avLst/>
+            </a:prstGeom>
+            <a:noFill/>
+            <a:ln>
+              <a:noFill/>
+            </a:ln>
+          </p:spPr>
+          <p:txBody>
+            <a:bodyPr spcFirstLastPara="1" wrap="square" lIns="756000" tIns="36000" rIns="99050" bIns="36000" anchor="ctr" anchorCtr="0">
+              <a:noAutofit/>
+            </a:bodyPr>
+            <a:lstStyle/>
+            <a:p>
+              <a:pPr marL="0" marR="0" lvl="0" indent="0" algn="l" rtl="0">
+                <a:lnSpc>
+                  <a:spcPct val="100000"/>
+                </a:lnSpc>
+                <a:spcBef>
+                  <a:spcPts val="0"/>
+                </a:spcBef>
+                <a:spcAft>
+                  <a:spcPts val="0"/>
+                </a:spcAft>
+                <a:buClr>
+                  <a:srgbClr val="000000"/>
+                </a:buClr>
+                <a:buSzPts val="2000"/>
+                <a:buFont typeface="Arial"/>
+                <a:buNone/>
+              </a:pPr>
+              <a:r>
+                <a:rPr lang="ja-JP" sz="2000" b="1" i="0" u="none" strike="noStrike" cap="none">
+                  <a:solidFill>
+                    <a:schemeClr val="dk1"/>
+                  </a:solidFill>
+                  <a:latin typeface="Arial"/>
+                  <a:ea typeface="Arial"/>
+                  <a:cs typeface="Arial"/>
+                  <a:sym typeface="Arial"/>
+                </a:rPr>
+                <a:t> </a:t>
+              </a:r>
+              <a:r>
+                <a:rPr lang="ja-JP" altLang="en-US" sz="2000" b="1" i="0" u="none" strike="noStrike" cap="none">
+                  <a:solidFill>
+                    <a:schemeClr val="dk1"/>
+                  </a:solidFill>
+                  <a:latin typeface="Arial"/>
+                  <a:ea typeface="Arial"/>
+                  <a:cs typeface="Arial"/>
+                  <a:sym typeface="Arial"/>
+                </a:rPr>
+                <a:t>研究方法</a:t>
+              </a:r>
+              <a:endParaRPr lang="en-US" altLang="ja-JP" sz="2000" b="1" i="0" u="none" strike="noStrike" cap="none" dirty="0">
+                <a:solidFill>
+                  <a:schemeClr val="dk1"/>
+                </a:solidFill>
+                <a:latin typeface="Arial"/>
+                <a:ea typeface="Arial"/>
+                <a:cs typeface="Arial"/>
+                <a:sym typeface="Arial"/>
+              </a:endParaRPr>
+            </a:p>
+          </p:txBody>
+        </p:sp>
+      </p:grpSp>
+      <p:grpSp>
+        <p:nvGrpSpPr>
+          <p:cNvPr id="30" name="グループ化 29">
+            <a:extLst>
+              <a:ext uri="{FF2B5EF4-FFF2-40B4-BE49-F238E27FC236}">
+                <a16:creationId xmlns:a16="http://schemas.microsoft.com/office/drawing/2014/main" id="{841A2931-A659-0346-5CD4-D536C9AEE1A4}"/>
+              </a:ext>
+            </a:extLst>
+          </p:cNvPr>
+          <p:cNvGrpSpPr/>
+          <p:nvPr/>
+        </p:nvGrpSpPr>
+        <p:grpSpPr>
+          <a:xfrm>
+            <a:off x="966349" y="3778771"/>
+            <a:ext cx="7285338" cy="550196"/>
+            <a:chOff x="966349" y="3476162"/>
+            <a:chExt cx="7285338" cy="550196"/>
+          </a:xfrm>
+        </p:grpSpPr>
+        <p:grpSp>
+          <p:nvGrpSpPr>
+            <p:cNvPr id="15" name="Google Shape;56;p2">
+              <a:extLst>
+                <a:ext uri="{FF2B5EF4-FFF2-40B4-BE49-F238E27FC236}">
+                  <a16:creationId xmlns:a16="http://schemas.microsoft.com/office/drawing/2014/main" id="{C787518E-46B1-A0A7-B751-A1A66CF95DBC}"/>
+                </a:ext>
+              </a:extLst>
+            </p:cNvPr>
+            <p:cNvGrpSpPr/>
+            <p:nvPr/>
+          </p:nvGrpSpPr>
+          <p:grpSpPr>
+            <a:xfrm>
+              <a:off x="966349" y="3501340"/>
+              <a:ext cx="5209544" cy="525018"/>
+              <a:chOff x="1363626" y="1195448"/>
+              <a:chExt cx="5209544" cy="525018"/>
+            </a:xfrm>
+          </p:grpSpPr>
+          <p:sp>
+            <p:nvSpPr>
+              <p:cNvPr id="16" name="Google Shape;57;p2">
+                <a:extLst>
+                  <a:ext uri="{FF2B5EF4-FFF2-40B4-BE49-F238E27FC236}">
+                    <a16:creationId xmlns:a16="http://schemas.microsoft.com/office/drawing/2014/main" id="{CAF34C88-19F4-5A3F-904E-E4BB54EFA288}"/>
+                  </a:ext>
+                </a:extLst>
+              </p:cNvPr>
+              <p:cNvSpPr/>
+              <p:nvPr/>
+            </p:nvSpPr>
+            <p:spPr>
+              <a:xfrm>
+                <a:off x="1419517" y="1195448"/>
+                <a:ext cx="5153653" cy="525018"/>
+              </a:xfrm>
+              <a:prstGeom prst="rect">
+                <a:avLst/>
+              </a:prstGeom>
+              <a:noFill/>
+              <a:ln>
+                <a:noFill/>
+              </a:ln>
+            </p:spPr>
+            <p:txBody>
+              <a:bodyPr spcFirstLastPara="1" wrap="square" lIns="756000" tIns="36000" rIns="99050" bIns="36000" anchor="ctr" anchorCtr="0">
+                <a:noAutofit/>
+              </a:bodyPr>
+              <a:lstStyle/>
+              <a:p>
+                <a:pPr marL="0" marR="0" lvl="0" indent="0" algn="l" rtl="0">
+                  <a:lnSpc>
+                    <a:spcPct val="100000"/>
+                  </a:lnSpc>
+                  <a:spcBef>
+                    <a:spcPts val="0"/>
+                  </a:spcBef>
+                  <a:spcAft>
+                    <a:spcPts val="0"/>
+                  </a:spcAft>
+                  <a:buClr>
+                    <a:srgbClr val="000000"/>
+                  </a:buClr>
+                  <a:buSzPts val="2000"/>
+                  <a:buFont typeface="Arial"/>
+                  <a:buNone/>
+                </a:pPr>
+                <a:endParaRPr sz="1400" b="0" i="0" u="none" strike="noStrike" cap="none" dirty="0">
+                  <a:solidFill>
+                    <a:srgbClr val="000000"/>
+                  </a:solidFill>
+                  <a:latin typeface="Arial"/>
+                  <a:ea typeface="Arial"/>
+                  <a:cs typeface="Arial"/>
+                  <a:sym typeface="Arial"/>
+                </a:endParaRPr>
+              </a:p>
+            </p:txBody>
+          </p:sp>
+          <p:sp>
+            <p:nvSpPr>
+              <p:cNvPr id="17" name="Google Shape;58;p2">
+                <a:extLst>
+                  <a:ext uri="{FF2B5EF4-FFF2-40B4-BE49-F238E27FC236}">
+                    <a16:creationId xmlns:a16="http://schemas.microsoft.com/office/drawing/2014/main" id="{C6E13D04-1959-787E-E2E3-EF3F0A7382D9}"/>
+                  </a:ext>
+                </a:extLst>
+              </p:cNvPr>
+              <p:cNvSpPr/>
+              <p:nvPr/>
+            </p:nvSpPr>
+            <p:spPr>
+              <a:xfrm>
+                <a:off x="1363626" y="1195448"/>
+                <a:ext cx="681998" cy="525018"/>
+              </a:xfrm>
+              <a:prstGeom prst="homePlate">
+                <a:avLst>
+                  <a:gd name="adj" fmla="val 31952"/>
+                </a:avLst>
+              </a:prstGeom>
+              <a:solidFill>
+                <a:srgbClr val="000F78"/>
+              </a:solidFill>
+              <a:ln>
+                <a:noFill/>
+              </a:ln>
+            </p:spPr>
+            <p:txBody>
+              <a:bodyPr spcFirstLastPara="1" wrap="square" lIns="99050" tIns="49525" rIns="99050" bIns="49525" anchor="ctr" anchorCtr="0">
+                <a:noAutofit/>
+              </a:bodyPr>
+              <a:lstStyle/>
+              <a:p>
+                <a:pPr marL="0" marR="0" lvl="0" indent="0" algn="ctr" rtl="0">
+                  <a:lnSpc>
+                    <a:spcPct val="100000"/>
+                  </a:lnSpc>
+                  <a:spcBef>
+                    <a:spcPts val="0"/>
+                  </a:spcBef>
+                  <a:spcAft>
+                    <a:spcPts val="0"/>
+                  </a:spcAft>
+                  <a:buClr>
+                    <a:srgbClr val="000000"/>
+                  </a:buClr>
+                  <a:buSzPts val="1200"/>
+                  <a:buFont typeface="Arial"/>
+                  <a:buNone/>
+                </a:pPr>
+                <a:r>
+                  <a:rPr lang="ja-JP" sz="1200" b="1" i="0" u="none" strike="noStrike" cap="none">
+                    <a:solidFill>
+                      <a:schemeClr val="lt1"/>
+                    </a:solidFill>
+                    <a:latin typeface="Arial"/>
+                    <a:ea typeface="Arial"/>
+                    <a:cs typeface="Arial"/>
+                    <a:sym typeface="Arial"/>
+                  </a:rPr>
+                  <a:t>0</a:t>
+                </a:r>
+                <a:r>
+                  <a:rPr lang="en-US" altLang="ja-JP" sz="1200" b="1" i="0" u="none" strike="noStrike" cap="none" dirty="0">
+                    <a:solidFill>
+                      <a:schemeClr val="lt1"/>
+                    </a:solidFill>
+                    <a:latin typeface="Arial"/>
+                    <a:ea typeface="Arial"/>
+                    <a:cs typeface="Arial"/>
+                    <a:sym typeface="Arial"/>
+                  </a:rPr>
+                  <a:t>4</a:t>
+                </a:r>
+                <a:endParaRPr sz="1200" b="1" i="0" u="none" strike="noStrike" cap="none" dirty="0">
+                  <a:solidFill>
+                    <a:schemeClr val="lt1"/>
+                  </a:solidFill>
+                  <a:latin typeface="Arial"/>
+                  <a:ea typeface="Arial"/>
+                  <a:cs typeface="Arial"/>
+                  <a:sym typeface="Arial"/>
+                </a:endParaRPr>
+              </a:p>
+            </p:txBody>
+          </p:sp>
+        </p:grpSp>
+        <p:sp>
+          <p:nvSpPr>
+            <p:cNvPr id="18" name="Google Shape;68;p2">
+              <a:extLst>
+                <a:ext uri="{FF2B5EF4-FFF2-40B4-BE49-F238E27FC236}">
+                  <a16:creationId xmlns:a16="http://schemas.microsoft.com/office/drawing/2014/main" id="{77A0AFEF-9CEC-1345-7D86-F863612B480E}"/>
+                </a:ext>
+              </a:extLst>
+            </p:cNvPr>
+            <p:cNvSpPr/>
+            <p:nvPr/>
+          </p:nvSpPr>
+          <p:spPr>
+            <a:xfrm>
+              <a:off x="966349" y="3476162"/>
+              <a:ext cx="7285338" cy="525018"/>
+            </a:xfrm>
+            <a:prstGeom prst="rect">
+              <a:avLst/>
+            </a:prstGeom>
+            <a:noFill/>
+            <a:ln>
+              <a:noFill/>
+            </a:ln>
+          </p:spPr>
+          <p:txBody>
+            <a:bodyPr spcFirstLastPara="1" wrap="square" lIns="756000" tIns="36000" rIns="99050" bIns="36000" anchor="ctr" anchorCtr="0">
+              <a:noAutofit/>
+            </a:bodyPr>
+            <a:lstStyle/>
+            <a:p>
+              <a:pPr marL="0" marR="0" lvl="0" indent="0" algn="l" rtl="0">
+                <a:lnSpc>
+                  <a:spcPct val="100000"/>
+                </a:lnSpc>
+                <a:spcBef>
+                  <a:spcPts val="0"/>
+                </a:spcBef>
+                <a:spcAft>
+                  <a:spcPts val="0"/>
+                </a:spcAft>
+                <a:buClr>
+                  <a:srgbClr val="000000"/>
+                </a:buClr>
+                <a:buSzPts val="2000"/>
+                <a:buFont typeface="Arial"/>
+                <a:buNone/>
+              </a:pPr>
+              <a:r>
+                <a:rPr lang="ja-JP" sz="2000" b="1" i="0" u="none" strike="noStrike" cap="none">
+                  <a:solidFill>
+                    <a:schemeClr val="dk1"/>
+                  </a:solidFill>
+                  <a:latin typeface="Arial"/>
+                  <a:ea typeface="Arial"/>
+                  <a:cs typeface="Arial"/>
+                  <a:sym typeface="Arial"/>
+                </a:rPr>
+                <a:t> </a:t>
+              </a:r>
+              <a:r>
+                <a:rPr lang="ja-JP" altLang="en-US" sz="2000" b="1" i="0" u="none" strike="noStrike" cap="none">
+                  <a:solidFill>
+                    <a:schemeClr val="dk1"/>
+                  </a:solidFill>
+                  <a:latin typeface="Arial"/>
+                  <a:ea typeface="Arial"/>
+                  <a:cs typeface="Arial"/>
+                  <a:sym typeface="Arial"/>
+                </a:rPr>
+                <a:t>実験と結果</a:t>
+              </a:r>
+              <a:endParaRPr lang="en-US" altLang="ja-JP" sz="2000" b="1" i="0" u="none" strike="noStrike" cap="none" dirty="0">
+                <a:solidFill>
+                  <a:schemeClr val="dk1"/>
+                </a:solidFill>
+                <a:latin typeface="Arial"/>
+                <a:ea typeface="Arial"/>
+                <a:cs typeface="Arial"/>
+                <a:sym typeface="Arial"/>
+              </a:endParaRPr>
+            </a:p>
+          </p:txBody>
+        </p:sp>
+      </p:grpSp>
+      <p:grpSp>
+        <p:nvGrpSpPr>
+          <p:cNvPr id="31" name="グループ化 30">
+            <a:extLst>
+              <a:ext uri="{FF2B5EF4-FFF2-40B4-BE49-F238E27FC236}">
+                <a16:creationId xmlns:a16="http://schemas.microsoft.com/office/drawing/2014/main" id="{270CE68A-EE4B-1058-5DEF-747E26FBF936}"/>
+              </a:ext>
+            </a:extLst>
+          </p:cNvPr>
+          <p:cNvGrpSpPr/>
+          <p:nvPr/>
+        </p:nvGrpSpPr>
+        <p:grpSpPr>
+          <a:xfrm>
+            <a:off x="966349" y="4507713"/>
+            <a:ext cx="7285338" cy="550196"/>
+            <a:chOff x="966349" y="4068137"/>
+            <a:chExt cx="7285338" cy="550196"/>
+          </a:xfrm>
+        </p:grpSpPr>
+        <p:grpSp>
+          <p:nvGrpSpPr>
+            <p:cNvPr id="19" name="Google Shape;56;p2">
+              <a:extLst>
+                <a:ext uri="{FF2B5EF4-FFF2-40B4-BE49-F238E27FC236}">
+                  <a16:creationId xmlns:a16="http://schemas.microsoft.com/office/drawing/2014/main" id="{6C9604AD-0804-F50F-68BE-C4FC8764BED9}"/>
+                </a:ext>
+              </a:extLst>
+            </p:cNvPr>
+            <p:cNvGrpSpPr/>
+            <p:nvPr/>
+          </p:nvGrpSpPr>
+          <p:grpSpPr>
+            <a:xfrm>
+              <a:off x="966349" y="4093315"/>
+              <a:ext cx="5209544" cy="525018"/>
+              <a:chOff x="1363626" y="1195448"/>
+              <a:chExt cx="5209544" cy="525018"/>
+            </a:xfrm>
+          </p:grpSpPr>
+          <p:sp>
+            <p:nvSpPr>
+              <p:cNvPr id="20" name="Google Shape;57;p2">
+                <a:extLst>
+                  <a:ext uri="{FF2B5EF4-FFF2-40B4-BE49-F238E27FC236}">
+                    <a16:creationId xmlns:a16="http://schemas.microsoft.com/office/drawing/2014/main" id="{110679F9-B8AA-5B19-0E99-11326BD66E72}"/>
+                  </a:ext>
+                </a:extLst>
+              </p:cNvPr>
+              <p:cNvSpPr/>
+              <p:nvPr/>
+            </p:nvSpPr>
+            <p:spPr>
+              <a:xfrm>
+                <a:off x="1419517" y="1195448"/>
+                <a:ext cx="5153653" cy="525018"/>
+              </a:xfrm>
+              <a:prstGeom prst="rect">
+                <a:avLst/>
+              </a:prstGeom>
+              <a:noFill/>
+              <a:ln>
+                <a:noFill/>
+              </a:ln>
+            </p:spPr>
+            <p:txBody>
+              <a:bodyPr spcFirstLastPara="1" wrap="square" lIns="756000" tIns="36000" rIns="99050" bIns="36000" anchor="ctr" anchorCtr="0">
+                <a:noAutofit/>
+              </a:bodyPr>
+              <a:lstStyle/>
+              <a:p>
+                <a:pPr marL="0" marR="0" lvl="0" indent="0" algn="l" rtl="0">
+                  <a:lnSpc>
+                    <a:spcPct val="100000"/>
+                  </a:lnSpc>
+                  <a:spcBef>
+                    <a:spcPts val="0"/>
+                  </a:spcBef>
+                  <a:spcAft>
+                    <a:spcPts val="0"/>
+                  </a:spcAft>
+                  <a:buClr>
+                    <a:srgbClr val="000000"/>
+                  </a:buClr>
+                  <a:buSzPts val="2000"/>
+                  <a:buFont typeface="Arial"/>
+                  <a:buNone/>
+                </a:pPr>
+                <a:endParaRPr sz="1400" b="0" i="0" u="none" strike="noStrike" cap="none" dirty="0">
+                  <a:solidFill>
+                    <a:srgbClr val="000000"/>
+                  </a:solidFill>
+                  <a:latin typeface="Arial"/>
+                  <a:ea typeface="Arial"/>
+                  <a:cs typeface="Arial"/>
+                  <a:sym typeface="Arial"/>
+                </a:endParaRPr>
+              </a:p>
+            </p:txBody>
+          </p:sp>
+          <p:sp>
+            <p:nvSpPr>
+              <p:cNvPr id="21" name="Google Shape;58;p2">
+                <a:extLst>
+                  <a:ext uri="{FF2B5EF4-FFF2-40B4-BE49-F238E27FC236}">
+                    <a16:creationId xmlns:a16="http://schemas.microsoft.com/office/drawing/2014/main" id="{DA223E69-B477-1B68-EAA2-DFA9D6D01569}"/>
+                  </a:ext>
+                </a:extLst>
+              </p:cNvPr>
+              <p:cNvSpPr/>
+              <p:nvPr/>
+            </p:nvSpPr>
+            <p:spPr>
+              <a:xfrm>
+                <a:off x="1363626" y="1195448"/>
+                <a:ext cx="681998" cy="525018"/>
+              </a:xfrm>
+              <a:prstGeom prst="homePlate">
+                <a:avLst>
+                  <a:gd name="adj" fmla="val 31952"/>
+                </a:avLst>
+              </a:prstGeom>
+              <a:solidFill>
+                <a:srgbClr val="000F78"/>
+              </a:solidFill>
+              <a:ln>
+                <a:noFill/>
+              </a:ln>
+            </p:spPr>
+            <p:txBody>
+              <a:bodyPr spcFirstLastPara="1" wrap="square" lIns="99050" tIns="49525" rIns="99050" bIns="49525" anchor="ctr" anchorCtr="0">
+                <a:noAutofit/>
+              </a:bodyPr>
+              <a:lstStyle/>
+              <a:p>
+                <a:pPr marL="0" marR="0" lvl="0" indent="0" algn="ctr" rtl="0">
+                  <a:lnSpc>
+                    <a:spcPct val="100000"/>
+                  </a:lnSpc>
+                  <a:spcBef>
+                    <a:spcPts val="0"/>
+                  </a:spcBef>
+                  <a:spcAft>
+                    <a:spcPts val="0"/>
+                  </a:spcAft>
+                  <a:buClr>
+                    <a:srgbClr val="000000"/>
+                  </a:buClr>
+                  <a:buSzPts val="1200"/>
+                  <a:buFont typeface="Arial"/>
+                  <a:buNone/>
+                </a:pPr>
+                <a:r>
+                  <a:rPr lang="ja-JP" sz="1200" b="1" i="0" u="none" strike="noStrike" cap="none">
+                    <a:solidFill>
+                      <a:schemeClr val="lt1"/>
+                    </a:solidFill>
+                    <a:latin typeface="Arial"/>
+                    <a:ea typeface="Arial"/>
+                    <a:cs typeface="Arial"/>
+                    <a:sym typeface="Arial"/>
+                  </a:rPr>
+                  <a:t>0</a:t>
+                </a:r>
+                <a:r>
+                  <a:rPr lang="en-US" altLang="ja-JP" sz="1200" b="1" i="0" u="none" strike="noStrike" cap="none" dirty="0">
+                    <a:solidFill>
+                      <a:schemeClr val="lt1"/>
+                    </a:solidFill>
+                    <a:latin typeface="Arial"/>
+                    <a:ea typeface="Arial"/>
+                    <a:cs typeface="Arial"/>
+                    <a:sym typeface="Arial"/>
+                  </a:rPr>
+                  <a:t>5</a:t>
+                </a:r>
+                <a:endParaRPr sz="1200" b="1" i="0" u="none" strike="noStrike" cap="none" dirty="0">
+                  <a:solidFill>
+                    <a:schemeClr val="lt1"/>
+                  </a:solidFill>
+                  <a:latin typeface="Arial"/>
+                  <a:ea typeface="Arial"/>
+                  <a:cs typeface="Arial"/>
+                  <a:sym typeface="Arial"/>
+                </a:endParaRPr>
+              </a:p>
+            </p:txBody>
+          </p:sp>
+        </p:grpSp>
+        <p:sp>
+          <p:nvSpPr>
+            <p:cNvPr id="22" name="Google Shape;68;p2">
+              <a:extLst>
+                <a:ext uri="{FF2B5EF4-FFF2-40B4-BE49-F238E27FC236}">
+                  <a16:creationId xmlns:a16="http://schemas.microsoft.com/office/drawing/2014/main" id="{F761D5D0-7141-AE81-C392-23D8AD8829E1}"/>
+                </a:ext>
+              </a:extLst>
+            </p:cNvPr>
+            <p:cNvSpPr/>
+            <p:nvPr/>
+          </p:nvSpPr>
+          <p:spPr>
+            <a:xfrm>
+              <a:off x="966349" y="4068137"/>
+              <a:ext cx="7285338" cy="525018"/>
+            </a:xfrm>
+            <a:prstGeom prst="rect">
+              <a:avLst/>
+            </a:prstGeom>
+            <a:noFill/>
+            <a:ln>
+              <a:noFill/>
+            </a:ln>
+          </p:spPr>
+          <p:txBody>
+            <a:bodyPr spcFirstLastPara="1" wrap="square" lIns="756000" tIns="36000" rIns="99050" bIns="36000" anchor="ctr" anchorCtr="0">
+              <a:noAutofit/>
+            </a:bodyPr>
+            <a:lstStyle/>
+            <a:p>
+              <a:pPr marL="0" marR="0" lvl="0" indent="0" algn="l" rtl="0">
+                <a:lnSpc>
+                  <a:spcPct val="100000"/>
+                </a:lnSpc>
+                <a:spcBef>
+                  <a:spcPts val="0"/>
+                </a:spcBef>
+                <a:spcAft>
+                  <a:spcPts val="0"/>
+                </a:spcAft>
+                <a:buClr>
+                  <a:srgbClr val="000000"/>
+                </a:buClr>
+                <a:buSzPts val="2000"/>
+                <a:buFont typeface="Arial"/>
+                <a:buNone/>
+              </a:pPr>
+              <a:r>
+                <a:rPr lang="ja-JP" sz="2000" b="1" i="0" u="none" strike="noStrike" cap="none">
+                  <a:solidFill>
+                    <a:schemeClr val="dk1"/>
+                  </a:solidFill>
+                  <a:latin typeface="Arial"/>
+                  <a:ea typeface="Arial"/>
+                  <a:cs typeface="Arial"/>
+                  <a:sym typeface="Arial"/>
+                </a:rPr>
+                <a:t> </a:t>
+              </a:r>
+              <a:r>
+                <a:rPr lang="ja-JP" altLang="en-US" sz="2000" b="1">
+                  <a:solidFill>
+                    <a:schemeClr val="dk1"/>
+                  </a:solidFill>
+                </a:rPr>
+                <a:t>考察と今後の展望</a:t>
+              </a:r>
+              <a:endParaRPr lang="en-US" altLang="ja-JP" sz="2000" b="1" i="0" u="none" strike="noStrike" cap="none" dirty="0">
+                <a:solidFill>
+                  <a:schemeClr val="dk1"/>
+                </a:solidFill>
+                <a:latin typeface="Arial"/>
+                <a:ea typeface="Arial"/>
+                <a:cs typeface="Arial"/>
+                <a:sym typeface="Arial"/>
+              </a:endParaRPr>
+            </a:p>
+          </p:txBody>
+        </p:sp>
+      </p:grpSp>
+      <p:grpSp>
+        <p:nvGrpSpPr>
+          <p:cNvPr id="27" name="グループ化 26">
+            <a:extLst>
+              <a:ext uri="{FF2B5EF4-FFF2-40B4-BE49-F238E27FC236}">
+                <a16:creationId xmlns:a16="http://schemas.microsoft.com/office/drawing/2014/main" id="{13ABD878-DFB2-6205-FF5D-49881191621D}"/>
+              </a:ext>
+            </a:extLst>
+          </p:cNvPr>
+          <p:cNvGrpSpPr/>
+          <p:nvPr/>
+        </p:nvGrpSpPr>
+        <p:grpSpPr>
+          <a:xfrm>
+            <a:off x="966349" y="1591945"/>
+            <a:ext cx="7285338" cy="550196"/>
+            <a:chOff x="966349" y="1614374"/>
+            <a:chExt cx="7285338" cy="550196"/>
+          </a:xfrm>
+        </p:grpSpPr>
+        <p:grpSp>
+          <p:nvGrpSpPr>
+            <p:cNvPr id="23" name="Google Shape;56;p2">
+              <a:extLst>
+                <a:ext uri="{FF2B5EF4-FFF2-40B4-BE49-F238E27FC236}">
+                  <a16:creationId xmlns:a16="http://schemas.microsoft.com/office/drawing/2014/main" id="{74C13A1A-09E8-428D-27DA-09C0B3571617}"/>
+                </a:ext>
+              </a:extLst>
+            </p:cNvPr>
+            <p:cNvGrpSpPr/>
+            <p:nvPr/>
+          </p:nvGrpSpPr>
+          <p:grpSpPr>
+            <a:xfrm>
+              <a:off x="966349" y="1639552"/>
+              <a:ext cx="5209544" cy="525018"/>
+              <a:chOff x="1363626" y="1195448"/>
+              <a:chExt cx="5209544" cy="525018"/>
+            </a:xfrm>
+          </p:grpSpPr>
+          <p:sp>
+            <p:nvSpPr>
+              <p:cNvPr id="24" name="Google Shape;57;p2">
+                <a:extLst>
+                  <a:ext uri="{FF2B5EF4-FFF2-40B4-BE49-F238E27FC236}">
+                    <a16:creationId xmlns:a16="http://schemas.microsoft.com/office/drawing/2014/main" id="{F88788C3-F177-8F1C-E3BD-9B46A058BD7C}"/>
+                  </a:ext>
+                </a:extLst>
+              </p:cNvPr>
+              <p:cNvSpPr/>
+              <p:nvPr/>
+            </p:nvSpPr>
+            <p:spPr>
+              <a:xfrm>
+                <a:off x="1419517" y="1195448"/>
+                <a:ext cx="5153653" cy="525018"/>
+              </a:xfrm>
+              <a:prstGeom prst="rect">
+                <a:avLst/>
+              </a:prstGeom>
+              <a:noFill/>
+              <a:ln>
+                <a:noFill/>
+              </a:ln>
+            </p:spPr>
+            <p:txBody>
+              <a:bodyPr spcFirstLastPara="1" wrap="square" lIns="756000" tIns="36000" rIns="99050" bIns="36000" anchor="ctr" anchorCtr="0">
+                <a:noAutofit/>
+              </a:bodyPr>
+              <a:lstStyle/>
+              <a:p>
+                <a:pPr marL="0" marR="0" lvl="0" indent="0" algn="l" rtl="0">
+                  <a:lnSpc>
+                    <a:spcPct val="100000"/>
+                  </a:lnSpc>
+                  <a:spcBef>
+                    <a:spcPts val="0"/>
+                  </a:spcBef>
+                  <a:spcAft>
+                    <a:spcPts val="0"/>
+                  </a:spcAft>
+                  <a:buClr>
+                    <a:srgbClr val="000000"/>
+                  </a:buClr>
+                  <a:buSzPts val="2000"/>
+                  <a:buFont typeface="Arial"/>
+                  <a:buNone/>
+                </a:pPr>
+                <a:endParaRPr sz="1400" b="0" i="0" u="none" strike="noStrike" cap="none" dirty="0">
+                  <a:solidFill>
+                    <a:srgbClr val="000000"/>
+                  </a:solidFill>
+                  <a:latin typeface="Arial"/>
+                  <a:ea typeface="Arial"/>
+                  <a:cs typeface="Arial"/>
+                  <a:sym typeface="Arial"/>
+                </a:endParaRPr>
+              </a:p>
+            </p:txBody>
+          </p:sp>
+          <p:sp>
+            <p:nvSpPr>
+              <p:cNvPr id="25" name="Google Shape;58;p2">
+                <a:extLst>
+                  <a:ext uri="{FF2B5EF4-FFF2-40B4-BE49-F238E27FC236}">
+                    <a16:creationId xmlns:a16="http://schemas.microsoft.com/office/drawing/2014/main" id="{E9DAE931-8800-6403-E648-186C4E4E0913}"/>
+                  </a:ext>
+                </a:extLst>
+              </p:cNvPr>
+              <p:cNvSpPr/>
+              <p:nvPr/>
+            </p:nvSpPr>
+            <p:spPr>
+              <a:xfrm>
+                <a:off x="1363626" y="1195448"/>
+                <a:ext cx="681998" cy="525018"/>
+              </a:xfrm>
+              <a:prstGeom prst="homePlate">
+                <a:avLst>
+                  <a:gd name="adj" fmla="val 31952"/>
+                </a:avLst>
+              </a:prstGeom>
+              <a:solidFill>
+                <a:srgbClr val="000F78"/>
+              </a:solidFill>
+              <a:ln>
+                <a:noFill/>
+              </a:ln>
+            </p:spPr>
+            <p:txBody>
+              <a:bodyPr spcFirstLastPara="1" wrap="square" lIns="99050" tIns="49525" rIns="99050" bIns="49525" anchor="ctr" anchorCtr="0">
+                <a:noAutofit/>
+              </a:bodyPr>
+              <a:lstStyle/>
+              <a:p>
+                <a:pPr marL="0" marR="0" lvl="0" indent="0" algn="ctr" rtl="0">
+                  <a:lnSpc>
+                    <a:spcPct val="100000"/>
+                  </a:lnSpc>
+                  <a:spcBef>
+                    <a:spcPts val="0"/>
+                  </a:spcBef>
+                  <a:spcAft>
+                    <a:spcPts val="0"/>
+                  </a:spcAft>
+                  <a:buClr>
+                    <a:srgbClr val="000000"/>
+                  </a:buClr>
+                  <a:buSzPts val="1200"/>
+                  <a:buFont typeface="Arial"/>
+                  <a:buNone/>
+                </a:pPr>
+                <a:r>
+                  <a:rPr lang="ja-JP" sz="1200" b="1" i="0" u="none" strike="noStrike" cap="none">
+                    <a:solidFill>
+                      <a:schemeClr val="lt1"/>
+                    </a:solidFill>
+                    <a:latin typeface="Arial"/>
+                    <a:ea typeface="Arial"/>
+                    <a:cs typeface="Arial"/>
+                    <a:sym typeface="Arial"/>
+                  </a:rPr>
+                  <a:t>01</a:t>
+                </a:r>
+                <a:endParaRPr sz="1200" b="1" i="0" u="none" strike="noStrike" cap="none" dirty="0">
+                  <a:solidFill>
+                    <a:schemeClr val="lt1"/>
+                  </a:solidFill>
+                  <a:latin typeface="Arial"/>
+                  <a:ea typeface="Arial"/>
+                  <a:cs typeface="Arial"/>
+                  <a:sym typeface="Arial"/>
+                </a:endParaRPr>
+              </a:p>
+            </p:txBody>
+          </p:sp>
+        </p:grpSp>
+        <p:sp>
+          <p:nvSpPr>
+            <p:cNvPr id="26" name="Google Shape;68;p2">
+              <a:extLst>
+                <a:ext uri="{FF2B5EF4-FFF2-40B4-BE49-F238E27FC236}">
+                  <a16:creationId xmlns:a16="http://schemas.microsoft.com/office/drawing/2014/main" id="{E7DAC789-BAB3-37E1-722A-37EAE53CAD85}"/>
+                </a:ext>
+              </a:extLst>
+            </p:cNvPr>
+            <p:cNvSpPr/>
+            <p:nvPr/>
+          </p:nvSpPr>
+          <p:spPr>
+            <a:xfrm>
+              <a:off x="966349" y="1614374"/>
+              <a:ext cx="7285338" cy="525018"/>
+            </a:xfrm>
+            <a:prstGeom prst="rect">
+              <a:avLst/>
+            </a:prstGeom>
+            <a:noFill/>
+            <a:ln>
+              <a:noFill/>
+            </a:ln>
+          </p:spPr>
+          <p:txBody>
+            <a:bodyPr spcFirstLastPara="1" wrap="square" lIns="756000" tIns="36000" rIns="99050" bIns="36000" anchor="ctr" anchorCtr="0">
+              <a:noAutofit/>
+            </a:bodyPr>
+            <a:lstStyle/>
+            <a:p>
+              <a:pPr marL="0" marR="0" lvl="0" indent="0" algn="l" rtl="0">
+                <a:lnSpc>
+                  <a:spcPct val="100000"/>
+                </a:lnSpc>
+                <a:spcBef>
+                  <a:spcPts val="0"/>
+                </a:spcBef>
+                <a:spcAft>
+                  <a:spcPts val="0"/>
+                </a:spcAft>
+                <a:buClr>
+                  <a:srgbClr val="000000"/>
+                </a:buClr>
+                <a:buSzPts val="2000"/>
+                <a:buFont typeface="Arial"/>
+                <a:buNone/>
+              </a:pPr>
+              <a:r>
+                <a:rPr lang="ja-JP" sz="2000" b="1" i="0" u="none" strike="noStrike" cap="none">
+                  <a:solidFill>
+                    <a:schemeClr val="dk1"/>
+                  </a:solidFill>
+                  <a:latin typeface="Arial"/>
+                  <a:ea typeface="Arial"/>
+                  <a:cs typeface="Arial"/>
+                  <a:sym typeface="Arial"/>
+                </a:rPr>
+                <a:t> </a:t>
+              </a:r>
+              <a:r>
+                <a:rPr lang="ja-JP" altLang="en-US" sz="2000" b="1" i="0" u="none" strike="noStrike" cap="none">
+                  <a:solidFill>
+                    <a:schemeClr val="dk1"/>
+                  </a:solidFill>
+                  <a:latin typeface="Arial"/>
+                  <a:ea typeface="Arial"/>
+                  <a:cs typeface="Arial"/>
+                  <a:sym typeface="Arial"/>
+                </a:rPr>
+                <a:t>研究背景</a:t>
+              </a:r>
+              <a:endParaRPr lang="en-US" altLang="ja-JP" sz="2000" b="1" i="0" u="none" strike="noStrike" cap="none" dirty="0">
+                <a:solidFill>
+                  <a:schemeClr val="dk1"/>
+                </a:solidFill>
+                <a:latin typeface="Arial"/>
+                <a:ea typeface="Arial"/>
+                <a:cs typeface="Arial"/>
+                <a:sym typeface="Arial"/>
+              </a:endParaRPr>
+            </a:p>
+          </p:txBody>
+        </p:sp>
+      </p:grpSp>
       <p:sp>
         <p:nvSpPr>
           <p:cNvPr id="32" name="Google Shape;12;p41">
@@ -7143,334 +8862,271 @@
           </a:p>
         </p:txBody>
       </p:sp>
-      <p:sp>
-        <p:nvSpPr>
-          <p:cNvPr id="72" name="Chevron 71"/>
-          <p:cNvSpPr/>
+      <p:grpSp>
+        <p:nvGrpSpPr>
+          <p:cNvPr id="35" name="グループ化 34">
+            <a:extLst>
+              <a:ext uri="{FF2B5EF4-FFF2-40B4-BE49-F238E27FC236}">
+                <a16:creationId xmlns:a16="http://schemas.microsoft.com/office/drawing/2014/main" id="{9DC018A6-938B-EC91-B461-ECC4FC5AB921}"/>
+              </a:ext>
+            </a:extLst>
+          </p:cNvPr>
+          <p:cNvGrpSpPr/>
           <p:nvPr/>
-        </p:nvSpPr>
-        <p:spPr>
+        </p:nvGrpSpPr>
+        <p:grpSpPr>
           <a:xfrm>
-            <a:off x="1188720" y="1545336"/>
-            <a:ext cx="6766560" cy="566928"/>
+            <a:off x="966349" y="5236654"/>
+            <a:ext cx="7285338" cy="550196"/>
+            <a:chOff x="966349" y="4068137"/>
+            <a:chExt cx="7285338" cy="550196"/>
           </a:xfrm>
-          <a:prstGeom prst="chevron">
-            <a:avLst/>
-          </a:prstGeom>
-          <a:solidFill>
-            <a:srgbClr val="000F78"/>
-          </a:solidFill>
-          <a:ln>
+        </p:grpSpPr>
+        <p:grpSp>
+          <p:nvGrpSpPr>
+            <p:cNvPr id="36" name="Google Shape;56;p2">
+              <a:extLst>
+                <a:ext uri="{FF2B5EF4-FFF2-40B4-BE49-F238E27FC236}">
+                  <a16:creationId xmlns:a16="http://schemas.microsoft.com/office/drawing/2014/main" id="{5146E329-5D15-89A8-7307-A1210A1C8CF0}"/>
+                </a:ext>
+              </a:extLst>
+            </p:cNvPr>
+            <p:cNvGrpSpPr/>
+            <p:nvPr/>
+          </p:nvGrpSpPr>
+          <p:grpSpPr>
+            <a:xfrm>
+              <a:off x="966349" y="4093315"/>
+              <a:ext cx="5209544" cy="525018"/>
+              <a:chOff x="1363626" y="1195448"/>
+              <a:chExt cx="5209544" cy="525018"/>
+            </a:xfrm>
+          </p:grpSpPr>
+          <p:sp>
+            <p:nvSpPr>
+              <p:cNvPr id="38" name="Google Shape;57;p2">
+                <a:extLst>
+                  <a:ext uri="{FF2B5EF4-FFF2-40B4-BE49-F238E27FC236}">
+                    <a16:creationId xmlns:a16="http://schemas.microsoft.com/office/drawing/2014/main" id="{E91C60B3-D8A8-F794-9389-307482A4BA26}"/>
+                  </a:ext>
+                </a:extLst>
+              </p:cNvPr>
+              <p:cNvSpPr/>
+              <p:nvPr/>
+            </p:nvSpPr>
+            <p:spPr>
+              <a:xfrm>
+                <a:off x="1419517" y="1195448"/>
+                <a:ext cx="5153653" cy="525018"/>
+              </a:xfrm>
+              <a:prstGeom prst="rect">
+                <a:avLst/>
+              </a:prstGeom>
+              <a:noFill/>
+              <a:ln>
+                <a:noFill/>
+              </a:ln>
+            </p:spPr>
+            <p:txBody>
+              <a:bodyPr spcFirstLastPara="1" wrap="square" lIns="756000" tIns="36000" rIns="99050" bIns="36000" anchor="ctr" anchorCtr="0">
+                <a:noAutofit/>
+              </a:bodyPr>
+              <a:lstStyle/>
+              <a:p>
+                <a:pPr marL="0" marR="0" lvl="0" indent="0" algn="l" rtl="0">
+                  <a:lnSpc>
+                    <a:spcPct val="100000"/>
+                  </a:lnSpc>
+                  <a:spcBef>
+                    <a:spcPts val="0"/>
+                  </a:spcBef>
+                  <a:spcAft>
+                    <a:spcPts val="0"/>
+                  </a:spcAft>
+                  <a:buClr>
+                    <a:srgbClr val="000000"/>
+                  </a:buClr>
+                  <a:buSzPts val="2000"/>
+                  <a:buFont typeface="Arial"/>
+                  <a:buNone/>
+                </a:pPr>
+                <a:endParaRPr sz="1400" b="0" i="0" u="none" strike="noStrike" cap="none" dirty="0">
+                  <a:solidFill>
+                    <a:srgbClr val="000000"/>
+                  </a:solidFill>
+                  <a:latin typeface="Arial"/>
+                  <a:ea typeface="Arial"/>
+                  <a:cs typeface="Arial"/>
+                  <a:sym typeface="Arial"/>
+                </a:endParaRPr>
+              </a:p>
+            </p:txBody>
+          </p:sp>
+          <p:sp>
+            <p:nvSpPr>
+              <p:cNvPr id="39" name="Google Shape;58;p2">
+                <a:extLst>
+                  <a:ext uri="{FF2B5EF4-FFF2-40B4-BE49-F238E27FC236}">
+                    <a16:creationId xmlns:a16="http://schemas.microsoft.com/office/drawing/2014/main" id="{3F18BB21-9800-9FEB-1845-2556CAE0798D}"/>
+                  </a:ext>
+                </a:extLst>
+              </p:cNvPr>
+              <p:cNvSpPr/>
+              <p:nvPr/>
+            </p:nvSpPr>
+            <p:spPr>
+              <a:xfrm>
+                <a:off x="1363626" y="1195448"/>
+                <a:ext cx="681998" cy="525018"/>
+              </a:xfrm>
+              <a:prstGeom prst="homePlate">
+                <a:avLst>
+                  <a:gd name="adj" fmla="val 31952"/>
+                </a:avLst>
+              </a:prstGeom>
+              <a:solidFill>
+                <a:srgbClr val="000F78"/>
+              </a:solidFill>
+              <a:ln>
+                <a:noFill/>
+              </a:ln>
+            </p:spPr>
+            <p:txBody>
+              <a:bodyPr spcFirstLastPara="1" wrap="square" lIns="99050" tIns="49525" rIns="99050" bIns="49525" anchor="ctr" anchorCtr="0">
+                <a:noAutofit/>
+              </a:bodyPr>
+              <a:lstStyle/>
+              <a:p>
+                <a:pPr marL="0" marR="0" lvl="0" indent="0" algn="ctr" rtl="0">
+                  <a:lnSpc>
+                    <a:spcPct val="100000"/>
+                  </a:lnSpc>
+                  <a:spcBef>
+                    <a:spcPts val="0"/>
+                  </a:spcBef>
+                  <a:spcAft>
+                    <a:spcPts val="0"/>
+                  </a:spcAft>
+                  <a:buClr>
+                    <a:srgbClr val="000000"/>
+                  </a:buClr>
+                  <a:buSzPts val="1200"/>
+                  <a:buFont typeface="Arial"/>
+                  <a:buNone/>
+                </a:pPr>
+                <a:r>
+                  <a:rPr lang="ja-JP" sz="1200" b="1" i="0" u="none" strike="noStrike" cap="none">
+                    <a:solidFill>
+                      <a:schemeClr val="lt1"/>
+                    </a:solidFill>
+                    <a:latin typeface="Arial"/>
+                    <a:ea typeface="Arial"/>
+                    <a:cs typeface="Arial"/>
+                    <a:sym typeface="Arial"/>
+                  </a:rPr>
+                  <a:t>0</a:t>
+                </a:r>
+                <a:r>
+                  <a:rPr lang="en-US" altLang="ja-JP" sz="1200" b="1" dirty="0">
+                    <a:solidFill>
+                      <a:schemeClr val="lt1"/>
+                    </a:solidFill>
+                  </a:rPr>
+                  <a:t>6</a:t>
+                </a:r>
+                <a:endParaRPr sz="1200" b="1" i="0" u="none" strike="noStrike" cap="none" dirty="0">
+                  <a:solidFill>
+                    <a:schemeClr val="lt1"/>
+                  </a:solidFill>
+                  <a:latin typeface="Arial"/>
+                  <a:ea typeface="Arial"/>
+                  <a:cs typeface="Arial"/>
+                  <a:sym typeface="Arial"/>
+                </a:endParaRPr>
+              </a:p>
+            </p:txBody>
+          </p:sp>
+        </p:grpSp>
+        <p:sp>
+          <p:nvSpPr>
+            <p:cNvPr id="37" name="Google Shape;68;p2">
+              <a:extLst>
+                <a:ext uri="{FF2B5EF4-FFF2-40B4-BE49-F238E27FC236}">
+                  <a16:creationId xmlns:a16="http://schemas.microsoft.com/office/drawing/2014/main" id="{E5BCE9F3-880C-CC50-7FF6-6717695A2EE5}"/>
+                </a:ext>
+              </a:extLst>
+            </p:cNvPr>
+            <p:cNvSpPr/>
+            <p:nvPr/>
+          </p:nvSpPr>
+          <p:spPr>
+            <a:xfrm>
+              <a:off x="966349" y="4068137"/>
+              <a:ext cx="7285338" cy="525018"/>
+            </a:xfrm>
+            <a:prstGeom prst="rect">
+              <a:avLst/>
+            </a:prstGeom>
             <a:noFill/>
-          </a:ln>
-          <a:effectLst/>
-        </p:spPr>
-        <p:style>
-          <a:lnRef idx="1">
-            <a:schemeClr val="accent1"/>
-          </a:lnRef>
-          <a:fillRef idx="3">
-            <a:schemeClr val="accent1"/>
-          </a:fillRef>
-          <a:effectRef idx="2">
-            <a:schemeClr val="accent1"/>
-          </a:effectRef>
-          <a:fontRef idx="minor">
-            <a:schemeClr val="lt1"/>
-          </a:fontRef>
-        </p:style>
-        <p:txBody>
-          <a:bodyPr rtlCol="0" anchor="ctr" wrap="none"/>
-          <a:lstStyle/>
-          <a:p>
-            <a:pPr algn="l"/>
-            <a:r>
-              <a:rPr sz="1500" b="1">
-                <a:solidFill>
-                  <a:srgbClr val="FFFFFF"/>
-                </a:solidFill>
-                <a:latin typeface="Yu Gothic"/>
-                <a:ea typeface="Yu Gothic"/>
-              </a:rPr>
-              <a:t>　01 研究背景</a:t>
-            </a:r>
-          </a:p>
-        </p:txBody>
-      </p:sp>
-      <p:sp>
-        <p:nvSpPr>
-          <p:cNvPr id="73" name="Chevron 72"/>
-          <p:cNvSpPr/>
-          <p:nvPr/>
-        </p:nvSpPr>
-        <p:spPr>
-          <a:xfrm>
-            <a:off x="1188720" y="2258568"/>
-            <a:ext cx="6766560" cy="566928"/>
-          </a:xfrm>
-          <a:prstGeom prst="chevron">
-            <a:avLst/>
-          </a:prstGeom>
-          <a:solidFill>
-            <a:srgbClr val="000F78"/>
-          </a:solidFill>
-          <a:ln>
-            <a:noFill/>
-          </a:ln>
-          <a:effectLst/>
-        </p:spPr>
-        <p:style>
-          <a:lnRef idx="1">
-            <a:schemeClr val="accent1"/>
-          </a:lnRef>
-          <a:fillRef idx="3">
-            <a:schemeClr val="accent1"/>
-          </a:fillRef>
-          <a:effectRef idx="2">
-            <a:schemeClr val="accent1"/>
-          </a:effectRef>
-          <a:fontRef idx="minor">
-            <a:schemeClr val="lt1"/>
-          </a:fontRef>
-        </p:style>
-        <p:txBody>
-          <a:bodyPr rtlCol="0" anchor="ctr" wrap="none"/>
-          <a:lstStyle/>
-          <a:p>
-            <a:pPr algn="l"/>
-            <a:r>
-              <a:rPr sz="1500" b="1">
-                <a:solidFill>
-                  <a:srgbClr val="FFFFFF"/>
-                </a:solidFill>
-                <a:latin typeface="Yu Gothic"/>
-                <a:ea typeface="Yu Gothic"/>
-              </a:rPr>
-              <a:t>　02 本研究の目標</a:t>
-            </a:r>
-          </a:p>
-        </p:txBody>
-      </p:sp>
-      <p:sp>
-        <p:nvSpPr>
-          <p:cNvPr id="74" name="Chevron 73"/>
-          <p:cNvSpPr/>
-          <p:nvPr/>
-        </p:nvSpPr>
-        <p:spPr>
-          <a:xfrm>
-            <a:off x="1188720" y="2971800"/>
-            <a:ext cx="6766560" cy="566928"/>
-          </a:xfrm>
-          <a:prstGeom prst="chevron">
-            <a:avLst/>
-          </a:prstGeom>
-          <a:solidFill>
-            <a:srgbClr val="000F78"/>
-          </a:solidFill>
-          <a:ln>
-            <a:noFill/>
-          </a:ln>
-          <a:effectLst/>
-        </p:spPr>
-        <p:style>
-          <a:lnRef idx="1">
-            <a:schemeClr val="accent1"/>
-          </a:lnRef>
-          <a:fillRef idx="3">
-            <a:schemeClr val="accent1"/>
-          </a:fillRef>
-          <a:effectRef idx="2">
-            <a:schemeClr val="accent1"/>
-          </a:effectRef>
-          <a:fontRef idx="minor">
-            <a:schemeClr val="lt1"/>
-          </a:fontRef>
-        </p:style>
-        <p:txBody>
-          <a:bodyPr rtlCol="0" anchor="ctr" wrap="none"/>
-          <a:lstStyle/>
-          <a:p>
-            <a:pPr algn="l"/>
-            <a:r>
-              <a:rPr sz="1500" b="1">
-                <a:solidFill>
-                  <a:srgbClr val="FFFFFF"/>
-                </a:solidFill>
-                <a:latin typeface="Yu Gothic"/>
-                <a:ea typeface="Yu Gothic"/>
-              </a:rPr>
-              <a:t>　03 先行研究</a:t>
-            </a:r>
-          </a:p>
-        </p:txBody>
-      </p:sp>
-      <p:sp>
-        <p:nvSpPr>
-          <p:cNvPr id="75" name="Chevron 74"/>
-          <p:cNvSpPr/>
-          <p:nvPr/>
-        </p:nvSpPr>
-        <p:spPr>
-          <a:xfrm>
-            <a:off x="1188720" y="3685032"/>
-            <a:ext cx="6766560" cy="566928"/>
-          </a:xfrm>
-          <a:prstGeom prst="chevron">
-            <a:avLst/>
-          </a:prstGeom>
-          <a:solidFill>
-            <a:srgbClr val="000F78"/>
-          </a:solidFill>
-          <a:ln>
-            <a:noFill/>
-          </a:ln>
-          <a:effectLst/>
-        </p:spPr>
-        <p:style>
-          <a:lnRef idx="1">
-            <a:schemeClr val="accent1"/>
-          </a:lnRef>
-          <a:fillRef idx="3">
-            <a:schemeClr val="accent1"/>
-          </a:fillRef>
-          <a:effectRef idx="2">
-            <a:schemeClr val="accent1"/>
-          </a:effectRef>
-          <a:fontRef idx="minor">
-            <a:schemeClr val="lt1"/>
-          </a:fontRef>
-        </p:style>
-        <p:txBody>
-          <a:bodyPr rtlCol="0" anchor="ctr" wrap="none"/>
-          <a:lstStyle/>
-          <a:p>
-            <a:pPr algn="l"/>
-            <a:r>
-              <a:rPr sz="1500" b="1">
-                <a:solidFill>
-                  <a:srgbClr val="FFFFFF"/>
-                </a:solidFill>
-                <a:latin typeface="Yu Gothic"/>
-                <a:ea typeface="Yu Gothic"/>
-              </a:rPr>
-              <a:t>　04 研究方法</a:t>
-            </a:r>
-          </a:p>
-        </p:txBody>
-      </p:sp>
-      <p:sp>
-        <p:nvSpPr>
-          <p:cNvPr id="76" name="Chevron 75"/>
-          <p:cNvSpPr/>
-          <p:nvPr/>
-        </p:nvSpPr>
-        <p:spPr>
-          <a:xfrm>
-            <a:off x="1188720" y="4398264"/>
-            <a:ext cx="6766560" cy="566928"/>
-          </a:xfrm>
-          <a:prstGeom prst="chevron">
-            <a:avLst/>
-          </a:prstGeom>
-          <a:solidFill>
-            <a:srgbClr val="000F78"/>
-          </a:solidFill>
-          <a:ln>
-            <a:noFill/>
-          </a:ln>
-          <a:effectLst/>
-        </p:spPr>
-        <p:style>
-          <a:lnRef idx="1">
-            <a:schemeClr val="accent1"/>
-          </a:lnRef>
-          <a:fillRef idx="3">
-            <a:schemeClr val="accent1"/>
-          </a:fillRef>
-          <a:effectRef idx="2">
-            <a:schemeClr val="accent1"/>
-          </a:effectRef>
-          <a:fontRef idx="minor">
-            <a:schemeClr val="lt1"/>
-          </a:fontRef>
-        </p:style>
-        <p:txBody>
-          <a:bodyPr rtlCol="0" anchor="ctr" wrap="none"/>
-          <a:lstStyle/>
-          <a:p>
-            <a:pPr algn="l"/>
-            <a:r>
-              <a:rPr sz="1500" b="1">
-                <a:solidFill>
-                  <a:srgbClr val="FFFFFF"/>
-                </a:solidFill>
-                <a:latin typeface="Yu Gothic"/>
-                <a:ea typeface="Yu Gothic"/>
-              </a:rPr>
-              <a:t>　05 実験と結果</a:t>
-            </a:r>
-          </a:p>
-        </p:txBody>
-      </p:sp>
-      <p:sp>
-        <p:nvSpPr>
-          <p:cNvPr id="77" name="Chevron 76"/>
-          <p:cNvSpPr/>
-          <p:nvPr/>
-        </p:nvSpPr>
-        <p:spPr>
-          <a:xfrm>
-            <a:off x="1188720" y="5111496"/>
-            <a:ext cx="6766560" cy="566928"/>
-          </a:xfrm>
-          <a:prstGeom prst="chevron">
-            <a:avLst/>
-          </a:prstGeom>
-          <a:solidFill>
-            <a:srgbClr val="000F78"/>
-          </a:solidFill>
-          <a:ln>
-            <a:noFill/>
-          </a:ln>
-          <a:effectLst/>
-        </p:spPr>
-        <p:style>
-          <a:lnRef idx="1">
-            <a:schemeClr val="accent1"/>
-          </a:lnRef>
-          <a:fillRef idx="3">
-            <a:schemeClr val="accent1"/>
-          </a:fillRef>
-          <a:effectRef idx="2">
-            <a:schemeClr val="accent1"/>
-          </a:effectRef>
-          <a:fontRef idx="minor">
-            <a:schemeClr val="lt1"/>
-          </a:fontRef>
-        </p:style>
-        <p:txBody>
-          <a:bodyPr rtlCol="0" anchor="ctr" wrap="none"/>
-          <a:lstStyle/>
-          <a:p>
-            <a:pPr algn="l"/>
-            <a:r>
-              <a:rPr sz="1500" b="1">
-                <a:solidFill>
-                  <a:srgbClr val="FFFFFF"/>
-                </a:solidFill>
-                <a:latin typeface="Yu Gothic"/>
-                <a:ea typeface="Yu Gothic"/>
-              </a:rPr>
-              <a:t>　06 考察と今後の展望</a:t>
-            </a:r>
-          </a:p>
-        </p:txBody>
-      </p:sp>
+            <a:ln>
+              <a:noFill/>
+            </a:ln>
+          </p:spPr>
+          <p:txBody>
+            <a:bodyPr spcFirstLastPara="1" wrap="square" lIns="756000" tIns="36000" rIns="99050" bIns="36000" anchor="ctr" anchorCtr="0">
+              <a:noAutofit/>
+            </a:bodyPr>
+            <a:lstStyle/>
+            <a:p>
+              <a:pPr marL="0" marR="0" lvl="0" indent="0" algn="l" rtl="0">
+                <a:lnSpc>
+                  <a:spcPct val="100000"/>
+                </a:lnSpc>
+                <a:spcBef>
+                  <a:spcPts val="0"/>
+                </a:spcBef>
+                <a:spcAft>
+                  <a:spcPts val="0"/>
+                </a:spcAft>
+                <a:buClr>
+                  <a:srgbClr val="000000"/>
+                </a:buClr>
+                <a:buSzPts val="2000"/>
+                <a:buFont typeface="Arial"/>
+                <a:buNone/>
+              </a:pPr>
+              <a:r>
+                <a:rPr lang="ja-JP" sz="2000" b="1" i="0" u="none" strike="noStrike" cap="none">
+                  <a:solidFill>
+                    <a:schemeClr val="dk1"/>
+                  </a:solidFill>
+                  <a:latin typeface="Arial"/>
+                  <a:ea typeface="Arial"/>
+                  <a:cs typeface="Arial"/>
+                  <a:sym typeface="Arial"/>
+                </a:rPr>
+                <a:t> </a:t>
+              </a:r>
+              <a:r>
+                <a:rPr lang="en-US" altLang="ja-JP" sz="2000" b="1" i="0" u="none" strike="noStrike" cap="none" dirty="0">
+                  <a:solidFill>
+                    <a:schemeClr val="dk1"/>
+                  </a:solidFill>
+                  <a:latin typeface="Arial"/>
+                  <a:ea typeface="Arial"/>
+                  <a:cs typeface="Arial"/>
+                  <a:sym typeface="Arial"/>
+                </a:rPr>
+                <a:t>Appendix</a:t>
+              </a:r>
+            </a:p>
+          </p:txBody>
+        </p:sp>
+      </p:grpSp>
     </p:spTree>
     <p:extLst>
       <p:ext uri="{BB962C8B-B14F-4D97-AF65-F5344CB8AC3E}">
-        <p14:creationId xmlns:p14="http://schemas.microsoft.com/office/powerpoint/2010/main" val="351055545"/>
+        <p14:creationId xmlns:p14="http://schemas.microsoft.com/office/powerpoint/2010/main" val="3626579769"/>
       </p:ext>
     </p:extLst>
   </p:cSld>
@@ -7480,8 +9136,8 @@
 </p:sld>
 </file>
 
-<file path=ppt/slides/slide20.xml><?xml version="1.0" encoding="utf-8"?>
-<p:sld xmlns:a="http://schemas.openxmlformats.org/drawingml/2006/main" xmlns:p="http://schemas.openxmlformats.org/presentationml/2006/main" xmlns:r="http://schemas.openxmlformats.org/officeDocument/2006/relationships">
+<file path=ppt/slides/slide3.xml><?xml version="1.0" encoding="utf-8"?>
+<p:sld xmlns:a="http://schemas.openxmlformats.org/drawingml/2006/main" xmlns:r="http://schemas.openxmlformats.org/officeDocument/2006/relationships" xmlns:p="http://schemas.openxmlformats.org/presentationml/2006/main">
   <p:cSld>
     <p:spTree>
       <p:nvGrpSpPr>
@@ -7489,7 +9145,1330 @@
         <p:cNvGrpSpPr/>
         <p:nvPr/>
       </p:nvGrpSpPr>
-      <p:grpSpPr/>
+      <p:grpSpPr>
+        <a:xfrm>
+          <a:off x="0" y="0"/>
+          <a:ext cx="0" cy="0"/>
+          <a:chOff x="0" y="0"/>
+          <a:chExt cx="0" cy="0"/>
+        </a:xfrm>
+      </p:grpSpPr>
+      <p:sp>
+        <p:nvSpPr>
+          <p:cNvPr id="2" name="タイトル 1">
+            <a:extLst>
+              <a:ext uri="{FF2B5EF4-FFF2-40B4-BE49-F238E27FC236}">
+                <a16:creationId xmlns:a16="http://schemas.microsoft.com/office/drawing/2014/main" id="{90480CC7-C2AC-AC42-A69E-25BFFC791958}"/>
+              </a:ext>
+            </a:extLst>
+          </p:cNvPr>
+          <p:cNvSpPr>
+            <a:spLocks noGrp="1"/>
+          </p:cNvSpPr>
+          <p:nvPr>
+            <p:ph type="title"/>
+          </p:nvPr>
+        </p:nvSpPr>
+        <p:spPr/>
+        <p:txBody>
+          <a:bodyPr/>
+          <a:lstStyle/>
+          <a:p>
+            <a:r>
+              <a:rPr kumimoji="1" lang="en-US" altLang="ja-JP" sz="1400" b="1" dirty="0"/>
+              <a:t>01.</a:t>
+            </a:r>
+            <a:r>
+              <a:rPr kumimoji="1" lang="ja-JP" altLang="en-US" sz="1400" b="1" dirty="0"/>
+              <a:t>研究背景</a:t>
+            </a:r>
+            <a:br>
+              <a:rPr kumimoji="1" lang="en-US" altLang="ja-JP" b="1" dirty="0"/>
+            </a:br>
+            <a:r>
+              <a:rPr kumimoji="1" lang="en-US" altLang="ja-JP" b="1" dirty="0"/>
+              <a:t>1-1.</a:t>
+            </a:r>
+            <a:r>
+              <a:rPr kumimoji="1" lang="ja-JP" altLang="en-US" b="1" dirty="0"/>
+              <a:t>位相ノイズとは</a:t>
+            </a:r>
+          </a:p>
+        </p:txBody>
+      </p:sp>
+      <p:sp>
+        <p:nvSpPr>
+          <p:cNvPr id="3" name="テキスト プレースホルダー 2">
+            <a:extLst>
+              <a:ext uri="{FF2B5EF4-FFF2-40B4-BE49-F238E27FC236}">
+                <a16:creationId xmlns:a16="http://schemas.microsoft.com/office/drawing/2014/main" id="{F7E80DAE-6024-3195-D2D4-EA3A5C54BC10}"/>
+              </a:ext>
+            </a:extLst>
+          </p:cNvPr>
+          <p:cNvSpPr>
+            <a:spLocks noGrp="1"/>
+          </p:cNvSpPr>
+          <p:nvPr>
+            <p:ph type="body" idx="1"/>
+          </p:nvPr>
+        </p:nvSpPr>
+        <p:spPr>
+          <a:xfrm>
+            <a:off x="213524" y="906114"/>
+            <a:ext cx="9127246" cy="2428807"/>
+          </a:xfrm>
+        </p:spPr>
+        <p:txBody>
+          <a:bodyPr/>
+          <a:lstStyle/>
+          <a:p>
+            <a:r>
+              <a:rPr kumimoji="1" lang="ja-JP" altLang="en-US" sz="2000" dirty="0">
+                <a:solidFill>
+                  <a:schemeClr val="tx1"/>
+                </a:solidFill>
+              </a:rPr>
+              <a:t>位相ノイズ</a:t>
+            </a:r>
+            <a:r>
+              <a:rPr kumimoji="1" lang="en-US" altLang="ja-JP" sz="2000" dirty="0">
+                <a:solidFill>
+                  <a:schemeClr val="tx1"/>
+                </a:solidFill>
+              </a:rPr>
+              <a:t>(</a:t>
+            </a:r>
+            <a:r>
+              <a:rPr kumimoji="1" lang="ja-JP" altLang="en-US" sz="2000" dirty="0">
+                <a:solidFill>
+                  <a:schemeClr val="tx1"/>
+                </a:solidFill>
+              </a:rPr>
+              <a:t>ジッ</a:t>
+            </a:r>
+            <a:r>
+              <a:rPr kumimoji="1" lang="ja-JP" altLang="en-US" sz="2000" dirty="0"/>
+              <a:t>タ</a:t>
+            </a:r>
+            <a:r>
+              <a:rPr kumimoji="1" lang="en-US" altLang="ja-JP" sz="2000" dirty="0"/>
+              <a:t>)</a:t>
+            </a:r>
+            <a:r>
+              <a:rPr kumimoji="1" lang="ja-JP" altLang="en-US" sz="2000" dirty="0">
+                <a:solidFill>
+                  <a:schemeClr val="tx1"/>
+                </a:solidFill>
+              </a:rPr>
+              <a:t>とは</a:t>
+            </a:r>
+            <a:endParaRPr kumimoji="1" lang="en-US" altLang="ja-JP" sz="2000" dirty="0">
+              <a:solidFill>
+                <a:schemeClr val="tx1"/>
+              </a:solidFill>
+            </a:endParaRPr>
+          </a:p>
+          <a:p>
+            <a:pPr lvl="1"/>
+            <a:r>
+              <a:rPr kumimoji="1" lang="ja-JP" altLang="en-US" sz="2000" dirty="0">
+                <a:solidFill>
+                  <a:schemeClr val="tx1"/>
+                </a:solidFill>
+              </a:rPr>
+              <a:t>時間軸上の誤差</a:t>
+            </a:r>
+            <a:endParaRPr kumimoji="1" lang="en-US" altLang="ja-JP" sz="2000" dirty="0">
+              <a:solidFill>
+                <a:schemeClr val="tx1"/>
+              </a:solidFill>
+            </a:endParaRPr>
+          </a:p>
+          <a:p>
+            <a:pPr lvl="1"/>
+            <a:r>
+              <a:rPr kumimoji="1" lang="ja-JP" altLang="en-US" sz="2000" dirty="0">
+                <a:solidFill>
+                  <a:schemeClr val="tx1"/>
+                </a:solidFill>
+              </a:rPr>
+              <a:t>理想的な波</a:t>
+            </a:r>
+            <a:r>
+              <a:rPr kumimoji="1" lang="en-US" altLang="ja-JP" sz="2000" dirty="0">
+                <a:solidFill>
+                  <a:schemeClr val="tx1"/>
+                </a:solidFill>
+              </a:rPr>
+              <a:t>cos(</a:t>
+            </a:r>
+            <a:r>
+              <a:rPr kumimoji="1" lang="en-US" altLang="ja-JP" sz="2000" dirty="0" err="1">
+                <a:solidFill>
+                  <a:schemeClr val="tx1"/>
+                </a:solidFill>
+              </a:rPr>
+              <a:t>ωt</a:t>
+            </a:r>
+            <a:r>
+              <a:rPr kumimoji="1" lang="en-US" altLang="ja-JP" sz="2000" dirty="0">
+                <a:solidFill>
+                  <a:schemeClr val="tx1"/>
+                </a:solidFill>
+              </a:rPr>
+              <a:t>)</a:t>
+            </a:r>
+            <a:r>
+              <a:rPr kumimoji="1" lang="ja-JP" altLang="en-US" sz="2000" dirty="0">
+                <a:solidFill>
+                  <a:schemeClr val="tx1"/>
+                </a:solidFill>
+              </a:rPr>
+              <a:t>に対して、</a:t>
+            </a:r>
+            <a:r>
+              <a:rPr kumimoji="1" lang="en-US" altLang="ja-JP" sz="2000" dirty="0">
+                <a:solidFill>
+                  <a:schemeClr val="tx1"/>
+                </a:solidFill>
+              </a:rPr>
+              <a:t>cos[(</a:t>
+            </a:r>
+            <a:r>
+              <a:rPr kumimoji="1" lang="en-US" altLang="ja-JP" sz="2000" dirty="0" err="1">
+                <a:solidFill>
+                  <a:schemeClr val="tx1"/>
+                </a:solidFill>
+              </a:rPr>
+              <a:t>ω</a:t>
+            </a:r>
+            <a:r>
+              <a:rPr kumimoji="1" lang="en-US" altLang="ja-JP" sz="2000" dirty="0">
+                <a:solidFill>
+                  <a:schemeClr val="tx1"/>
+                </a:solidFill>
+              </a:rPr>
+              <a:t>(</a:t>
+            </a:r>
+            <a:r>
+              <a:rPr kumimoji="1" lang="en-US" altLang="ja-JP" sz="2000" dirty="0" err="1">
+                <a:solidFill>
+                  <a:schemeClr val="tx1"/>
+                </a:solidFill>
+              </a:rPr>
+              <a:t>t+j</a:t>
+            </a:r>
+            <a:r>
+              <a:rPr kumimoji="1" lang="en-US" altLang="ja-JP" sz="2000" dirty="0">
+                <a:solidFill>
+                  <a:schemeClr val="tx1"/>
+                </a:solidFill>
+              </a:rPr>
+              <a:t>(t))]</a:t>
+            </a:r>
+            <a:r>
+              <a:rPr kumimoji="1" lang="ja-JP" altLang="en-US" sz="2000" dirty="0">
+                <a:solidFill>
+                  <a:schemeClr val="tx1"/>
+                </a:solidFill>
+              </a:rPr>
+              <a:t>となるときの</a:t>
+            </a:r>
+            <a:r>
+              <a:rPr kumimoji="1" lang="en-US" altLang="ja-JP" sz="2000" dirty="0">
+                <a:solidFill>
+                  <a:schemeClr val="tx1"/>
+                </a:solidFill>
+              </a:rPr>
+              <a:t>j(t)</a:t>
+            </a:r>
+            <a:r>
+              <a:rPr kumimoji="1" lang="ja-JP" altLang="en-US" sz="2000" dirty="0">
+                <a:solidFill>
+                  <a:schemeClr val="tx1"/>
+                </a:solidFill>
+              </a:rPr>
+              <a:t>に相当</a:t>
+            </a:r>
+            <a:endParaRPr kumimoji="1" lang="en-US" altLang="ja-JP" sz="2000" dirty="0">
+              <a:solidFill>
+                <a:schemeClr val="tx1"/>
+              </a:solidFill>
+            </a:endParaRPr>
+          </a:p>
+          <a:p>
+            <a:pPr marL="592900" lvl="1" indent="0">
+              <a:buNone/>
+            </a:pPr>
+            <a:endParaRPr kumimoji="1" lang="en-US" altLang="ja-JP" sz="2000" dirty="0">
+              <a:solidFill>
+                <a:schemeClr val="tx1"/>
+              </a:solidFill>
+            </a:endParaRPr>
+          </a:p>
+          <a:p>
+            <a:r>
+              <a:rPr kumimoji="1" lang="ja-JP" altLang="en-US" sz="2000" dirty="0">
+                <a:solidFill>
+                  <a:schemeClr val="tx1"/>
+                </a:solidFill>
+              </a:rPr>
+              <a:t>位相ノイズ</a:t>
+            </a:r>
+            <a:r>
+              <a:rPr kumimoji="1" lang="en-US" altLang="ja-JP" sz="2000" dirty="0">
+                <a:solidFill>
+                  <a:schemeClr val="tx1"/>
+                </a:solidFill>
+              </a:rPr>
+              <a:t>(</a:t>
+            </a:r>
+            <a:r>
+              <a:rPr kumimoji="1" lang="ja-JP" altLang="en-US" sz="2000" dirty="0">
+                <a:solidFill>
+                  <a:schemeClr val="tx1"/>
+                </a:solidFill>
+              </a:rPr>
+              <a:t>ジッ</a:t>
+            </a:r>
+            <a:r>
+              <a:rPr kumimoji="1" lang="ja-JP" altLang="en-US" sz="2000" dirty="0"/>
+              <a:t>タ</a:t>
+            </a:r>
+            <a:r>
+              <a:rPr kumimoji="1" lang="en-US" altLang="ja-JP" sz="2000" dirty="0"/>
+              <a:t>)</a:t>
+            </a:r>
+            <a:r>
+              <a:rPr kumimoji="1" lang="ja-JP" altLang="en-US" sz="2000" dirty="0">
+                <a:solidFill>
+                  <a:schemeClr val="tx1"/>
+                </a:solidFill>
+              </a:rPr>
+              <a:t>の表現方法</a:t>
+            </a:r>
+            <a:endParaRPr kumimoji="1" lang="en-US" altLang="ja-JP" sz="2000" dirty="0">
+              <a:solidFill>
+                <a:schemeClr val="tx1"/>
+              </a:solidFill>
+            </a:endParaRPr>
+          </a:p>
+          <a:p>
+            <a:pPr lvl="1"/>
+            <a:r>
+              <a:rPr kumimoji="1" lang="en-US" altLang="ja-JP" sz="1663" dirty="0">
+                <a:solidFill>
+                  <a:schemeClr val="tx1"/>
+                </a:solidFill>
+              </a:rPr>
+              <a:t>j(t)</a:t>
+            </a:r>
+            <a:r>
+              <a:rPr kumimoji="1" lang="ja-JP" altLang="en-US" sz="1663" dirty="0">
+                <a:solidFill>
+                  <a:schemeClr val="tx1"/>
+                </a:solidFill>
+              </a:rPr>
+              <a:t>では表現しづらいため、一般的には周波数ドメイン</a:t>
+            </a:r>
+            <a:r>
+              <a:rPr kumimoji="1" lang="en-US" altLang="ja-JP" sz="1663" dirty="0">
+                <a:solidFill>
+                  <a:schemeClr val="tx1"/>
+                </a:solidFill>
+              </a:rPr>
+              <a:t>L(f)</a:t>
+            </a:r>
+            <a:r>
+              <a:rPr kumimoji="1" lang="ja-JP" altLang="en-US" sz="1663" dirty="0">
+                <a:solidFill>
+                  <a:schemeClr val="tx1"/>
+                </a:solidFill>
+              </a:rPr>
+              <a:t>：パワースペクトル密度で表現する</a:t>
+            </a:r>
+            <a:endParaRPr kumimoji="1" lang="en-US" altLang="ja-JP" sz="1663" dirty="0">
+              <a:solidFill>
+                <a:schemeClr val="tx1"/>
+              </a:solidFill>
+            </a:endParaRPr>
+          </a:p>
+          <a:p>
+            <a:pPr lvl="1"/>
+            <a:endParaRPr kumimoji="1" lang="ja-JP" altLang="en-US" sz="1663" dirty="0">
+              <a:solidFill>
+                <a:schemeClr val="tx1"/>
+              </a:solidFill>
+            </a:endParaRPr>
+          </a:p>
+        </p:txBody>
+      </p:sp>
+      <p:grpSp>
+        <p:nvGrpSpPr>
+          <p:cNvPr id="52" name="グループ化 51">
+            <a:extLst>
+              <a:ext uri="{FF2B5EF4-FFF2-40B4-BE49-F238E27FC236}">
+                <a16:creationId xmlns:a16="http://schemas.microsoft.com/office/drawing/2014/main" id="{07325878-10B4-AE98-C9B2-C2C361BF47E5}"/>
+              </a:ext>
+            </a:extLst>
+          </p:cNvPr>
+          <p:cNvGrpSpPr/>
+          <p:nvPr/>
+        </p:nvGrpSpPr>
+        <p:grpSpPr>
+          <a:xfrm>
+            <a:off x="151265" y="2905001"/>
+            <a:ext cx="8874033" cy="4097608"/>
+            <a:chOff x="3985203" y="2194990"/>
+            <a:chExt cx="9716719" cy="4407017"/>
+          </a:xfrm>
+        </p:grpSpPr>
+        <p:cxnSp>
+          <p:nvCxnSpPr>
+            <p:cNvPr id="5" name="直線矢印コネクタ 4">
+              <a:extLst>
+                <a:ext uri="{FF2B5EF4-FFF2-40B4-BE49-F238E27FC236}">
+                  <a16:creationId xmlns:a16="http://schemas.microsoft.com/office/drawing/2014/main" id="{A87CA80D-A93E-9252-315C-1700819B5C47}"/>
+                </a:ext>
+              </a:extLst>
+            </p:cNvPr>
+            <p:cNvCxnSpPr>
+              <a:cxnSpLocks/>
+            </p:cNvCxnSpPr>
+            <p:nvPr/>
+          </p:nvCxnSpPr>
+          <p:spPr>
+            <a:xfrm>
+              <a:off x="4352494" y="5983207"/>
+              <a:ext cx="4868508" cy="0"/>
+            </a:xfrm>
+            <a:prstGeom prst="straightConnector1">
+              <a:avLst/>
+            </a:prstGeom>
+            <a:ln w="19050">
+              <a:tailEnd type="triangle"/>
+            </a:ln>
+          </p:spPr>
+          <p:style>
+            <a:lnRef idx="1">
+              <a:schemeClr val="dk1"/>
+            </a:lnRef>
+            <a:fillRef idx="0">
+              <a:schemeClr val="dk1"/>
+            </a:fillRef>
+            <a:effectRef idx="0">
+              <a:schemeClr val="dk1"/>
+            </a:effectRef>
+            <a:fontRef idx="minor">
+              <a:schemeClr val="tx1"/>
+            </a:fontRef>
+          </p:style>
+        </p:cxnSp>
+        <p:sp>
+          <p:nvSpPr>
+            <p:cNvPr id="8" name="円弧 7">
+              <a:extLst>
+                <a:ext uri="{FF2B5EF4-FFF2-40B4-BE49-F238E27FC236}">
+                  <a16:creationId xmlns:a16="http://schemas.microsoft.com/office/drawing/2014/main" id="{01FC4031-D613-075B-3841-A334562CCCDA}"/>
+                </a:ext>
+              </a:extLst>
+            </p:cNvPr>
+            <p:cNvSpPr/>
+            <p:nvPr/>
+          </p:nvSpPr>
+          <p:spPr>
+            <a:xfrm>
+              <a:off x="4811601" y="2194990"/>
+              <a:ext cx="8890321" cy="3669790"/>
+            </a:xfrm>
+            <a:prstGeom prst="arc">
+              <a:avLst>
+                <a:gd name="adj1" fmla="val 5542347"/>
+                <a:gd name="adj2" fmla="val 10819371"/>
+              </a:avLst>
+            </a:prstGeom>
+            <a:ln w="19050"/>
+          </p:spPr>
+          <p:style>
+            <a:lnRef idx="1">
+              <a:schemeClr val="dk1"/>
+            </a:lnRef>
+            <a:fillRef idx="0">
+              <a:schemeClr val="dk1"/>
+            </a:fillRef>
+            <a:effectRef idx="0">
+              <a:schemeClr val="dk1"/>
+            </a:effectRef>
+            <a:fontRef idx="minor">
+              <a:schemeClr val="tx1"/>
+            </a:fontRef>
+          </p:style>
+          <p:txBody>
+            <a:bodyPr rtlCol="0" anchor="ctr"/>
+            <a:lstStyle/>
+            <a:p>
+              <a:pPr algn="ctr"/>
+              <a:endParaRPr kumimoji="1" lang="ja-JP" altLang="en-US"/>
+            </a:p>
+          </p:txBody>
+        </p:sp>
+        <p:sp>
+          <p:nvSpPr>
+            <p:cNvPr id="11" name="テキスト ボックス 10">
+              <a:extLst>
+                <a:ext uri="{FF2B5EF4-FFF2-40B4-BE49-F238E27FC236}">
+                  <a16:creationId xmlns:a16="http://schemas.microsoft.com/office/drawing/2014/main" id="{126F5EA9-F751-8131-059D-7FAC257771F2}"/>
+                </a:ext>
+              </a:extLst>
+            </p:cNvPr>
+            <p:cNvSpPr txBox="1"/>
+            <p:nvPr/>
+          </p:nvSpPr>
+          <p:spPr>
+            <a:xfrm>
+              <a:off x="3985203" y="6270990"/>
+              <a:ext cx="1840676" cy="331017"/>
+            </a:xfrm>
+            <a:prstGeom prst="rect">
+              <a:avLst/>
+            </a:prstGeom>
+            <a:noFill/>
+          </p:spPr>
+          <p:txBody>
+            <a:bodyPr wrap="square" rtlCol="0">
+              <a:spAutoFit/>
+            </a:bodyPr>
+            <a:lstStyle/>
+            <a:p>
+              <a:pPr algn="ctr"/>
+              <a:endParaRPr kumimoji="1" lang="ja-JP" altLang="en-US"/>
+            </a:p>
+          </p:txBody>
+        </p:sp>
+        <p:cxnSp>
+          <p:nvCxnSpPr>
+            <p:cNvPr id="13" name="直線コネクタ 12">
+              <a:extLst>
+                <a:ext uri="{FF2B5EF4-FFF2-40B4-BE49-F238E27FC236}">
+                  <a16:creationId xmlns:a16="http://schemas.microsoft.com/office/drawing/2014/main" id="{03BA5A30-61DE-78DC-B0E6-C852F6186F6B}"/>
+                </a:ext>
+              </a:extLst>
+            </p:cNvPr>
+            <p:cNvCxnSpPr>
+              <a:cxnSpLocks/>
+            </p:cNvCxnSpPr>
+            <p:nvPr/>
+          </p:nvCxnSpPr>
+          <p:spPr>
+            <a:xfrm>
+              <a:off x="5437676" y="4948132"/>
+              <a:ext cx="0" cy="1035075"/>
+            </a:xfrm>
+            <a:prstGeom prst="line">
+              <a:avLst/>
+            </a:prstGeom>
+            <a:ln w="12700"/>
+          </p:spPr>
+          <p:style>
+            <a:lnRef idx="1">
+              <a:schemeClr val="dk1"/>
+            </a:lnRef>
+            <a:fillRef idx="0">
+              <a:schemeClr val="dk1"/>
+            </a:fillRef>
+            <a:effectRef idx="0">
+              <a:schemeClr val="dk1"/>
+            </a:effectRef>
+            <a:fontRef idx="minor">
+              <a:schemeClr val="tx1"/>
+            </a:fontRef>
+          </p:style>
+        </p:cxnSp>
+        <p:cxnSp>
+          <p:nvCxnSpPr>
+            <p:cNvPr id="16" name="直線コネクタ 15">
+              <a:extLst>
+                <a:ext uri="{FF2B5EF4-FFF2-40B4-BE49-F238E27FC236}">
+                  <a16:creationId xmlns:a16="http://schemas.microsoft.com/office/drawing/2014/main" id="{F3D42A21-E820-0CB2-DC28-98D43D99AA4A}"/>
+                </a:ext>
+              </a:extLst>
+            </p:cNvPr>
+            <p:cNvCxnSpPr>
+              <a:cxnSpLocks/>
+            </p:cNvCxnSpPr>
+            <p:nvPr/>
+          </p:nvCxnSpPr>
+          <p:spPr>
+            <a:xfrm>
+              <a:off x="6599479" y="5506902"/>
+              <a:ext cx="0" cy="476305"/>
+            </a:xfrm>
+            <a:prstGeom prst="line">
+              <a:avLst/>
+            </a:prstGeom>
+            <a:ln w="12700">
+              <a:solidFill>
+                <a:schemeClr val="tx1"/>
+              </a:solidFill>
+            </a:ln>
+          </p:spPr>
+          <p:style>
+            <a:lnRef idx="1">
+              <a:schemeClr val="dk1"/>
+            </a:lnRef>
+            <a:fillRef idx="0">
+              <a:schemeClr val="dk1"/>
+            </a:fillRef>
+            <a:effectRef idx="0">
+              <a:schemeClr val="dk1"/>
+            </a:effectRef>
+            <a:fontRef idx="minor">
+              <a:schemeClr val="tx1"/>
+            </a:fontRef>
+          </p:style>
+        </p:cxnSp>
+        <p:sp>
+          <p:nvSpPr>
+            <p:cNvPr id="18" name="テキスト ボックス 17">
+              <a:extLst>
+                <a:ext uri="{FF2B5EF4-FFF2-40B4-BE49-F238E27FC236}">
+                  <a16:creationId xmlns:a16="http://schemas.microsoft.com/office/drawing/2014/main" id="{5478CD42-AEE4-D8DC-47D7-31DC988AAE8B}"/>
+                </a:ext>
+              </a:extLst>
+            </p:cNvPr>
+            <p:cNvSpPr txBox="1"/>
+            <p:nvPr/>
+          </p:nvSpPr>
+          <p:spPr>
+            <a:xfrm>
+              <a:off x="8077343" y="6001760"/>
+              <a:ext cx="1418385" cy="307777"/>
+            </a:xfrm>
+            <a:prstGeom prst="rect">
+              <a:avLst/>
+            </a:prstGeom>
+            <a:noFill/>
+          </p:spPr>
+          <p:txBody>
+            <a:bodyPr wrap="square" rtlCol="0">
+              <a:spAutoFit/>
+            </a:bodyPr>
+            <a:lstStyle/>
+            <a:p>
+              <a:pPr algn="ctr"/>
+              <a:r>
+                <a:rPr kumimoji="1" lang="en-US" altLang="ja-JP" dirty="0"/>
+                <a:t>Offset</a:t>
+              </a:r>
+              <a:r>
+                <a:rPr kumimoji="1" lang="ja-JP" altLang="en-US"/>
+                <a:t>周波数</a:t>
+              </a:r>
+            </a:p>
+          </p:txBody>
+        </p:sp>
+        <p:sp>
+          <p:nvSpPr>
+            <p:cNvPr id="19" name="テキスト ボックス 18">
+              <a:extLst>
+                <a:ext uri="{FF2B5EF4-FFF2-40B4-BE49-F238E27FC236}">
+                  <a16:creationId xmlns:a16="http://schemas.microsoft.com/office/drawing/2014/main" id="{4C93D636-95A6-7751-33E6-ED856E456386}"/>
+                </a:ext>
+              </a:extLst>
+            </p:cNvPr>
+            <p:cNvSpPr txBox="1"/>
+            <p:nvPr/>
+          </p:nvSpPr>
+          <p:spPr>
+            <a:xfrm>
+              <a:off x="5039712" y="5986381"/>
+              <a:ext cx="801513" cy="307777"/>
+            </a:xfrm>
+            <a:prstGeom prst="rect">
+              <a:avLst/>
+            </a:prstGeom>
+            <a:noFill/>
+          </p:spPr>
+          <p:txBody>
+            <a:bodyPr wrap="square" rtlCol="0">
+              <a:spAutoFit/>
+            </a:bodyPr>
+            <a:lstStyle/>
+            <a:p>
+              <a:pPr algn="ctr"/>
+              <a:r>
+                <a:rPr kumimoji="1" lang="en-US" altLang="ja-JP" dirty="0"/>
+                <a:t>f1</a:t>
+              </a:r>
+              <a:endParaRPr kumimoji="1" lang="ja-JP" altLang="en-US"/>
+            </a:p>
+          </p:txBody>
+        </p:sp>
+        <p:sp>
+          <p:nvSpPr>
+            <p:cNvPr id="24" name="テキスト ボックス 23">
+              <a:extLst>
+                <a:ext uri="{FF2B5EF4-FFF2-40B4-BE49-F238E27FC236}">
+                  <a16:creationId xmlns:a16="http://schemas.microsoft.com/office/drawing/2014/main" id="{9E090944-7D41-859F-A440-D62C5EE93056}"/>
+                </a:ext>
+              </a:extLst>
+            </p:cNvPr>
+            <p:cNvSpPr txBox="1"/>
+            <p:nvPr/>
+          </p:nvSpPr>
+          <p:spPr>
+            <a:xfrm>
+              <a:off x="6197595" y="5988636"/>
+              <a:ext cx="801513" cy="307777"/>
+            </a:xfrm>
+            <a:prstGeom prst="rect">
+              <a:avLst/>
+            </a:prstGeom>
+            <a:noFill/>
+          </p:spPr>
+          <p:txBody>
+            <a:bodyPr wrap="square" rtlCol="0">
+              <a:spAutoFit/>
+            </a:bodyPr>
+            <a:lstStyle/>
+            <a:p>
+              <a:pPr algn="ctr"/>
+              <a:r>
+                <a:rPr kumimoji="1" lang="en-US" altLang="ja-JP" dirty="0"/>
+                <a:t>f2</a:t>
+              </a:r>
+              <a:endParaRPr kumimoji="1" lang="ja-JP" altLang="en-US"/>
+            </a:p>
+          </p:txBody>
+        </p:sp>
+        <p:cxnSp>
+          <p:nvCxnSpPr>
+            <p:cNvPr id="26" name="直線矢印コネクタ 25">
+              <a:extLst>
+                <a:ext uri="{FF2B5EF4-FFF2-40B4-BE49-F238E27FC236}">
+                  <a16:creationId xmlns:a16="http://schemas.microsoft.com/office/drawing/2014/main" id="{53B8278C-4A35-4C41-EFA9-72EF926E504E}"/>
+                </a:ext>
+              </a:extLst>
+            </p:cNvPr>
+            <p:cNvCxnSpPr>
+              <a:cxnSpLocks/>
+            </p:cNvCxnSpPr>
+            <p:nvPr/>
+          </p:nvCxnSpPr>
+          <p:spPr>
+            <a:xfrm>
+              <a:off x="4777147" y="5405530"/>
+              <a:ext cx="660529" cy="0"/>
+            </a:xfrm>
+            <a:prstGeom prst="straightConnector1">
+              <a:avLst/>
+            </a:prstGeom>
+            <a:ln w="12700">
+              <a:solidFill>
+                <a:schemeClr val="tx1"/>
+              </a:solidFill>
+              <a:headEnd type="triangle"/>
+              <a:tailEnd type="triangle"/>
+            </a:ln>
+          </p:spPr>
+          <p:style>
+            <a:lnRef idx="1">
+              <a:schemeClr val="dk1"/>
+            </a:lnRef>
+            <a:fillRef idx="0">
+              <a:schemeClr val="dk1"/>
+            </a:fillRef>
+            <a:effectRef idx="0">
+              <a:schemeClr val="dk1"/>
+            </a:effectRef>
+            <a:fontRef idx="minor">
+              <a:schemeClr val="tx1"/>
+            </a:fontRef>
+          </p:style>
+        </p:cxnSp>
+        <p:cxnSp>
+          <p:nvCxnSpPr>
+            <p:cNvPr id="28" name="直線矢印コネクタ 27">
+              <a:extLst>
+                <a:ext uri="{FF2B5EF4-FFF2-40B4-BE49-F238E27FC236}">
+                  <a16:creationId xmlns:a16="http://schemas.microsoft.com/office/drawing/2014/main" id="{5183B514-577F-87A9-ACB0-3F7B38449AE3}"/>
+                </a:ext>
+              </a:extLst>
+            </p:cNvPr>
+            <p:cNvCxnSpPr>
+              <a:cxnSpLocks/>
+            </p:cNvCxnSpPr>
+            <p:nvPr/>
+          </p:nvCxnSpPr>
+          <p:spPr>
+            <a:xfrm flipH="1">
+              <a:off x="5957775" y="5044849"/>
+              <a:ext cx="903372" cy="451808"/>
+            </a:xfrm>
+            <a:prstGeom prst="straightConnector1">
+              <a:avLst/>
+            </a:prstGeom>
+            <a:ln>
+              <a:tailEnd type="triangle"/>
+            </a:ln>
+          </p:spPr>
+          <p:style>
+            <a:lnRef idx="1">
+              <a:schemeClr val="dk1"/>
+            </a:lnRef>
+            <a:fillRef idx="0">
+              <a:schemeClr val="dk1"/>
+            </a:fillRef>
+            <a:effectRef idx="0">
+              <a:schemeClr val="dk1"/>
+            </a:effectRef>
+            <a:fontRef idx="minor">
+              <a:schemeClr val="tx1"/>
+            </a:fontRef>
+          </p:style>
+        </p:cxnSp>
+        <p:cxnSp>
+          <p:nvCxnSpPr>
+            <p:cNvPr id="30" name="直線矢印コネクタ 29">
+              <a:extLst>
+                <a:ext uri="{FF2B5EF4-FFF2-40B4-BE49-F238E27FC236}">
+                  <a16:creationId xmlns:a16="http://schemas.microsoft.com/office/drawing/2014/main" id="{8580A410-4EF3-729A-0557-0B85C2D17955}"/>
+                </a:ext>
+              </a:extLst>
+            </p:cNvPr>
+            <p:cNvCxnSpPr>
+              <a:cxnSpLocks/>
+            </p:cNvCxnSpPr>
+            <p:nvPr/>
+          </p:nvCxnSpPr>
+          <p:spPr>
+            <a:xfrm>
+              <a:off x="4777147" y="5781315"/>
+              <a:ext cx="1821204" cy="0"/>
+            </a:xfrm>
+            <a:prstGeom prst="straightConnector1">
+              <a:avLst/>
+            </a:prstGeom>
+            <a:ln w="12700">
+              <a:solidFill>
+                <a:schemeClr val="tx1"/>
+              </a:solidFill>
+              <a:headEnd type="triangle"/>
+              <a:tailEnd type="triangle"/>
+            </a:ln>
+          </p:spPr>
+          <p:style>
+            <a:lnRef idx="1">
+              <a:schemeClr val="dk1"/>
+            </a:lnRef>
+            <a:fillRef idx="0">
+              <a:schemeClr val="dk1"/>
+            </a:fillRef>
+            <a:effectRef idx="0">
+              <a:schemeClr val="dk1"/>
+            </a:effectRef>
+            <a:fontRef idx="minor">
+              <a:schemeClr val="tx1"/>
+            </a:fontRef>
+          </p:style>
+        </p:cxnSp>
+        <p:cxnSp>
+          <p:nvCxnSpPr>
+            <p:cNvPr id="49" name="直線矢印コネクタ 48">
+              <a:extLst>
+                <a:ext uri="{FF2B5EF4-FFF2-40B4-BE49-F238E27FC236}">
+                  <a16:creationId xmlns:a16="http://schemas.microsoft.com/office/drawing/2014/main" id="{29E27914-B388-4161-65A9-A7BFCDFE4D56}"/>
+                </a:ext>
+              </a:extLst>
+            </p:cNvPr>
+            <p:cNvCxnSpPr/>
+            <p:nvPr/>
+          </p:nvCxnSpPr>
+          <p:spPr>
+            <a:xfrm flipV="1">
+              <a:off x="4777147" y="3632200"/>
+              <a:ext cx="0" cy="2615118"/>
+            </a:xfrm>
+            <a:prstGeom prst="straightConnector1">
+              <a:avLst/>
+            </a:prstGeom>
+            <a:ln w="19050">
+              <a:tailEnd type="triangle"/>
+            </a:ln>
+          </p:spPr>
+          <p:style>
+            <a:lnRef idx="1">
+              <a:schemeClr val="dk1"/>
+            </a:lnRef>
+            <a:fillRef idx="0">
+              <a:schemeClr val="dk1"/>
+            </a:fillRef>
+            <a:effectRef idx="0">
+              <a:schemeClr val="dk1"/>
+            </a:effectRef>
+            <a:fontRef idx="minor">
+              <a:schemeClr val="tx1"/>
+            </a:fontRef>
+          </p:style>
+        </p:cxnSp>
+        <p:sp>
+          <p:nvSpPr>
+            <p:cNvPr id="50" name="テキスト ボックス 49">
+              <a:extLst>
+                <a:ext uri="{FF2B5EF4-FFF2-40B4-BE49-F238E27FC236}">
+                  <a16:creationId xmlns:a16="http://schemas.microsoft.com/office/drawing/2014/main" id="{6EB72B0E-690E-3433-5339-14EA1CE4F3BB}"/>
+                </a:ext>
+              </a:extLst>
+            </p:cNvPr>
+            <p:cNvSpPr txBox="1"/>
+            <p:nvPr/>
+          </p:nvSpPr>
+          <p:spPr>
+            <a:xfrm>
+              <a:off x="4837056" y="3478311"/>
+              <a:ext cx="863775" cy="523220"/>
+            </a:xfrm>
+            <a:prstGeom prst="rect">
+              <a:avLst/>
+            </a:prstGeom>
+            <a:noFill/>
+          </p:spPr>
+          <p:txBody>
+            <a:bodyPr wrap="square" rtlCol="0">
+              <a:spAutoFit/>
+            </a:bodyPr>
+            <a:lstStyle/>
+            <a:p>
+              <a:r>
+                <a:rPr kumimoji="1" lang="en-US" altLang="ja-JP" dirty="0"/>
+                <a:t>L(f) </a:t>
+              </a:r>
+              <a:r>
+                <a:rPr kumimoji="1" lang="en-US" altLang="ja-JP" dirty="0" err="1"/>
+                <a:t>dBc</a:t>
+              </a:r>
+              <a:r>
+                <a:rPr kumimoji="1" lang="en-US" altLang="ja-JP" dirty="0"/>
+                <a:t>/Hz</a:t>
+              </a:r>
+              <a:endParaRPr kumimoji="1" lang="ja-JP" altLang="en-US"/>
+            </a:p>
+          </p:txBody>
+        </p:sp>
+      </p:grpSp>
+      <p:pic>
+        <p:nvPicPr>
+          <p:cNvPr id="62" name="図 61">
+            <a:extLst>
+              <a:ext uri="{FF2B5EF4-FFF2-40B4-BE49-F238E27FC236}">
+                <a16:creationId xmlns:a16="http://schemas.microsoft.com/office/drawing/2014/main" id="{916ED799-CAF8-F4B3-828F-59176BCF743A}"/>
+              </a:ext>
+            </a:extLst>
+          </p:cNvPr>
+          <p:cNvPicPr>
+            <a:picLocks noChangeAspect="1"/>
+          </p:cNvPicPr>
+          <p:nvPr/>
+        </p:nvPicPr>
+        <p:blipFill>
+          <a:blip r:embed="rId4"/>
+          <a:stretch>
+            <a:fillRect/>
+          </a:stretch>
+        </p:blipFill>
+        <p:spPr>
+          <a:xfrm>
+            <a:off x="5425620" y="3904365"/>
+            <a:ext cx="4278405" cy="220168"/>
+          </a:xfrm>
+          <a:prstGeom prst="rect">
+            <a:avLst/>
+          </a:prstGeom>
+        </p:spPr>
+      </p:pic>
+      <p:pic>
+        <p:nvPicPr>
+          <p:cNvPr id="63" name="図 62">
+            <a:extLst>
+              <a:ext uri="{FF2B5EF4-FFF2-40B4-BE49-F238E27FC236}">
+                <a16:creationId xmlns:a16="http://schemas.microsoft.com/office/drawing/2014/main" id="{86061A11-EC5A-FDCC-D25A-4038E87F2A68}"/>
+              </a:ext>
+            </a:extLst>
+          </p:cNvPr>
+          <p:cNvPicPr>
+            <a:picLocks noChangeAspect="1"/>
+          </p:cNvPicPr>
+          <p:nvPr/>
+        </p:nvPicPr>
+        <p:blipFill>
+          <a:blip r:embed="rId5"/>
+          <a:stretch>
+            <a:fillRect/>
+          </a:stretch>
+        </p:blipFill>
+        <p:spPr>
+          <a:xfrm>
+            <a:off x="5714530" y="4151219"/>
+            <a:ext cx="1814277" cy="414403"/>
+          </a:xfrm>
+          <a:prstGeom prst="rect">
+            <a:avLst/>
+          </a:prstGeom>
+        </p:spPr>
+      </p:pic>
+      <p:pic>
+        <p:nvPicPr>
+          <p:cNvPr id="64" name="図 63">
+            <a:extLst>
+              <a:ext uri="{FF2B5EF4-FFF2-40B4-BE49-F238E27FC236}">
+                <a16:creationId xmlns:a16="http://schemas.microsoft.com/office/drawing/2014/main" id="{79100334-29CB-0FFD-DBA3-CE530FD52CE2}"/>
+              </a:ext>
+            </a:extLst>
+          </p:cNvPr>
+          <p:cNvPicPr>
+            <a:picLocks noChangeAspect="1"/>
+          </p:cNvPicPr>
+          <p:nvPr/>
+        </p:nvPicPr>
+        <p:blipFill>
+          <a:blip r:embed="rId6"/>
+          <a:stretch>
+            <a:fillRect/>
+          </a:stretch>
+        </p:blipFill>
+        <p:spPr>
+          <a:xfrm>
+            <a:off x="5714530" y="4571147"/>
+            <a:ext cx="3531164" cy="449620"/>
+          </a:xfrm>
+          <a:prstGeom prst="rect">
+            <a:avLst/>
+          </a:prstGeom>
+        </p:spPr>
+      </p:pic>
+      <p:sp>
+        <p:nvSpPr>
+          <p:cNvPr id="67" name="テキスト ボックス 66">
+            <a:extLst>
+              <a:ext uri="{FF2B5EF4-FFF2-40B4-BE49-F238E27FC236}">
+                <a16:creationId xmlns:a16="http://schemas.microsoft.com/office/drawing/2014/main" id="{4AC923F3-F872-D659-BA62-7C910AEBF082}"/>
+              </a:ext>
+            </a:extLst>
+          </p:cNvPr>
+          <p:cNvSpPr txBox="1"/>
+          <p:nvPr/>
+        </p:nvSpPr>
+        <p:spPr>
+          <a:xfrm>
+            <a:off x="5181393" y="5186614"/>
+            <a:ext cx="4536374" cy="523220"/>
+          </a:xfrm>
+          <a:prstGeom prst="rect">
+            <a:avLst/>
+          </a:prstGeom>
+          <a:noFill/>
+        </p:spPr>
+        <p:txBody>
+          <a:bodyPr wrap="square" rtlCol="0">
+            <a:spAutoFit/>
+          </a:bodyPr>
+          <a:lstStyle/>
+          <a:p>
+            <a:r>
+              <a:rPr kumimoji="1" lang="en-US" altLang="ja-JP" dirty="0" err="1"/>
+              <a:t>Offeset</a:t>
+            </a:r>
+            <a:r>
+              <a:rPr kumimoji="1" lang="ja-JP" altLang="en-US"/>
+              <a:t>周波数が</a:t>
+            </a:r>
+            <a:r>
+              <a:rPr kumimoji="1" lang="en-US" altLang="ja-JP" dirty="0"/>
+              <a:t>f1~f2</a:t>
+            </a:r>
+            <a:r>
+              <a:rPr kumimoji="1" lang="ja-JP" altLang="en-US"/>
+              <a:t>の区間の位相ノイズ</a:t>
+            </a:r>
+            <a:r>
+              <a:rPr kumimoji="1" lang="en-US" altLang="ja-JP" dirty="0"/>
+              <a:t>(</a:t>
+            </a:r>
+            <a:r>
+              <a:rPr kumimoji="1" lang="ja-JP" altLang="en-US"/>
+              <a:t>ジッタ</a:t>
+            </a:r>
+            <a:r>
+              <a:rPr kumimoji="1" lang="en-US" altLang="ja-JP" dirty="0"/>
+              <a:t>)</a:t>
+            </a:r>
+            <a:r>
+              <a:rPr kumimoji="1" lang="ja-JP" altLang="en-US"/>
+              <a:t>の</a:t>
+            </a:r>
+            <a:r>
+              <a:rPr kumimoji="1" lang="en-US" altLang="ja-JP" dirty="0"/>
+              <a:t>RMS</a:t>
+            </a:r>
+            <a:r>
+              <a:rPr kumimoji="1" lang="ja-JP" altLang="en-US"/>
+              <a:t>は</a:t>
+            </a:r>
+          </a:p>
+        </p:txBody>
+      </p:sp>
+      <p:sp>
+        <p:nvSpPr>
+          <p:cNvPr id="68" name="テキスト ボックス 67">
+            <a:extLst>
+              <a:ext uri="{FF2B5EF4-FFF2-40B4-BE49-F238E27FC236}">
+                <a16:creationId xmlns:a16="http://schemas.microsoft.com/office/drawing/2014/main" id="{F735FEB5-A6C1-E808-6317-94EF27DFF27B}"/>
+              </a:ext>
+            </a:extLst>
+          </p:cNvPr>
+          <p:cNvSpPr txBox="1"/>
+          <p:nvPr/>
+        </p:nvSpPr>
+        <p:spPr>
+          <a:xfrm>
+            <a:off x="5167651" y="3523080"/>
+            <a:ext cx="4536374" cy="307777"/>
+          </a:xfrm>
+          <a:prstGeom prst="rect">
+            <a:avLst/>
+          </a:prstGeom>
+          <a:noFill/>
+        </p:spPr>
+        <p:txBody>
+          <a:bodyPr wrap="square" rtlCol="0">
+            <a:spAutoFit/>
+          </a:bodyPr>
+          <a:lstStyle/>
+          <a:p>
+            <a:r>
+              <a:rPr kumimoji="1" lang="ja-JP" altLang="en-US"/>
+              <a:t>位相ノイズが存在する信号に対して</a:t>
+            </a:r>
+          </a:p>
+        </p:txBody>
+      </p:sp>
+      <p:grpSp>
+        <p:nvGrpSpPr>
+          <p:cNvPr id="70" name="グループ化 69">
+            <a:extLst>
+              <a:ext uri="{FF2B5EF4-FFF2-40B4-BE49-F238E27FC236}">
+                <a16:creationId xmlns:a16="http://schemas.microsoft.com/office/drawing/2014/main" id="{4966CD35-22E0-3AA2-E340-750964D9B5FA}"/>
+              </a:ext>
+            </a:extLst>
+          </p:cNvPr>
+          <p:cNvGrpSpPr/>
+          <p:nvPr/>
+        </p:nvGrpSpPr>
+        <p:grpSpPr>
+          <a:xfrm>
+            <a:off x="5620477" y="5758114"/>
+            <a:ext cx="3919641" cy="868917"/>
+            <a:chOff x="5669798" y="5316066"/>
+            <a:chExt cx="3919641" cy="868917"/>
+          </a:xfrm>
+        </p:grpSpPr>
+        <p:pic>
+          <p:nvPicPr>
+            <p:cNvPr id="66" name="図 65">
+              <a:extLst>
+                <a:ext uri="{FF2B5EF4-FFF2-40B4-BE49-F238E27FC236}">
+                  <a16:creationId xmlns:a16="http://schemas.microsoft.com/office/drawing/2014/main" id="{299064D2-5B71-6CAE-8C8C-3423B95B475C}"/>
+                </a:ext>
+              </a:extLst>
+            </p:cNvPr>
+            <p:cNvPicPr>
+              <a:picLocks noChangeAspect="1"/>
+            </p:cNvPicPr>
+            <p:nvPr/>
+          </p:nvPicPr>
+          <p:blipFill>
+            <a:blip r:embed="rId7"/>
+            <a:stretch>
+              <a:fillRect/>
+            </a:stretch>
+          </p:blipFill>
+          <p:spPr>
+            <a:xfrm>
+              <a:off x="5834814" y="5405783"/>
+              <a:ext cx="3608918" cy="689483"/>
+            </a:xfrm>
+            <a:prstGeom prst="rect">
+              <a:avLst/>
+            </a:prstGeom>
+          </p:spPr>
+        </p:pic>
+        <p:sp>
+          <p:nvSpPr>
+            <p:cNvPr id="69" name="正方形/長方形 68">
+              <a:extLst>
+                <a:ext uri="{FF2B5EF4-FFF2-40B4-BE49-F238E27FC236}">
+                  <a16:creationId xmlns:a16="http://schemas.microsoft.com/office/drawing/2014/main" id="{B2BA677E-F75E-C29F-40AE-9511BE7542A9}"/>
+                </a:ext>
+              </a:extLst>
+            </p:cNvPr>
+            <p:cNvSpPr/>
+            <p:nvPr/>
+          </p:nvSpPr>
+          <p:spPr>
+            <a:xfrm>
+              <a:off x="5669798" y="5316066"/>
+              <a:ext cx="3919641" cy="868917"/>
+            </a:xfrm>
+            <a:prstGeom prst="rect">
+              <a:avLst/>
+            </a:prstGeom>
+            <a:noFill/>
+            <a:ln>
+              <a:solidFill>
+                <a:schemeClr val="tx1"/>
+              </a:solidFill>
+            </a:ln>
+          </p:spPr>
+          <p:style>
+            <a:lnRef idx="2">
+              <a:schemeClr val="accent6"/>
+            </a:lnRef>
+            <a:fillRef idx="1">
+              <a:schemeClr val="lt1"/>
+            </a:fillRef>
+            <a:effectRef idx="0">
+              <a:schemeClr val="accent6"/>
+            </a:effectRef>
+            <a:fontRef idx="minor">
+              <a:schemeClr val="dk1"/>
+            </a:fontRef>
+          </p:style>
+          <p:txBody>
+            <a:bodyPr rtlCol="0" anchor="ctr"/>
+            <a:lstStyle/>
+            <a:p>
+              <a:pPr algn="ctr"/>
+              <a:endParaRPr kumimoji="1" lang="ja-JP" altLang="en-US"/>
+            </a:p>
+          </p:txBody>
+        </p:sp>
+      </p:grpSp>
+      <p:sp>
+        <p:nvSpPr>
+          <p:cNvPr id="101" name="テキスト ボックス 100">
+            <a:extLst>
+              <a:ext uri="{FF2B5EF4-FFF2-40B4-BE49-F238E27FC236}">
+                <a16:creationId xmlns:a16="http://schemas.microsoft.com/office/drawing/2014/main" id="{CA2EF888-AF51-42BD-DD14-33F5E4212068}"/>
+              </a:ext>
+            </a:extLst>
+          </p:cNvPr>
+          <p:cNvSpPr txBox="1"/>
+          <p:nvPr/>
+        </p:nvSpPr>
+        <p:spPr>
+          <a:xfrm>
+            <a:off x="2851026" y="5095518"/>
+            <a:ext cx="1661592" cy="738664"/>
+          </a:xfrm>
+          <a:prstGeom prst="rect">
+            <a:avLst/>
+          </a:prstGeom>
+          <a:noFill/>
+        </p:spPr>
+        <p:txBody>
+          <a:bodyPr wrap="square" rtlCol="0">
+            <a:spAutoFit/>
+          </a:bodyPr>
+          <a:lstStyle/>
+          <a:p>
+            <a:r>
+              <a:rPr kumimoji="1" lang="ja-JP" altLang="en-US"/>
+              <a:t>この面積が</a:t>
+            </a:r>
+            <a:endParaRPr kumimoji="1" lang="en-US" altLang="ja-JP" dirty="0"/>
+          </a:p>
+          <a:p>
+            <a:r>
+              <a:rPr kumimoji="1" lang="en-US" altLang="ja-JP" dirty="0"/>
+              <a:t>f1~f2(Hz)</a:t>
+            </a:r>
+            <a:r>
+              <a:rPr kumimoji="1" lang="ja-JP" altLang="en-US"/>
+              <a:t>における位相ノイズの</a:t>
+            </a:r>
+            <a:r>
+              <a:rPr kumimoji="1" lang="en-US" altLang="ja-JP" dirty="0"/>
+              <a:t>RMS</a:t>
+            </a:r>
+            <a:endParaRPr kumimoji="1" lang="ja-JP" altLang="en-US"/>
+          </a:p>
+        </p:txBody>
+      </p:sp>
+      <p:pic>
+        <p:nvPicPr>
+          <p:cNvPr id="4" name="図 3">
+            <a:extLst>
+              <a:ext uri="{FF2B5EF4-FFF2-40B4-BE49-F238E27FC236}">
+                <a16:creationId xmlns:a16="http://schemas.microsoft.com/office/drawing/2014/main" id="{9C195C08-8BEE-1A31-ED96-7CE559B150E4}"/>
+              </a:ext>
+            </a:extLst>
+          </p:cNvPr>
+          <p:cNvPicPr>
+            <a:picLocks noChangeAspect="1"/>
+          </p:cNvPicPr>
+          <p:nvPr/>
+        </p:nvPicPr>
+        <p:blipFill>
+          <a:blip r:embed="rId8"/>
+          <a:stretch>
+            <a:fillRect/>
+          </a:stretch>
+        </p:blipFill>
+        <p:spPr>
+          <a:xfrm>
+            <a:off x="578826" y="3485080"/>
+            <a:ext cx="4282985" cy="467447"/>
+          </a:xfrm>
+          <a:prstGeom prst="rect">
+            <a:avLst/>
+          </a:prstGeom>
+        </p:spPr>
+      </p:pic>
+    </p:spTree>
+    <p:extLst>
+      <p:ext uri="{BB962C8B-B14F-4D97-AF65-F5344CB8AC3E}">
+        <p14:creationId xmlns:p14="http://schemas.microsoft.com/office/powerpoint/2010/main" val="4737610"/>
+      </p:ext>
+    </p:extLst>
+  </p:cSld>
+  <p:clrMapOvr>
+    <a:masterClrMapping/>
+  </p:clrMapOvr>
+  <p:extLst>
+    <p:ext uri="{6950BFC3-D8DA-4A85-94F7-54DA5524770B}">
+      <p188:commentRel xmlns:p188="http://schemas.microsoft.com/office/powerpoint/2018/8/main" r:id="rId3"/>
+    </p:ext>
+  </p:extLst>
+</p:sld>
+</file>
+
+<file path=ppt/slides/slide4.xml><?xml version="1.0" encoding="utf-8"?>
+<p:sld xmlns:a="http://schemas.openxmlformats.org/drawingml/2006/main" xmlns:r="http://schemas.openxmlformats.org/officeDocument/2006/relationships" xmlns:p="http://schemas.openxmlformats.org/presentationml/2006/main">
+  <p:cSld>
+    <p:spTree>
+      <p:nvGrpSpPr>
+        <p:cNvPr id="1" name=""/>
+        <p:cNvGrpSpPr/>
+        <p:nvPr/>
+      </p:nvGrpSpPr>
+      <p:grpSpPr>
+        <a:xfrm>
+          <a:off x="0" y="0"/>
+          <a:ext cx="0" cy="0"/>
+          <a:chOff x="0" y="0"/>
+          <a:chExt cx="0" cy="0"/>
+        </a:xfrm>
+      </p:grpSpPr>
       <p:sp>
         <p:nvSpPr>
           <p:cNvPr id="2" name="Title 1"/>
@@ -7506,7 +10485,7 @@
           <a:lstStyle/>
           <a:p>
             <a:r>
-              <a:t>4-3 測定法：オーディオレコーダを使う理由</a:t>
+              <a:t>1-1 位相ノイズとは</a:t>
             </a:r>
           </a:p>
         </p:txBody>
@@ -7531,13 +10510,32 @@
           <a:bodyPr wrap="square"/>
           <a:lstStyle/>
           <a:p>
-            <a:pPr/>
             <a:r>
               <a:rPr>
                 <a:latin typeface="Yu Gothic"/>
                 <a:ea typeface="Yu Gothic"/>
               </a:rPr>
-              <a:t>オーディオレコーディングは高分解能（10秒測定で std 20–30 ps）かつ長時間測定が可能で、0.1–1 Hz の評価に向いている。</a:t>
+              <a:t>位相雑音とは理想的な正弦波からの位相のゆらぎ（時間軸上の誤差＝ジッタ）。基準信号の純度を決める。</a:t>
+            </a:r>
+          </a:p>
+          <a:p>
+            <a:pPr lvl="1"/>
+            <a:r>
+              <a:rPr>
+                <a:latin typeface="Yu Gothic"/>
+                <a:ea typeface="Yu Gothic"/>
+              </a:rPr>
+              <a:t>通信・測位・計測の性能を左右する</a:t>
+            </a:r>
+          </a:p>
+          <a:p>
+            <a:pPr lvl="1"/>
+            <a:r>
+              <a:rPr>
+                <a:latin typeface="Yu Gothic"/>
+                <a:ea typeface="Yu Gothic"/>
+              </a:rPr>
+              <a:t>近傍（低オフセット周波数）ほど評価・改善が難しい</a:t>
             </a:r>
           </a:p>
         </p:txBody>
@@ -7581,7 +10579,7 @@
           </a:fontRef>
         </p:style>
         <p:txBody>
-          <a:bodyPr rtlCol="0" anchor="ctr" wrap="square"/>
+          <a:bodyPr wrap="square" rtlCol="0" anchor="ctr"/>
           <a:lstStyle/>
           <a:p>
             <a:pPr algn="ctr"/>
@@ -7593,8 +10591,8 @@
                 <a:latin typeface="Yu Gothic"/>
                 <a:ea typeface="Yu Gothic"/>
               </a:rPr>
-              <a:t>録音系統図・分周・サンプル数比較表
-（卒論PPTXの該当図を流用）</a:t>
+              <a:t>位相ノイズの説明図（理想波と揺らぎ）
+※設計書1-1が未記入のため要追記</a:t>
             </a:r>
           </a:p>
         </p:txBody>
@@ -7607,8 +10605,8 @@
 </p:sld>
 </file>
 
-<file path=ppt/slides/slide21.xml><?xml version="1.0" encoding="utf-8"?>
-<p:sld xmlns:a="http://schemas.openxmlformats.org/drawingml/2006/main" xmlns:p="http://schemas.openxmlformats.org/presentationml/2006/main" xmlns:r="http://schemas.openxmlformats.org/officeDocument/2006/relationships">
+<file path=ppt/slides/slide5.xml><?xml version="1.0" encoding="utf-8"?>
+<p:sld xmlns:a="http://schemas.openxmlformats.org/drawingml/2006/main" xmlns:r="http://schemas.openxmlformats.org/officeDocument/2006/relationships" xmlns:p="http://schemas.openxmlformats.org/presentationml/2006/main">
   <p:cSld>
     <p:spTree>
       <p:nvGrpSpPr>
@@ -7616,7 +10614,14 @@
         <p:cNvGrpSpPr/>
         <p:nvPr/>
       </p:nvGrpSpPr>
-      <p:grpSpPr/>
+      <p:grpSpPr>
+        <a:xfrm>
+          <a:off x="0" y="0"/>
+          <a:ext cx="0" cy="0"/>
+          <a:chOff x="0" y="0"/>
+          <a:chExt cx="0" cy="0"/>
+        </a:xfrm>
+      </p:grpSpPr>
       <p:sp>
         <p:nvSpPr>
           <p:cNvPr id="2" name="Title 1"/>
@@ -7633,7 +10638,185 @@
           <a:lstStyle/>
           <a:p>
             <a:r>
-              <a:t>4-4 予備実験：フィードバック電圧の感応度同定</a:t>
+              <a:t>1-2 基準信号の純度と現状</a:t>
+            </a:r>
+          </a:p>
+        </p:txBody>
+      </p:sp>
+      <p:sp>
+        <p:nvSpPr>
+          <p:cNvPr id="3" name="Text Placeholder 2"/>
+          <p:cNvSpPr>
+            <a:spLocks noGrp="1"/>
+          </p:cNvSpPr>
+          <p:nvPr>
+            <p:ph type="body" idx="1"/>
+          </p:nvPr>
+        </p:nvSpPr>
+        <p:spPr>
+          <a:xfrm>
+            <a:off x="274320" y="914400"/>
+            <a:ext cx="9326880" cy="2651760"/>
+          </a:xfrm>
+        </p:spPr>
+        <p:txBody>
+          <a:bodyPr wrap="square"/>
+          <a:lstStyle/>
+          <a:p>
+            <a:r>
+              <a:rPr dirty="0">
+                <a:latin typeface="Yu Gothic"/>
+                <a:ea typeface="Yu Gothic"/>
+              </a:rPr>
+              <a:t>通信・測位・計測は基準正弦波の位相雑音に支えられる。原子時計・水素メーザーは高純度だが高価で日単位の計測が必要、OCXOは安価で数秒〜数分の安定に優れるが単体に限界。</a:t>
+            </a:r>
+          </a:p>
+          <a:p>
+            <a:pPr lvl="1"/>
+            <a:r>
+              <a:rPr dirty="0" err="1">
+                <a:latin typeface="Yu Gothic"/>
+                <a:ea typeface="Yu Gothic"/>
+              </a:rPr>
+              <a:t>市販データは概ね</a:t>
+            </a:r>
+            <a:r>
+              <a:rPr dirty="0">
+                <a:latin typeface="Yu Gothic"/>
+                <a:ea typeface="Yu Gothic"/>
+              </a:rPr>
+              <a:t> 1 Hz 止まり。近傍（0.1–1 </a:t>
+            </a:r>
+            <a:r>
+              <a:rPr dirty="0" err="1">
+                <a:latin typeface="Yu Gothic"/>
+                <a:ea typeface="Yu Gothic"/>
+              </a:rPr>
+              <a:t>Hz）は測定が難しい</a:t>
+            </a:r>
+            <a:endParaRPr dirty="0">
+              <a:latin typeface="Yu Gothic"/>
+              <a:ea typeface="Yu Gothic"/>
+            </a:endParaRPr>
+          </a:p>
+          <a:p>
+            <a:pPr lvl="1"/>
+            <a:r>
+              <a:rPr dirty="0" err="1">
+                <a:latin typeface="Yu Gothic"/>
+                <a:ea typeface="Yu Gothic"/>
+              </a:rPr>
+              <a:t>近傍の測定純度をどう高めるかが本研究の論点</a:t>
+            </a:r>
+            <a:endParaRPr dirty="0">
+              <a:latin typeface="Yu Gothic"/>
+              <a:ea typeface="Yu Gothic"/>
+            </a:endParaRPr>
+          </a:p>
+        </p:txBody>
+      </p:sp>
+      <p:pic>
+        <p:nvPicPr>
+          <p:cNvPr id="4" name="Picture 3" descr="bench_p2_curated.png"/>
+          <p:cNvPicPr>
+            <a:picLocks noChangeAspect="1"/>
+          </p:cNvPicPr>
+          <p:nvPr/>
+        </p:nvPicPr>
+        <p:blipFill>
+          <a:blip r:embed="rId2"/>
+          <a:stretch>
+            <a:fillRect/>
+          </a:stretch>
+        </p:blipFill>
+        <p:spPr>
+          <a:xfrm>
+            <a:off x="2570595" y="3703320"/>
+            <a:ext cx="4734329" cy="2606040"/>
+          </a:xfrm>
+          <a:prstGeom prst="rect">
+            <a:avLst/>
+          </a:prstGeom>
+        </p:spPr>
+      </p:pic>
+      <p:sp>
+        <p:nvSpPr>
+          <p:cNvPr id="5" name="TextBox 4"/>
+          <p:cNvSpPr txBox="1"/>
+          <p:nvPr/>
+        </p:nvSpPr>
+        <p:spPr>
+          <a:xfrm>
+            <a:off x="1463040" y="6446520"/>
+            <a:ext cx="6949440" cy="274320"/>
+          </a:xfrm>
+          <a:prstGeom prst="rect">
+            <a:avLst/>
+          </a:prstGeom>
+          <a:noFill/>
+        </p:spPr>
+        <p:txBody>
+          <a:bodyPr wrap="square">
+            <a:spAutoFit/>
+          </a:bodyPr>
+          <a:lstStyle/>
+          <a:p>
+            <a:pPr algn="ctr"/>
+            <a:r>
+              <a:rPr sz="900">
+                <a:solidFill>
+                  <a:srgbClr val="595959"/>
+                </a:solidFill>
+                <a:latin typeface="Yu Gothic"/>
+                <a:ea typeface="Yu Gothic"/>
+              </a:rPr>
+              <a:t>市販各機の位相雑音 L(f)（10 MHz 換算）</a:t>
+            </a:r>
+          </a:p>
+        </p:txBody>
+      </p:sp>
+    </p:spTree>
+  </p:cSld>
+  <p:clrMapOvr>
+    <a:masterClrMapping/>
+  </p:clrMapOvr>
+</p:sld>
+</file>
+
+<file path=ppt/slides/slide6.xml><?xml version="1.0" encoding="utf-8"?>
+<p:sld xmlns:a="http://schemas.openxmlformats.org/drawingml/2006/main" xmlns:r="http://schemas.openxmlformats.org/officeDocument/2006/relationships" xmlns:p="http://schemas.openxmlformats.org/presentationml/2006/main">
+  <p:cSld>
+    <p:spTree>
+      <p:nvGrpSpPr>
+        <p:cNvPr id="1" name=""/>
+        <p:cNvGrpSpPr/>
+        <p:nvPr/>
+      </p:nvGrpSpPr>
+      <p:grpSpPr>
+        <a:xfrm>
+          <a:off x="0" y="0"/>
+          <a:ext cx="0" cy="0"/>
+          <a:chOff x="0" y="0"/>
+          <a:chExt cx="0" cy="0"/>
+        </a:xfrm>
+      </p:grpSpPr>
+      <p:sp>
+        <p:nvSpPr>
+          <p:cNvPr id="2" name="Title 1"/>
+          <p:cNvSpPr>
+            <a:spLocks noGrp="1"/>
+          </p:cNvSpPr>
+          <p:nvPr>
+            <p:ph type="title"/>
+          </p:nvPr>
+        </p:nvSpPr>
+        <p:spPr/>
+        <p:txBody>
+          <a:bodyPr/>
+          <a:lstStyle/>
+          <a:p>
+            <a:r>
+              <a:t>02 本研究の目標</a:t>
             </a:r>
           </a:p>
         </p:txBody>
@@ -7658,30 +10841,50 @@
           <a:bodyPr wrap="square"/>
           <a:lstStyle/>
           <a:p>
-            <a:pPr/>
             <a:r>
               <a:rPr>
                 <a:latin typeface="Yu Gothic"/>
                 <a:ea typeface="Yu Gothic"/>
               </a:rPr>
-              <a:t>フィードバック電圧のLSBを測定し回帰検証することで、フィードバックロジックのパラメータをチューニングした。</a:t>
+              <a:t>安価なOCXOで可能な限り高純度な基準信号源を実現することを目標とする</a:t>
+            </a:r>
+            <a:r>
+              <a:rPr dirty="0">
+                <a:latin typeface="Yu Gothic"/>
+                <a:ea typeface="Yu Gothic"/>
+              </a:rPr>
+              <a:t>。</a:t>
             </a:r>
           </a:p>
           <a:p>
             <a:pPr lvl="1"/>
             <a:r>
-              <a:rPr>
+              <a:rPr dirty="0" err="1">
                 <a:latin typeface="Yu Gothic"/>
                 <a:ea typeface="Yu Gothic"/>
               </a:rPr>
-              <a:t>1 LSB（≈305 µV）ずつ階段状に電圧を変え、各段の FRFR 傾きを電圧増分に直線回帰 → K≈860 ns/(V·s)</a:t>
+              <a:t>究極的な目標：安価な水晶発振器（OCXO）で高純度な基準信号源を実現</a:t>
+            </a:r>
+            <a:endParaRPr dirty="0">
+              <a:latin typeface="Yu Gothic"/>
+              <a:ea typeface="Yu Gothic"/>
+            </a:endParaRPr>
+          </a:p>
+          <a:p>
+            <a:pPr lvl="1"/>
+            <a:r>
+              <a:rPr dirty="0">
+                <a:latin typeface="Yu Gothic"/>
+                <a:ea typeface="Yu Gothic"/>
+              </a:rPr>
+              <a:t>アプローチ：複数OCXOを同期させ、1台では実現できない純度での計測を可能にする</a:t>
             </a:r>
           </a:p>
         </p:txBody>
       </p:sp>
       <p:pic>
         <p:nvPicPr>
-          <p:cNvPr id="4" name="Picture 3" descr="fig3_plant.png"/>
+          <p:cNvPr id="4" name="Picture 3" descr="fig_pw_1overN.png"/>
           <p:cNvPicPr>
             <a:picLocks noChangeAspect="1"/>
           </p:cNvPicPr>
@@ -7695,8 +10898,8 @@
         </p:blipFill>
         <p:spPr>
           <a:xfrm>
-            <a:off x="5074920" y="2540374"/>
-            <a:ext cx="4526280" cy="2508770"/>
+            <a:off x="5074920" y="2476637"/>
+            <a:ext cx="4526280" cy="2636244"/>
           </a:xfrm>
           <a:prstGeom prst="rect">
             <a:avLst/>
@@ -7711,8 +10914,8 @@
 </p:sld>
 </file>
 
-<file path=ppt/slides/slide22.xml><?xml version="1.0" encoding="utf-8"?>
-<p:sld xmlns:a="http://schemas.openxmlformats.org/drawingml/2006/main" xmlns:p="http://schemas.openxmlformats.org/presentationml/2006/main" xmlns:r="http://schemas.openxmlformats.org/officeDocument/2006/relationships">
+<file path=ppt/slides/slide7.xml><?xml version="1.0" encoding="utf-8"?>
+<p:sld xmlns:a="http://schemas.openxmlformats.org/drawingml/2006/main" xmlns:r="http://schemas.openxmlformats.org/officeDocument/2006/relationships" xmlns:p="http://schemas.openxmlformats.org/presentationml/2006/main">
   <p:cSld>
     <p:spTree>
       <p:nvGrpSpPr>
@@ -7720,7 +10923,14 @@
         <p:cNvGrpSpPr/>
         <p:nvPr/>
       </p:nvGrpSpPr>
-      <p:grpSpPr/>
+      <p:grpSpPr>
+        <a:xfrm>
+          <a:off x="0" y="0"/>
+          <a:ext cx="0" cy="0"/>
+          <a:chOff x="0" y="0"/>
+          <a:chExt cx="0" cy="0"/>
+        </a:xfrm>
+      </p:grpSpPr>
       <p:sp>
         <p:nvSpPr>
           <p:cNvPr id="2" name="Title 1"/>
@@ -7737,7 +10947,7 @@
           <a:lstStyle/>
           <a:p>
             <a:r>
-              <a:t>4-5 フィードバックロジック</a:t>
+              <a:t>3-1 同期・平均による位相雑音の改善（1/N の原理）</a:t>
             </a:r>
           </a:p>
         </p:txBody>
@@ -7755,20 +10965,19 @@
         <p:spPr>
           <a:xfrm>
             <a:off x="274320" y="914400"/>
-            <a:ext cx="9326880" cy="2286000"/>
+            <a:ext cx="9326880" cy="2651760"/>
           </a:xfrm>
         </p:spPr>
         <p:txBody>
           <a:bodyPr wrap="square"/>
           <a:lstStyle/>
           <a:p>
-            <a:pPr/>
             <a:r>
               <a:rPr>
                 <a:latin typeface="Yu Gothic"/>
                 <a:ea typeface="Yu Gothic"/>
               </a:rPr>
-              <a:t>位相のズレ e と周波数のズレ Δf を使う2状態フィードバックで、必要な分だけ電圧を動かす（1 LSB 未満は動かさない＝不感帯）。同期動作そのものが位相雑音を持ち込まない。</a:t>
+              <a:t>互いに無相関な雑音は平均で打ち消し合うため、位相を揃えた複数OCXOの出力を平均すると単体を超える純度になる。</a:t>
             </a:r>
           </a:p>
           <a:p>
@@ -7778,34 +10987,14 @@
                 <a:latin typeface="Yu Gothic"/>
                 <a:ea typeface="Yu Gothic"/>
               </a:rPr>
-              <a:t>出自：ACC（車両追従制御）の状態方程式を波動系へ置き換え</a:t>
-            </a:r>
-          </a:p>
-          <a:p>
-            <a:pPr lvl="1"/>
-            <a:r>
-              <a:rPr>
-                <a:latin typeface="Yu Gothic"/>
-                <a:ea typeface="Yu Gothic"/>
-              </a:rPr>
-              <a:t>更新：Δf_des=clamp(Kp_e·e) → 必要段数 dN=round(...) → 電圧更新</a:t>
-            </a:r>
-          </a:p>
-          <a:p>
-            <a:pPr lvl="1"/>
-            <a:r>
-              <a:rPr>
-                <a:latin typeface="Yu Gothic"/>
-                <a:ea typeface="Yu Gothic"/>
-              </a:rPr>
-              <a:t>不感帯で静かに同期。比例・微分（PID）は過剰動作で短期雑音（対比）</a:t>
+              <a:t>無相関な雑音は平均すると電力が台数分の1（2台で 1/2）になり、近傍位相雑音が −3 dB 改善する</a:t>
             </a:r>
           </a:p>
         </p:txBody>
       </p:sp>
       <p:pic>
         <p:nvPicPr>
-          <p:cNvPr id="4" name="Picture 3" descr="fig4_block.png"/>
+          <p:cNvPr id="4" name="Picture 3" descr="eq_avg_3db.png"/>
           <p:cNvPicPr>
             <a:picLocks noChangeAspect="1"/>
           </p:cNvPicPr>
@@ -7819,38 +11008,50 @@
         </p:blipFill>
         <p:spPr>
           <a:xfrm>
-            <a:off x="411480" y="3757504"/>
-            <a:ext cx="4495647" cy="1720430"/>
+            <a:off x="3455242" y="3703320"/>
+            <a:ext cx="2965035" cy="2606040"/>
           </a:xfrm>
           <a:prstGeom prst="rect">
             <a:avLst/>
           </a:prstGeom>
         </p:spPr>
       </p:pic>
-      <p:pic>
-        <p:nvPicPr>
-          <p:cNvPr id="5" name="Picture 4" descr="fig_ctrl.png"/>
-          <p:cNvPicPr>
-            <a:picLocks noChangeAspect="1"/>
-          </p:cNvPicPr>
+      <p:sp>
+        <p:nvSpPr>
+          <p:cNvPr id="5" name="TextBox 4"/>
+          <p:cNvSpPr txBox="1"/>
           <p:nvPr/>
-        </p:nvPicPr>
-        <p:blipFill>
-          <a:blip r:embed="rId3"/>
-          <a:stretch>
-            <a:fillRect/>
-          </a:stretch>
-        </p:blipFill>
+        </p:nvSpPr>
         <p:spPr>
           <a:xfrm>
-            <a:off x="5144416" y="3429000"/>
-            <a:ext cx="4203949" cy="2377440"/>
+            <a:off x="1463040" y="6446520"/>
+            <a:ext cx="6949440" cy="274320"/>
           </a:xfrm>
           <a:prstGeom prst="rect">
             <a:avLst/>
           </a:prstGeom>
+          <a:noFill/>
         </p:spPr>
-      </p:pic>
+        <p:txBody>
+          <a:bodyPr wrap="square">
+            <a:spAutoFit/>
+          </a:bodyPr>
+          <a:lstStyle/>
+          <a:p>
+            <a:pPr algn="ctr"/>
+            <a:r>
+              <a:rPr sz="900">
+                <a:solidFill>
+                  <a:srgbClr val="595959"/>
+                </a:solidFill>
+                <a:latin typeface="Yu Gothic"/>
+                <a:ea typeface="Yu Gothic"/>
+              </a:rPr>
+              <a:t>N台平均で雑音パワーは 1/N。N=2 で S_φ/2 ＝ 10·log₁₀(1/2) ≈ −3 dB</a:t>
+            </a:r>
+          </a:p>
+        </p:txBody>
+      </p:sp>
     </p:spTree>
   </p:cSld>
   <p:clrMapOvr>
@@ -7859,8 +11060,8 @@
 </p:sld>
 </file>
 
-<file path=ppt/slides/slide23.xml><?xml version="1.0" encoding="utf-8"?>
-<p:sld xmlns:a="http://schemas.openxmlformats.org/drawingml/2006/main" xmlns:p="http://schemas.openxmlformats.org/presentationml/2006/main" xmlns:r="http://schemas.openxmlformats.org/officeDocument/2006/relationships">
+<file path=ppt/slides/slide8.xml><?xml version="1.0" encoding="utf-8"?>
+<p:sld xmlns:a="http://schemas.openxmlformats.org/drawingml/2006/main" xmlns:r="http://schemas.openxmlformats.org/officeDocument/2006/relationships" xmlns:p="http://schemas.openxmlformats.org/presentationml/2006/main">
   <p:cSld>
     <p:spTree>
       <p:nvGrpSpPr>
@@ -7868,7 +11069,14 @@
         <p:cNvGrpSpPr/>
         <p:nvPr/>
       </p:nvGrpSpPr>
-      <p:grpSpPr/>
+      <p:grpSpPr>
+        <a:xfrm>
+          <a:off x="0" y="0"/>
+          <a:ext cx="0" cy="0"/>
+          <a:chOff x="0" y="0"/>
+          <a:chExt cx="0" cy="0"/>
+        </a:xfrm>
+      </p:grpSpPr>
       <p:sp>
         <p:nvSpPr>
           <p:cNvPr id="2" name="Title 1"/>
@@ -7885,217 +11093,7 @@
           <a:lstStyle/>
           <a:p>
             <a:r>
-              <a:t>05 実験と結果</a:t>
-            </a:r>
-          </a:p>
-        </p:txBody>
-      </p:sp>
-      <p:sp>
-        <p:nvSpPr>
-          <p:cNvPr id="3" name="Text Placeholder 2"/>
-          <p:cNvSpPr>
-            <a:spLocks noGrp="1"/>
-          </p:cNvSpPr>
-          <p:nvPr>
-            <p:ph type="body" idx="1"/>
-          </p:nvPr>
-        </p:nvSpPr>
-        <p:spPr>
-          <a:xfrm>
-            <a:off x="274320" y="914400"/>
-            <a:ext cx="9326880" cy="2286000"/>
-          </a:xfrm>
-        </p:spPr>
-        <p:txBody>
-          <a:bodyPr wrap="square"/>
-          <a:lstStyle/>
-          <a:p>
-            <a:pPr/>
-            <a:r>
-              <a:rPr>
-                <a:latin typeface="Yu Gothic"/>
-                <a:ea typeface="Yu Gothic"/>
-              </a:rPr>
-              <a:t>実測モデルに基づくモデルFB（Kp_e=0.08）は、無制御HOLDと同等の近傍位相雑音のまま同期できる（差≈0 dB）＝同期時に位相雑音を持ち込まない。PID制御は短期雑音を生む（対比）。</a:t>
-            </a:r>
-          </a:p>
-          <a:p>
-            <a:pPr lvl="1"/>
-            <a:r>
-              <a:rPr>
-                <a:latin typeface="Yu Gothic"/>
-                <a:ea typeface="Yu Gothic"/>
-              </a:rPr>
-              <a:t>モデルFB と HOLD の近傍位相雑音がほぼ一致（差≈0 dB）</a:t>
-            </a:r>
-          </a:p>
-          <a:p>
-            <a:pPr lvl="1"/>
-            <a:r>
-              <a:rPr>
-                <a:latin typeface="Yu Gothic"/>
-                <a:ea typeface="Yu Gothic"/>
-              </a:rPr>
-              <a:t>比例・微分（PID）制御は過剰動作で短期ジッタを注入</a:t>
-            </a:r>
-          </a:p>
-        </p:txBody>
-      </p:sp>
-      <p:pic>
-        <p:nvPicPr>
-          <p:cNvPr id="4" name="Picture 3" descr="model_kpe0.08_PN.png"/>
-          <p:cNvPicPr>
-            <a:picLocks noChangeAspect="1"/>
-          </p:cNvPicPr>
-          <p:nvPr/>
-        </p:nvPicPr>
-        <p:blipFill>
-          <a:blip r:embed="rId2"/>
-          <a:stretch>
-            <a:fillRect/>
-          </a:stretch>
-        </p:blipFill>
-        <p:spPr>
-          <a:xfrm>
-            <a:off x="951432" y="3429000"/>
-            <a:ext cx="3415743" cy="2377440"/>
-          </a:xfrm>
-          <a:prstGeom prst="rect">
-            <a:avLst/>
-          </a:prstGeom>
-        </p:spPr>
-      </p:pic>
-      <p:sp>
-        <p:nvSpPr>
-          <p:cNvPr id="5" name="TextBox 4"/>
-          <p:cNvSpPr txBox="1"/>
-          <p:nvPr/>
-        </p:nvSpPr>
-        <p:spPr>
-          <a:xfrm>
-            <a:off x="411480" y="5943600"/>
-            <a:ext cx="4495647" cy="274320"/>
-          </a:xfrm>
-          <a:prstGeom prst="rect">
-            <a:avLst/>
-          </a:prstGeom>
-          <a:noFill/>
-        </p:spPr>
-        <p:txBody>
-          <a:bodyPr wrap="square">
-            <a:spAutoFit/>
-          </a:bodyPr>
-          <a:lstStyle/>
-          <a:p>
-            <a:pPr algn="ctr"/>
-            <a:r>
-              <a:rPr sz="900">
-                <a:solidFill>
-                  <a:srgbClr val="595959"/>
-                </a:solidFill>
-                <a:latin typeface="Yu Gothic"/>
-                <a:ea typeface="Yu Gothic"/>
-              </a:rPr>
-              <a:t>モデルFB（Kp_e=0.08）の L(f)</a:t>
-            </a:r>
-          </a:p>
-        </p:txBody>
-      </p:sp>
-      <p:pic>
-        <p:nvPicPr>
-          <p:cNvPr id="6" name="Picture 5" descr="model_HOLD_PN.png"/>
-          <p:cNvPicPr>
-            <a:picLocks noChangeAspect="1"/>
-          </p:cNvPicPr>
-          <p:nvPr/>
-        </p:nvPicPr>
-        <p:blipFill>
-          <a:blip r:embed="rId3"/>
-          <a:stretch>
-            <a:fillRect/>
-          </a:stretch>
-        </p:blipFill>
-        <p:spPr>
-          <a:xfrm>
-            <a:off x="5538519" y="3429000"/>
-            <a:ext cx="3415743" cy="2377440"/>
-          </a:xfrm>
-          <a:prstGeom prst="rect">
-            <a:avLst/>
-          </a:prstGeom>
-        </p:spPr>
-      </p:pic>
-      <p:sp>
-        <p:nvSpPr>
-          <p:cNvPr id="7" name="TextBox 6"/>
-          <p:cNvSpPr txBox="1"/>
-          <p:nvPr/>
-        </p:nvSpPr>
-        <p:spPr>
-          <a:xfrm>
-            <a:off x="4998567" y="5943600"/>
-            <a:ext cx="4495647" cy="274320"/>
-          </a:xfrm>
-          <a:prstGeom prst="rect">
-            <a:avLst/>
-          </a:prstGeom>
-          <a:noFill/>
-        </p:spPr>
-        <p:txBody>
-          <a:bodyPr wrap="square">
-            <a:spAutoFit/>
-          </a:bodyPr>
-          <a:lstStyle/>
-          <a:p>
-            <a:pPr algn="ctr"/>
-            <a:r>
-              <a:rPr sz="900">
-                <a:solidFill>
-                  <a:srgbClr val="595959"/>
-                </a:solidFill>
-                <a:latin typeface="Yu Gothic"/>
-                <a:ea typeface="Yu Gothic"/>
-              </a:rPr>
-              <a:t>無制御 HOLD の L(f)</a:t>
-            </a:r>
-          </a:p>
-        </p:txBody>
-      </p:sp>
-    </p:spTree>
-  </p:cSld>
-  <p:clrMapOvr>
-    <a:masterClrMapping/>
-  </p:clrMapOvr>
-</p:sld>
-</file>
-
-<file path=ppt/slides/slide24.xml><?xml version="1.0" encoding="utf-8"?>
-<p:sld xmlns:a="http://schemas.openxmlformats.org/drawingml/2006/main" xmlns:p="http://schemas.openxmlformats.org/presentationml/2006/main" xmlns:r="http://schemas.openxmlformats.org/officeDocument/2006/relationships">
-  <p:cSld>
-    <p:spTree>
-      <p:nvGrpSpPr>
-        <p:cNvPr id="1" name=""/>
-        <p:cNvGrpSpPr/>
-        <p:nvPr/>
-      </p:nvGrpSpPr>
-      <p:grpSpPr/>
-      <p:sp>
-        <p:nvSpPr>
-          <p:cNvPr id="2" name="Title 1"/>
-          <p:cNvSpPr>
-            <a:spLocks noGrp="1"/>
-          </p:cNvSpPr>
-          <p:nvPr>
-            <p:ph type="title"/>
-          </p:nvPr>
-        </p:nvSpPr>
-        <p:spPr/>
-        <p:txBody>
-          <a:bodyPr/>
-          <a:lstStyle/>
-          <a:p>
-            <a:r>
-              <a:t>06 考察と今後の展望</a:t>
+              <a:t>4-1 アプローチ：能動的に同期して平均する</a:t>
             </a:r>
           </a:p>
         </p:txBody>
@@ -8120,13 +11118,12 @@
           <a:bodyPr wrap="square"/>
           <a:lstStyle/>
           <a:p>
-            <a:pPr/>
             <a:r>
               <a:rPr>
                 <a:latin typeface="Yu Gothic"/>
                 <a:ea typeface="Yu Gothic"/>
               </a:rPr>
-              <a:t>フィードバック制御により、近傍位相雑音（同期動作に伴う短期の位相ゆらぎ）を持ち込まずに同期させることに成功した。今後は2台を同時制御・合成器で平均して −3 dB を実証し、N台へ拡張する。</a:t>
+              <a:t>互いに無相関な雑音は平均で打ち消し合う。位相を揃えた複数OCXOの出力を能動的フィードバックで実時間に同期・平均し、単体を超える純度を実現する（国際原子時のクロックアンサンブルを小規模・実時間で適用）。</a:t>
             </a:r>
           </a:p>
           <a:p>
@@ -8136,7 +11133,7 @@
                 <a:latin typeface="Yu Gothic"/>
                 <a:ea typeface="Yu Gothic"/>
               </a:rPr>
-              <a:t>現状：実測モデルに基づくFBで近傍位相雑音を注入せず同期を実現</a:t>
+              <a:t>平均には各発振器の位相が揃うことが前提</a:t>
             </a:r>
           </a:p>
           <a:p>
@@ -8146,7 +11143,7 @@
                 <a:latin typeface="Yu Gothic"/>
                 <a:ea typeface="Yu Gothic"/>
               </a:rPr>
-              <a:t>Step1：二つのOCXOの平均に対して同期させる</a:t>
+              <a:t>本研究の方式：能動的フィードバックで実時間同期し、出力を平均する</a:t>
             </a:r>
           </a:p>
           <a:p>
@@ -8156,17 +11153,107 @@
                 <a:latin typeface="Yu Gothic"/>
                 <a:ea typeface="Yu Gothic"/>
               </a:rPr>
-              <a:t>Step2：同期したOCXOを合成器で平均し測定</a:t>
+              <a:t>同期を『雑音を加えずに』行うことが中核課題</a:t>
             </a:r>
           </a:p>
+        </p:txBody>
+      </p:sp>
+      <p:pic>
+        <p:nvPicPr>
+          <p:cNvPr id="4" name="Picture 3" descr="fig2_analogy.png"/>
+          <p:cNvPicPr>
+            <a:picLocks noChangeAspect="1"/>
+          </p:cNvPicPr>
+          <p:nvPr/>
+        </p:nvPicPr>
+        <p:blipFill>
+          <a:blip r:embed="rId2"/>
+          <a:stretch>
+            <a:fillRect/>
+          </a:stretch>
+        </p:blipFill>
+        <p:spPr>
+          <a:xfrm>
+            <a:off x="5074920" y="2648631"/>
+            <a:ext cx="4526280" cy="2292256"/>
+          </a:xfrm>
+          <a:prstGeom prst="rect">
+            <a:avLst/>
+          </a:prstGeom>
+        </p:spPr>
+      </p:pic>
+    </p:spTree>
+  </p:cSld>
+  <p:clrMapOvr>
+    <a:masterClrMapping/>
+  </p:clrMapOvr>
+</p:sld>
+</file>
+
+<file path=ppt/slides/slide9.xml><?xml version="1.0" encoding="utf-8"?>
+<p:sld xmlns:a="http://schemas.openxmlformats.org/drawingml/2006/main" xmlns:r="http://schemas.openxmlformats.org/officeDocument/2006/relationships" xmlns:p="http://schemas.openxmlformats.org/presentationml/2006/main">
+  <p:cSld>
+    <p:spTree>
+      <p:nvGrpSpPr>
+        <p:cNvPr id="1" name=""/>
+        <p:cNvGrpSpPr/>
+        <p:nvPr/>
+      </p:nvGrpSpPr>
+      <p:grpSpPr>
+        <a:xfrm>
+          <a:off x="0" y="0"/>
+          <a:ext cx="0" cy="0"/>
+          <a:chOff x="0" y="0"/>
+          <a:chExt cx="0" cy="0"/>
+        </a:xfrm>
+      </p:grpSpPr>
+      <p:sp>
+        <p:nvSpPr>
+          <p:cNvPr id="2" name="Title 1"/>
+          <p:cNvSpPr>
+            <a:spLocks noGrp="1"/>
+          </p:cNvSpPr>
+          <p:nvPr>
+            <p:ph type="title"/>
+          </p:nvPr>
+        </p:nvSpPr>
+        <p:spPr/>
+        <p:txBody>
+          <a:bodyPr/>
+          <a:lstStyle/>
           <a:p>
-            <a:pPr lvl="1"/>
+            <a:r>
+              <a:t>4-2 実験系</a:t>
+            </a:r>
+          </a:p>
+        </p:txBody>
+      </p:sp>
+      <p:sp>
+        <p:nvSpPr>
+          <p:cNvPr id="3" name="Text Placeholder 2"/>
+          <p:cNvSpPr>
+            <a:spLocks noGrp="1"/>
+          </p:cNvSpPr>
+          <p:nvPr>
+            <p:ph type="body" idx="1"/>
+          </p:nvPr>
+        </p:nvSpPr>
+        <p:spPr>
+          <a:xfrm>
+            <a:off x="274320" y="914400"/>
+            <a:ext cx="4526280" cy="5212080"/>
+          </a:xfrm>
+        </p:spPr>
+        <p:txBody>
+          <a:bodyPr wrap="square"/>
+          <a:lstStyle/>
+          <a:p>
             <a:r>
               <a:rPr>
                 <a:latin typeface="Yu Gothic"/>
                 <a:ea typeface="Yu Gothic"/>
               </a:rPr>
-              <a:t>Step3：N台へ拡張</a:t>
+              <a:t>OCXO2台に対し、位相差FRFRをターゲットとしてオシロスコープで計測。計測結果を基に片方のOCXOへフィードバック電圧を印加する。</a:t>
             </a:r>
           </a:p>
         </p:txBody>
@@ -8210,7 +11297,7 @@
           </a:fontRef>
         </p:style>
         <p:txBody>
-          <a:bodyPr rtlCol="0" anchor="ctr" wrap="square"/>
+          <a:bodyPr wrap="square" rtlCol="0" anchor="ctr"/>
           <a:lstStyle/>
           <a:p>
             <a:pPr algn="ctr"/>
@@ -8222,8 +11309,8 @@
                 <a:latin typeface="Yu Gothic"/>
                 <a:ea typeface="Yu Gothic"/>
               </a:rPr>
-              <a:t>今後のロードマップ
-片方向同期 → 平均で −3 dB → N台 → 双方向結合</a:t>
+              <a:t>実験系ブロック図
+（image1.png を白黒で清書。FB→OCXO 帰還矢印・PC(MATLAB) ラベルを追記）</a:t>
             </a:r>
           </a:p>
         </p:txBody>
